--- a/cours/Module TIC/Série Officielle 01-10/TD_TIC_01_Introduction_aux_TIC_FR.pptx
+++ b/cours/Module TIC/Série Officielle 01-10/TD_TIC_01_Introduction_aux_TIC_FR.pptx
@@ -4,9 +4,6 @@
   <p:sldMasterIdLst>
     <p:sldMasterId id="2147483648" r:id="rId1"/>
   </p:sldMasterIdLst>
-  <p:notesMasterIdLst>
-    <p:notesMasterId r:id="rId33"/>
-  </p:notesMasterIdLst>
   <p:sldIdLst>
     <p:sldId id="256" r:id="rId7"/>
     <p:sldId id="257" r:id="rId8"/>
@@ -18,6 +15,12 @@
     <p:sldId id="263" r:id="rId14"/>
     <p:sldId id="264" r:id="rId15"/>
     <p:sldId id="265" r:id="rId16"/>
+    <p:sldId id="266" r:id="rId17"/>
+    <p:sldId id="267" r:id="rId18"/>
+    <p:sldId id="268" r:id="rId19"/>
+    <p:sldId id="269" r:id="rId20"/>
+    <p:sldId id="270" r:id="rId21"/>
+    <p:sldId id="271" r:id="rId22"/>
   </p:sldIdLst>
   <p:sldSz cx="9144000" cy="6858000" type="screen4x3"/>
   <p:notesSz cx="6858000" cy="9144000"/>
@@ -116,372 +119,7 @@
       </a:defRPr>
     </a:lvl9pPr>
   </p:defaultTextStyle>
-  <p:extLst>
-    <p:ext uri="{EFAFB233-063F-42B5-8137-9DF3F51BA10A}">
-      <p15:sldGuideLst xmlns:p15="http://schemas.microsoft.com/office/powerpoint/2012/main">
-        <p15:guide id="1" orient="horz" pos="2160">
-          <p15:clr>
-            <a:srgbClr val="A4A3A4"/>
-          </p15:clr>
-        </p15:guide>
-        <p15:guide id="2" pos="2880">
-          <p15:clr>
-            <a:srgbClr val="A4A3A4"/>
-          </p15:clr>
-        </p15:guide>
-      </p15:sldGuideLst>
-    </p:ext>
-  </p:extLst>
 </p:presentation>
-</file>
-
-<file path=ppt/notesMasters/notesMaster1.xml><?xml version="1.0" encoding="utf-8"?>
-<p:notesMaster xmlns:a="http://schemas.openxmlformats.org/drawingml/2006/main" xmlns:r="http://schemas.openxmlformats.org/officeDocument/2006/relationships" xmlns:p="http://schemas.openxmlformats.org/presentationml/2006/main">
-  <p:cSld>
-    <p:bg>
-      <p:bgRef idx="1001">
-        <a:schemeClr val="bg1"/>
-      </p:bgRef>
-    </p:bg>
-    <p:spTree>
-      <p:nvGrpSpPr>
-        <p:cNvPr id="1" name=""/>
-        <p:cNvGrpSpPr/>
-        <p:nvPr/>
-      </p:nvGrpSpPr>
-      <p:grpSpPr>
-        <a:xfrm>
-          <a:off x="0" y="0"/>
-          <a:ext cx="0" cy="0"/>
-          <a:chOff x="0" y="0"/>
-          <a:chExt cx="0" cy="0"/>
-        </a:xfrm>
-      </p:grpSpPr>
-      <p:sp>
-        <p:nvSpPr>
-          <p:cNvPr id="2" name="Espace réservé de l'en-tête 1"/>
-          <p:cNvSpPr>
-            <a:spLocks noGrp="1"/>
-          </p:cNvSpPr>
-          <p:nvPr>
-            <p:ph type="hdr" sz="quarter"/>
-          </p:nvPr>
-        </p:nvSpPr>
-        <p:spPr>
-          <a:xfrm>
-            <a:off x="0" y="0"/>
-            <a:ext cx="2971800" cy="458788"/>
-          </a:xfrm>
-          <a:prstGeom prst="rect">
-            <a:avLst/>
-          </a:prstGeom>
-        </p:spPr>
-        <p:txBody>
-          <a:bodyPr vert="horz" lIns="91440" tIns="45720" rIns="91440" bIns="45720" rtlCol="0"/>
-          <a:lstStyle>
-            <a:lvl1pPr algn="l">
-              <a:defRPr sz="1200"/>
-            </a:lvl1pPr>
-          </a:lstStyle>
-          <a:p>
-            <a:endParaRPr lang="fr-FR"/>
-          </a:p>
-        </p:txBody>
-      </p:sp>
-      <p:sp>
-        <p:nvSpPr>
-          <p:cNvPr id="3" name="Espace réservé de la date 2"/>
-          <p:cNvSpPr>
-            <a:spLocks noGrp="1"/>
-          </p:cNvSpPr>
-          <p:nvPr>
-            <p:ph type="dt" idx="1"/>
-          </p:nvPr>
-        </p:nvSpPr>
-        <p:spPr>
-          <a:xfrm>
-            <a:off x="3884613" y="0"/>
-            <a:ext cx="2971800" cy="458788"/>
-          </a:xfrm>
-          <a:prstGeom prst="rect">
-            <a:avLst/>
-          </a:prstGeom>
-        </p:spPr>
-        <p:txBody>
-          <a:bodyPr vert="horz" lIns="91440" tIns="45720" rIns="91440" bIns="45720" rtlCol="0"/>
-          <a:lstStyle>
-            <a:lvl1pPr algn="r">
-              <a:defRPr sz="1200"/>
-            </a:lvl1pPr>
-          </a:lstStyle>
-          <a:p>
-            <a:fld id="{B8F0B2C1-4194-45A7-9834-731A4F36BABD}" type="datetimeFigureOut">
-              <a:rPr lang="fr-FR" smtClean="0"/>
-              <a:t>16/05/2026</a:t>
-            </a:fld>
-            <a:endParaRPr lang="fr-FR"/>
-          </a:p>
-        </p:txBody>
-      </p:sp>
-      <p:sp>
-        <p:nvSpPr>
-          <p:cNvPr id="4" name="Espace réservé de l'image des diapositives 3"/>
-          <p:cNvSpPr>
-            <a:spLocks noGrp="1" noRot="1" noChangeAspect="1"/>
-          </p:cNvSpPr>
-          <p:nvPr>
-            <p:ph type="sldImg" idx="2"/>
-          </p:nvPr>
-        </p:nvSpPr>
-        <p:spPr>
-          <a:xfrm>
-            <a:off x="1371600" y="1143000"/>
-            <a:ext cx="4114800" cy="3086100"/>
-          </a:xfrm>
-          <a:prstGeom prst="rect">
-            <a:avLst/>
-          </a:prstGeom>
-          <a:noFill/>
-          <a:ln w="12700">
-            <a:solidFill>
-              <a:prstClr val="black"/>
-            </a:solidFill>
-          </a:ln>
-        </p:spPr>
-        <p:txBody>
-          <a:bodyPr vert="horz" lIns="91440" tIns="45720" rIns="91440" bIns="45720" rtlCol="0" anchor="ctr"/>
-          <a:lstStyle/>
-          <a:p>
-            <a:endParaRPr lang="fr-FR"/>
-          </a:p>
-        </p:txBody>
-      </p:sp>
-      <p:sp>
-        <p:nvSpPr>
-          <p:cNvPr id="5" name="Espace réservé des notes 4"/>
-          <p:cNvSpPr>
-            <a:spLocks noGrp="1"/>
-          </p:cNvSpPr>
-          <p:nvPr>
-            <p:ph type="body" sz="quarter" idx="3"/>
-          </p:nvPr>
-        </p:nvSpPr>
-        <p:spPr>
-          <a:xfrm>
-            <a:off x="685800" y="4400550"/>
-            <a:ext cx="5486400" cy="3600450"/>
-          </a:xfrm>
-          <a:prstGeom prst="rect">
-            <a:avLst/>
-          </a:prstGeom>
-        </p:spPr>
-        <p:txBody>
-          <a:bodyPr vert="horz" lIns="91440" tIns="45720" rIns="91440" bIns="45720" rtlCol="0"/>
-          <a:lstStyle/>
-          <a:p>
-            <a:pPr lvl="0"/>
-            <a:r>
-              <a:rPr lang="fr-FR"/>
-              <a:t>Cliquez pour modifier les styles du texte du masque</a:t>
-            </a:r>
-          </a:p>
-          <a:p>
-            <a:pPr lvl="1"/>
-            <a:r>
-              <a:rPr lang="fr-FR"/>
-              <a:t>Deuxième niveau</a:t>
-            </a:r>
-          </a:p>
-          <a:p>
-            <a:pPr lvl="2"/>
-            <a:r>
-              <a:rPr lang="fr-FR"/>
-              <a:t>Troisième niveau</a:t>
-            </a:r>
-          </a:p>
-          <a:p>
-            <a:pPr lvl="3"/>
-            <a:r>
-              <a:rPr lang="fr-FR"/>
-              <a:t>Quatrième niveau</a:t>
-            </a:r>
-          </a:p>
-          <a:p>
-            <a:pPr lvl="4"/>
-            <a:r>
-              <a:rPr lang="fr-FR"/>
-              <a:t>Cinquième niveau</a:t>
-            </a:r>
-          </a:p>
-        </p:txBody>
-      </p:sp>
-      <p:sp>
-        <p:nvSpPr>
-          <p:cNvPr id="6" name="Espace réservé du pied de page 5"/>
-          <p:cNvSpPr>
-            <a:spLocks noGrp="1"/>
-          </p:cNvSpPr>
-          <p:nvPr>
-            <p:ph type="ftr" sz="quarter" idx="4"/>
-          </p:nvPr>
-        </p:nvSpPr>
-        <p:spPr>
-          <a:xfrm>
-            <a:off x="0" y="8685213"/>
-            <a:ext cx="2971800" cy="458787"/>
-          </a:xfrm>
-          <a:prstGeom prst="rect">
-            <a:avLst/>
-          </a:prstGeom>
-        </p:spPr>
-        <p:txBody>
-          <a:bodyPr vert="horz" lIns="91440" tIns="45720" rIns="91440" bIns="45720" rtlCol="0" anchor="b"/>
-          <a:lstStyle>
-            <a:lvl1pPr algn="l">
-              <a:defRPr sz="1200"/>
-            </a:lvl1pPr>
-          </a:lstStyle>
-          <a:p>
-            <a:endParaRPr lang="fr-FR"/>
-          </a:p>
-        </p:txBody>
-      </p:sp>
-      <p:sp>
-        <p:nvSpPr>
-          <p:cNvPr id="7" name="Espace réservé du numéro de diapositive 6"/>
-          <p:cNvSpPr>
-            <a:spLocks noGrp="1"/>
-          </p:cNvSpPr>
-          <p:nvPr>
-            <p:ph type="sldNum" sz="quarter" idx="5"/>
-          </p:nvPr>
-        </p:nvSpPr>
-        <p:spPr>
-          <a:xfrm>
-            <a:off x="3884613" y="8685213"/>
-            <a:ext cx="2971800" cy="458787"/>
-          </a:xfrm>
-          <a:prstGeom prst="rect">
-            <a:avLst/>
-          </a:prstGeom>
-        </p:spPr>
-        <p:txBody>
-          <a:bodyPr vert="horz" lIns="91440" tIns="45720" rIns="91440" bIns="45720" rtlCol="0" anchor="b"/>
-          <a:lstStyle>
-            <a:lvl1pPr algn="r">
-              <a:defRPr sz="1200"/>
-            </a:lvl1pPr>
-          </a:lstStyle>
-          <a:p>
-            <a:fld id="{EDB5666F-E79B-4A29-9A64-FA4855FAABBD}" type="slidenum">
-              <a:rPr lang="fr-FR" smtClean="0"/>
-              <a:t>‹N°›</a:t>
-            </a:fld>
-            <a:endParaRPr lang="fr-FR"/>
-          </a:p>
-        </p:txBody>
-      </p:sp>
-    </p:spTree>
-    <p:extLst>
-      <p:ext uri="{BB962C8B-B14F-4D97-AF65-F5344CB8AC3E}">
-        <p14:creationId xmlns:p14="http://schemas.microsoft.com/office/powerpoint/2010/main" val="4057233482"/>
-      </p:ext>
-    </p:extLst>
-  </p:cSld>
-  <p:clrMap bg1="lt1" tx1="dk1" bg2="lt2" tx2="dk2" accent1="accent1" accent2="accent2" accent3="accent3" accent4="accent4" accent5="accent5" accent6="accent6" hlink="hlink" folHlink="folHlink"/>
-  <p:notesStyle>
-    <a:lvl1pPr marL="0" algn="l" defTabSz="914400" rtl="0" eaLnBrk="1" latinLnBrk="0" hangingPunct="1">
-      <a:defRPr sz="1200" kern="1200">
-        <a:solidFill>
-          <a:schemeClr val="tx1"/>
-        </a:solidFill>
-        <a:latin typeface="+mn-lt"/>
-        <a:ea typeface="+mn-ea"/>
-        <a:cs typeface="+mn-cs"/>
-      </a:defRPr>
-    </a:lvl1pPr>
-    <a:lvl2pPr marL="457200" algn="l" defTabSz="914400" rtl="0" eaLnBrk="1" latinLnBrk="0" hangingPunct="1">
-      <a:defRPr sz="1200" kern="1200">
-        <a:solidFill>
-          <a:schemeClr val="tx1"/>
-        </a:solidFill>
-        <a:latin typeface="+mn-lt"/>
-        <a:ea typeface="+mn-ea"/>
-        <a:cs typeface="+mn-cs"/>
-      </a:defRPr>
-    </a:lvl2pPr>
-    <a:lvl3pPr marL="914400" algn="l" defTabSz="914400" rtl="0" eaLnBrk="1" latinLnBrk="0" hangingPunct="1">
-      <a:defRPr sz="1200" kern="1200">
-        <a:solidFill>
-          <a:schemeClr val="tx1"/>
-        </a:solidFill>
-        <a:latin typeface="+mn-lt"/>
-        <a:ea typeface="+mn-ea"/>
-        <a:cs typeface="+mn-cs"/>
-      </a:defRPr>
-    </a:lvl3pPr>
-    <a:lvl4pPr marL="1371600" algn="l" defTabSz="914400" rtl="0" eaLnBrk="1" latinLnBrk="0" hangingPunct="1">
-      <a:defRPr sz="1200" kern="1200">
-        <a:solidFill>
-          <a:schemeClr val="tx1"/>
-        </a:solidFill>
-        <a:latin typeface="+mn-lt"/>
-        <a:ea typeface="+mn-ea"/>
-        <a:cs typeface="+mn-cs"/>
-      </a:defRPr>
-    </a:lvl4pPr>
-    <a:lvl5pPr marL="1828800" algn="l" defTabSz="914400" rtl="0" eaLnBrk="1" latinLnBrk="0" hangingPunct="1">
-      <a:defRPr sz="1200" kern="1200">
-        <a:solidFill>
-          <a:schemeClr val="tx1"/>
-        </a:solidFill>
-        <a:latin typeface="+mn-lt"/>
-        <a:ea typeface="+mn-ea"/>
-        <a:cs typeface="+mn-cs"/>
-      </a:defRPr>
-    </a:lvl5pPr>
-    <a:lvl6pPr marL="2286000" algn="l" defTabSz="914400" rtl="0" eaLnBrk="1" latinLnBrk="0" hangingPunct="1">
-      <a:defRPr sz="1200" kern="1200">
-        <a:solidFill>
-          <a:schemeClr val="tx1"/>
-        </a:solidFill>
-        <a:latin typeface="+mn-lt"/>
-        <a:ea typeface="+mn-ea"/>
-        <a:cs typeface="+mn-cs"/>
-      </a:defRPr>
-    </a:lvl6pPr>
-    <a:lvl7pPr marL="2743200" algn="l" defTabSz="914400" rtl="0" eaLnBrk="1" latinLnBrk="0" hangingPunct="1">
-      <a:defRPr sz="1200" kern="1200">
-        <a:solidFill>
-          <a:schemeClr val="tx1"/>
-        </a:solidFill>
-        <a:latin typeface="+mn-lt"/>
-        <a:ea typeface="+mn-ea"/>
-        <a:cs typeface="+mn-cs"/>
-      </a:defRPr>
-    </a:lvl7pPr>
-    <a:lvl8pPr marL="3200400" algn="l" defTabSz="914400" rtl="0" eaLnBrk="1" latinLnBrk="0" hangingPunct="1">
-      <a:defRPr sz="1200" kern="1200">
-        <a:solidFill>
-          <a:schemeClr val="tx1"/>
-        </a:solidFill>
-        <a:latin typeface="+mn-lt"/>
-        <a:ea typeface="+mn-ea"/>
-        <a:cs typeface="+mn-cs"/>
-      </a:defRPr>
-    </a:lvl8pPr>
-    <a:lvl9pPr marL="3657600" algn="l" defTabSz="914400" rtl="0" eaLnBrk="1" latinLnBrk="0" hangingPunct="1">
-      <a:defRPr sz="1200" kern="1200">
-        <a:solidFill>
-          <a:schemeClr val="tx1"/>
-        </a:solidFill>
-        <a:latin typeface="+mn-lt"/>
-        <a:ea typeface="+mn-ea"/>
-        <a:cs typeface="+mn-cs"/>
-      </a:defRPr>
-    </a:lvl9pPr>
-  </p:notesStyle>
-</p:notesMaster>
 </file>
 
 <file path=ppt/slideLayouts/slideLayout1.xml><?xml version="1.0" encoding="utf-8"?>
@@ -522,9 +160,10 @@
           <a:lstStyle/>
           <a:p>
             <a:r>
-              <a:rPr lang="en-US"/>
+              <a:rPr lang="en-US" smtClean="0"/>
               <a:t>Click to edit Master title style</a:t>
             </a:r>
+            <a:endParaRPr lang="en-US"/>
           </a:p>
         </p:txBody>
       </p:sp>
@@ -640,9 +279,10 @@
           </a:lstStyle>
           <a:p>
             <a:r>
-              <a:rPr lang="en-US"/>
+              <a:rPr lang="en-US" smtClean="0"/>
               <a:t>Click to edit Master subtitle style</a:t>
             </a:r>
+            <a:endParaRPr lang="en-US"/>
           </a:p>
         </p:txBody>
       </p:sp>
@@ -663,7 +303,7 @@
           <a:p>
             <a:fld id="{5BCAD085-E8A6-8845-BD4E-CB4CCA059FC4}" type="datetimeFigureOut">
               <a:rPr lang="en-US" smtClean="0"/>
-              <a:t>5/16/2026</a:t>
+              <a:t>1/27/13</a:t>
             </a:fld>
             <a:endParaRPr lang="en-US"/>
           </a:p>
@@ -705,7 +345,7 @@
           <a:p>
             <a:fld id="{C1FF6DA9-008F-8B48-92A6-B652298478BF}" type="slidenum">
               <a:rPr lang="en-US" smtClean="0"/>
-              <a:t>‹N°›</a:t>
+              <a:t>‹#›</a:t>
             </a:fld>
             <a:endParaRPr lang="en-US"/>
           </a:p>
@@ -757,9 +397,10 @@
           <a:lstStyle/>
           <a:p>
             <a:r>
-              <a:rPr lang="en-US"/>
+              <a:rPr lang="en-US" smtClean="0"/>
               <a:t>Click to edit Master title style</a:t>
             </a:r>
+            <a:endParaRPr lang="en-US"/>
           </a:p>
         </p:txBody>
       </p:sp>
@@ -780,37 +421,38 @@
           <a:p>
             <a:pPr lvl="0"/>
             <a:r>
-              <a:rPr lang="en-US"/>
+              <a:rPr lang="en-US" smtClean="0"/>
               <a:t>Click to edit Master text styles</a:t>
             </a:r>
           </a:p>
           <a:p>
             <a:pPr lvl="1"/>
             <a:r>
-              <a:rPr lang="en-US"/>
+              <a:rPr lang="en-US" smtClean="0"/>
               <a:t>Second level</a:t>
             </a:r>
           </a:p>
           <a:p>
             <a:pPr lvl="2"/>
             <a:r>
-              <a:rPr lang="en-US"/>
+              <a:rPr lang="en-US" smtClean="0"/>
               <a:t>Third level</a:t>
             </a:r>
           </a:p>
           <a:p>
             <a:pPr lvl="3"/>
             <a:r>
-              <a:rPr lang="en-US"/>
+              <a:rPr lang="en-US" smtClean="0"/>
               <a:t>Fourth level</a:t>
             </a:r>
           </a:p>
           <a:p>
             <a:pPr lvl="4"/>
             <a:r>
-              <a:rPr lang="en-US"/>
+              <a:rPr lang="en-US" smtClean="0"/>
               <a:t>Fifth level</a:t>
             </a:r>
+            <a:endParaRPr lang="en-US"/>
           </a:p>
         </p:txBody>
       </p:sp>
@@ -831,7 +473,7 @@
           <a:p>
             <a:fld id="{5BCAD085-E8A6-8845-BD4E-CB4CCA059FC4}" type="datetimeFigureOut">
               <a:rPr lang="en-US" smtClean="0"/>
-              <a:t>5/16/2026</a:t>
+              <a:t>1/27/13</a:t>
             </a:fld>
             <a:endParaRPr lang="en-US"/>
           </a:p>
@@ -873,7 +515,7 @@
           <a:p>
             <a:fld id="{C1FF6DA9-008F-8B48-92A6-B652298478BF}" type="slidenum">
               <a:rPr lang="en-US" smtClean="0"/>
-              <a:t>‹N°›</a:t>
+              <a:t>‹#›</a:t>
             </a:fld>
             <a:endParaRPr lang="en-US"/>
           </a:p>
@@ -930,9 +572,10 @@
           <a:lstStyle/>
           <a:p>
             <a:r>
-              <a:rPr lang="en-US"/>
+              <a:rPr lang="en-US" smtClean="0"/>
               <a:t>Click to edit Master title style</a:t>
             </a:r>
+            <a:endParaRPr lang="en-US"/>
           </a:p>
         </p:txBody>
       </p:sp>
@@ -958,37 +601,38 @@
           <a:p>
             <a:pPr lvl="0"/>
             <a:r>
-              <a:rPr lang="en-US"/>
+              <a:rPr lang="en-US" smtClean="0"/>
               <a:t>Click to edit Master text styles</a:t>
             </a:r>
           </a:p>
           <a:p>
             <a:pPr lvl="1"/>
             <a:r>
-              <a:rPr lang="en-US"/>
+              <a:rPr lang="en-US" smtClean="0"/>
               <a:t>Second level</a:t>
             </a:r>
           </a:p>
           <a:p>
             <a:pPr lvl="2"/>
             <a:r>
-              <a:rPr lang="en-US"/>
+              <a:rPr lang="en-US" smtClean="0"/>
               <a:t>Third level</a:t>
             </a:r>
           </a:p>
           <a:p>
             <a:pPr lvl="3"/>
             <a:r>
-              <a:rPr lang="en-US"/>
+              <a:rPr lang="en-US" smtClean="0"/>
               <a:t>Fourth level</a:t>
             </a:r>
           </a:p>
           <a:p>
             <a:pPr lvl="4"/>
             <a:r>
-              <a:rPr lang="en-US"/>
+              <a:rPr lang="en-US" smtClean="0"/>
               <a:t>Fifth level</a:t>
             </a:r>
+            <a:endParaRPr lang="en-US"/>
           </a:p>
         </p:txBody>
       </p:sp>
@@ -1009,7 +653,7 @@
           <a:p>
             <a:fld id="{5BCAD085-E8A6-8845-BD4E-CB4CCA059FC4}" type="datetimeFigureOut">
               <a:rPr lang="en-US" smtClean="0"/>
-              <a:t>5/16/2026</a:t>
+              <a:t>1/27/13</a:t>
             </a:fld>
             <a:endParaRPr lang="en-US"/>
           </a:p>
@@ -1051,7 +695,7 @@
           <a:p>
             <a:fld id="{C1FF6DA9-008F-8B48-92A6-B652298478BF}" type="slidenum">
               <a:rPr lang="en-US" smtClean="0"/>
-              <a:t>‹N°›</a:t>
+              <a:t>‹#›</a:t>
             </a:fld>
             <a:endParaRPr lang="en-US"/>
           </a:p>
@@ -1103,9 +747,10 @@
           <a:lstStyle/>
           <a:p>
             <a:r>
-              <a:rPr lang="en-US"/>
+              <a:rPr lang="en-US" smtClean="0"/>
               <a:t>Click to edit Master title style</a:t>
             </a:r>
+            <a:endParaRPr lang="en-US"/>
           </a:p>
         </p:txBody>
       </p:sp>
@@ -1126,37 +771,38 @@
           <a:p>
             <a:pPr lvl="0"/>
             <a:r>
-              <a:rPr lang="en-US"/>
+              <a:rPr lang="en-US" smtClean="0"/>
               <a:t>Click to edit Master text styles</a:t>
             </a:r>
           </a:p>
           <a:p>
             <a:pPr lvl="1"/>
             <a:r>
-              <a:rPr lang="en-US"/>
+              <a:rPr lang="en-US" smtClean="0"/>
               <a:t>Second level</a:t>
             </a:r>
           </a:p>
           <a:p>
             <a:pPr lvl="2"/>
             <a:r>
-              <a:rPr lang="en-US"/>
+              <a:rPr lang="en-US" smtClean="0"/>
               <a:t>Third level</a:t>
             </a:r>
           </a:p>
           <a:p>
             <a:pPr lvl="3"/>
             <a:r>
-              <a:rPr lang="en-US"/>
+              <a:rPr lang="en-US" smtClean="0"/>
               <a:t>Fourth level</a:t>
             </a:r>
           </a:p>
           <a:p>
             <a:pPr lvl="4"/>
             <a:r>
-              <a:rPr lang="en-US"/>
+              <a:rPr lang="en-US" smtClean="0"/>
               <a:t>Fifth level</a:t>
             </a:r>
+            <a:endParaRPr lang="en-US"/>
           </a:p>
         </p:txBody>
       </p:sp>
@@ -1177,7 +823,7 @@
           <a:p>
             <a:fld id="{5BCAD085-E8A6-8845-BD4E-CB4CCA059FC4}" type="datetimeFigureOut">
               <a:rPr lang="en-US" smtClean="0"/>
-              <a:t>5/16/2026</a:t>
+              <a:t>1/27/13</a:t>
             </a:fld>
             <a:endParaRPr lang="en-US"/>
           </a:p>
@@ -1219,7 +865,7 @@
           <a:p>
             <a:fld id="{C1FF6DA9-008F-8B48-92A6-B652298478BF}" type="slidenum">
               <a:rPr lang="en-US" smtClean="0"/>
-              <a:t>‹N°›</a:t>
+              <a:t>‹#›</a:t>
             </a:fld>
             <a:endParaRPr lang="en-US"/>
           </a:p>
@@ -1280,9 +926,10 @@
           </a:lstStyle>
           <a:p>
             <a:r>
-              <a:rPr lang="en-US"/>
+              <a:rPr lang="en-US" smtClean="0"/>
               <a:t>Click to edit Master title style</a:t>
             </a:r>
+            <a:endParaRPr lang="en-US"/>
           </a:p>
         </p:txBody>
       </p:sp>
@@ -1399,7 +1046,7 @@
           <a:p>
             <a:pPr lvl="0"/>
             <a:r>
-              <a:rPr lang="en-US"/>
+              <a:rPr lang="en-US" smtClean="0"/>
               <a:t>Click to edit Master text styles</a:t>
             </a:r>
           </a:p>
@@ -1422,7 +1069,7 @@
           <a:p>
             <a:fld id="{5BCAD085-E8A6-8845-BD4E-CB4CCA059FC4}" type="datetimeFigureOut">
               <a:rPr lang="en-US" smtClean="0"/>
-              <a:t>5/16/2026</a:t>
+              <a:t>1/27/13</a:t>
             </a:fld>
             <a:endParaRPr lang="en-US"/>
           </a:p>
@@ -1464,7 +1111,7 @@
           <a:p>
             <a:fld id="{C1FF6DA9-008F-8B48-92A6-B652298478BF}" type="slidenum">
               <a:rPr lang="en-US" smtClean="0"/>
-              <a:t>‹N°›</a:t>
+              <a:t>‹#›</a:t>
             </a:fld>
             <a:endParaRPr lang="en-US"/>
           </a:p>
@@ -1516,9 +1163,10 @@
           <a:lstStyle/>
           <a:p>
             <a:r>
-              <a:rPr lang="en-US"/>
+              <a:rPr lang="en-US" smtClean="0"/>
               <a:t>Click to edit Master title style</a:t>
             </a:r>
+            <a:endParaRPr lang="en-US"/>
           </a:p>
         </p:txBody>
       </p:sp>
@@ -1572,37 +1220,38 @@
           <a:p>
             <a:pPr lvl="0"/>
             <a:r>
-              <a:rPr lang="en-US"/>
+              <a:rPr lang="en-US" smtClean="0"/>
               <a:t>Click to edit Master text styles</a:t>
             </a:r>
           </a:p>
           <a:p>
             <a:pPr lvl="1"/>
             <a:r>
-              <a:rPr lang="en-US"/>
+              <a:rPr lang="en-US" smtClean="0"/>
               <a:t>Second level</a:t>
             </a:r>
           </a:p>
           <a:p>
             <a:pPr lvl="2"/>
             <a:r>
-              <a:rPr lang="en-US"/>
+              <a:rPr lang="en-US" smtClean="0"/>
               <a:t>Third level</a:t>
             </a:r>
           </a:p>
           <a:p>
             <a:pPr lvl="3"/>
             <a:r>
-              <a:rPr lang="en-US"/>
+              <a:rPr lang="en-US" smtClean="0"/>
               <a:t>Fourth level</a:t>
             </a:r>
           </a:p>
           <a:p>
             <a:pPr lvl="4"/>
             <a:r>
-              <a:rPr lang="en-US"/>
+              <a:rPr lang="en-US" smtClean="0"/>
               <a:t>Fifth level</a:t>
             </a:r>
+            <a:endParaRPr lang="en-US"/>
           </a:p>
         </p:txBody>
       </p:sp>
@@ -1656,37 +1305,38 @@
           <a:p>
             <a:pPr lvl="0"/>
             <a:r>
-              <a:rPr lang="en-US"/>
+              <a:rPr lang="en-US" smtClean="0"/>
               <a:t>Click to edit Master text styles</a:t>
             </a:r>
           </a:p>
           <a:p>
             <a:pPr lvl="1"/>
             <a:r>
-              <a:rPr lang="en-US"/>
+              <a:rPr lang="en-US" smtClean="0"/>
               <a:t>Second level</a:t>
             </a:r>
           </a:p>
           <a:p>
             <a:pPr lvl="2"/>
             <a:r>
-              <a:rPr lang="en-US"/>
+              <a:rPr lang="en-US" smtClean="0"/>
               <a:t>Third level</a:t>
             </a:r>
           </a:p>
           <a:p>
             <a:pPr lvl="3"/>
             <a:r>
-              <a:rPr lang="en-US"/>
+              <a:rPr lang="en-US" smtClean="0"/>
               <a:t>Fourth level</a:t>
             </a:r>
           </a:p>
           <a:p>
             <a:pPr lvl="4"/>
             <a:r>
-              <a:rPr lang="en-US"/>
+              <a:rPr lang="en-US" smtClean="0"/>
               <a:t>Fifth level</a:t>
             </a:r>
+            <a:endParaRPr lang="en-US"/>
           </a:p>
         </p:txBody>
       </p:sp>
@@ -1707,7 +1357,7 @@
           <a:p>
             <a:fld id="{5BCAD085-E8A6-8845-BD4E-CB4CCA059FC4}" type="datetimeFigureOut">
               <a:rPr lang="en-US" smtClean="0"/>
-              <a:t>5/16/2026</a:t>
+              <a:t>1/27/13</a:t>
             </a:fld>
             <a:endParaRPr lang="en-US"/>
           </a:p>
@@ -1749,7 +1399,7 @@
           <a:p>
             <a:fld id="{C1FF6DA9-008F-8B48-92A6-B652298478BF}" type="slidenum">
               <a:rPr lang="en-US" smtClean="0"/>
-              <a:t>‹N°›</a:t>
+              <a:t>‹#›</a:t>
             </a:fld>
             <a:endParaRPr lang="en-US"/>
           </a:p>
@@ -1805,9 +1455,10 @@
           </a:lstStyle>
           <a:p>
             <a:r>
-              <a:rPr lang="en-US"/>
+              <a:rPr lang="en-US" smtClean="0"/>
               <a:t>Click to edit Master title style</a:t>
             </a:r>
+            <a:endParaRPr lang="en-US"/>
           </a:p>
         </p:txBody>
       </p:sp>
@@ -1870,7 +1521,7 @@
           <a:p>
             <a:pPr lvl="0"/>
             <a:r>
-              <a:rPr lang="en-US"/>
+              <a:rPr lang="en-US" smtClean="0"/>
               <a:t>Click to edit Master text styles</a:t>
             </a:r>
           </a:p>
@@ -1926,37 +1577,38 @@
           <a:p>
             <a:pPr lvl="0"/>
             <a:r>
-              <a:rPr lang="en-US"/>
+              <a:rPr lang="en-US" smtClean="0"/>
               <a:t>Click to edit Master text styles</a:t>
             </a:r>
           </a:p>
           <a:p>
             <a:pPr lvl="1"/>
             <a:r>
-              <a:rPr lang="en-US"/>
+              <a:rPr lang="en-US" smtClean="0"/>
               <a:t>Second level</a:t>
             </a:r>
           </a:p>
           <a:p>
             <a:pPr lvl="2"/>
             <a:r>
-              <a:rPr lang="en-US"/>
+              <a:rPr lang="en-US" smtClean="0"/>
               <a:t>Third level</a:t>
             </a:r>
           </a:p>
           <a:p>
             <a:pPr lvl="3"/>
             <a:r>
-              <a:rPr lang="en-US"/>
+              <a:rPr lang="en-US" smtClean="0"/>
               <a:t>Fourth level</a:t>
             </a:r>
           </a:p>
           <a:p>
             <a:pPr lvl="4"/>
             <a:r>
-              <a:rPr lang="en-US"/>
+              <a:rPr lang="en-US" smtClean="0"/>
               <a:t>Fifth level</a:t>
             </a:r>
+            <a:endParaRPr lang="en-US"/>
           </a:p>
         </p:txBody>
       </p:sp>
@@ -2019,7 +1671,7 @@
           <a:p>
             <a:pPr lvl="0"/>
             <a:r>
-              <a:rPr lang="en-US"/>
+              <a:rPr lang="en-US" smtClean="0"/>
               <a:t>Click to edit Master text styles</a:t>
             </a:r>
           </a:p>
@@ -2075,37 +1727,38 @@
           <a:p>
             <a:pPr lvl="0"/>
             <a:r>
-              <a:rPr lang="en-US"/>
+              <a:rPr lang="en-US" smtClean="0"/>
               <a:t>Click to edit Master text styles</a:t>
             </a:r>
           </a:p>
           <a:p>
             <a:pPr lvl="1"/>
             <a:r>
-              <a:rPr lang="en-US"/>
+              <a:rPr lang="en-US" smtClean="0"/>
               <a:t>Second level</a:t>
             </a:r>
           </a:p>
           <a:p>
             <a:pPr lvl="2"/>
             <a:r>
-              <a:rPr lang="en-US"/>
+              <a:rPr lang="en-US" smtClean="0"/>
               <a:t>Third level</a:t>
             </a:r>
           </a:p>
           <a:p>
             <a:pPr lvl="3"/>
             <a:r>
-              <a:rPr lang="en-US"/>
+              <a:rPr lang="en-US" smtClean="0"/>
               <a:t>Fourth level</a:t>
             </a:r>
           </a:p>
           <a:p>
             <a:pPr lvl="4"/>
             <a:r>
-              <a:rPr lang="en-US"/>
+              <a:rPr lang="en-US" smtClean="0"/>
               <a:t>Fifth level</a:t>
             </a:r>
+            <a:endParaRPr lang="en-US"/>
           </a:p>
         </p:txBody>
       </p:sp>
@@ -2126,7 +1779,7 @@
           <a:p>
             <a:fld id="{5BCAD085-E8A6-8845-BD4E-CB4CCA059FC4}" type="datetimeFigureOut">
               <a:rPr lang="en-US" smtClean="0"/>
-              <a:t>5/16/2026</a:t>
+              <a:t>1/27/13</a:t>
             </a:fld>
             <a:endParaRPr lang="en-US"/>
           </a:p>
@@ -2168,7 +1821,7 @@
           <a:p>
             <a:fld id="{C1FF6DA9-008F-8B48-92A6-B652298478BF}" type="slidenum">
               <a:rPr lang="en-US" smtClean="0"/>
-              <a:t>‹N°›</a:t>
+              <a:t>‹#›</a:t>
             </a:fld>
             <a:endParaRPr lang="en-US"/>
           </a:p>
@@ -2220,9 +1873,10 @@
           <a:lstStyle/>
           <a:p>
             <a:r>
-              <a:rPr lang="en-US"/>
+              <a:rPr lang="en-US" smtClean="0"/>
               <a:t>Click to edit Master title style</a:t>
             </a:r>
+            <a:endParaRPr lang="en-US"/>
           </a:p>
         </p:txBody>
       </p:sp>
@@ -2243,7 +1897,7 @@
           <a:p>
             <a:fld id="{5BCAD085-E8A6-8845-BD4E-CB4CCA059FC4}" type="datetimeFigureOut">
               <a:rPr lang="en-US" smtClean="0"/>
-              <a:t>5/16/2026</a:t>
+              <a:t>1/27/13</a:t>
             </a:fld>
             <a:endParaRPr lang="en-US"/>
           </a:p>
@@ -2285,7 +1939,7 @@
           <a:p>
             <a:fld id="{C1FF6DA9-008F-8B48-92A6-B652298478BF}" type="slidenum">
               <a:rPr lang="en-US" smtClean="0"/>
-              <a:t>‹N°›</a:t>
+              <a:t>‹#›</a:t>
             </a:fld>
             <a:endParaRPr lang="en-US"/>
           </a:p>
@@ -2338,7 +1992,7 @@
           <a:p>
             <a:fld id="{5BCAD085-E8A6-8845-BD4E-CB4CCA059FC4}" type="datetimeFigureOut">
               <a:rPr lang="en-US" smtClean="0"/>
-              <a:t>5/16/2026</a:t>
+              <a:t>1/27/13</a:t>
             </a:fld>
             <a:endParaRPr lang="en-US"/>
           </a:p>
@@ -2380,7 +2034,7 @@
           <a:p>
             <a:fld id="{C1FF6DA9-008F-8B48-92A6-B652298478BF}" type="slidenum">
               <a:rPr lang="en-US" smtClean="0"/>
-              <a:t>‹N°›</a:t>
+              <a:t>‹#›</a:t>
             </a:fld>
             <a:endParaRPr lang="en-US"/>
           </a:p>
@@ -2441,9 +2095,10 @@
           </a:lstStyle>
           <a:p>
             <a:r>
-              <a:rPr lang="en-US"/>
+              <a:rPr lang="en-US" smtClean="0"/>
               <a:t>Click to edit Master title style</a:t>
             </a:r>
+            <a:endParaRPr lang="en-US"/>
           </a:p>
         </p:txBody>
       </p:sp>
@@ -2497,37 +2152,38 @@
           <a:p>
             <a:pPr lvl="0"/>
             <a:r>
-              <a:rPr lang="en-US"/>
+              <a:rPr lang="en-US" smtClean="0"/>
               <a:t>Click to edit Master text styles</a:t>
             </a:r>
           </a:p>
           <a:p>
             <a:pPr lvl="1"/>
             <a:r>
-              <a:rPr lang="en-US"/>
+              <a:rPr lang="en-US" smtClean="0"/>
               <a:t>Second level</a:t>
             </a:r>
           </a:p>
           <a:p>
             <a:pPr lvl="2"/>
             <a:r>
-              <a:rPr lang="en-US"/>
+              <a:rPr lang="en-US" smtClean="0"/>
               <a:t>Third level</a:t>
             </a:r>
           </a:p>
           <a:p>
             <a:pPr lvl="3"/>
             <a:r>
-              <a:rPr lang="en-US"/>
+              <a:rPr lang="en-US" smtClean="0"/>
               <a:t>Fourth level</a:t>
             </a:r>
           </a:p>
           <a:p>
             <a:pPr lvl="4"/>
             <a:r>
-              <a:rPr lang="en-US"/>
+              <a:rPr lang="en-US" smtClean="0"/>
               <a:t>Fifth level</a:t>
             </a:r>
+            <a:endParaRPr lang="en-US"/>
           </a:p>
         </p:txBody>
       </p:sp>
@@ -2590,7 +2246,7 @@
           <a:p>
             <a:pPr lvl="0"/>
             <a:r>
-              <a:rPr lang="en-US"/>
+              <a:rPr lang="en-US" smtClean="0"/>
               <a:t>Click to edit Master text styles</a:t>
             </a:r>
           </a:p>
@@ -2613,7 +2269,7 @@
           <a:p>
             <a:fld id="{5BCAD085-E8A6-8845-BD4E-CB4CCA059FC4}" type="datetimeFigureOut">
               <a:rPr lang="en-US" smtClean="0"/>
-              <a:t>5/16/2026</a:t>
+              <a:t>1/27/13</a:t>
             </a:fld>
             <a:endParaRPr lang="en-US"/>
           </a:p>
@@ -2655,7 +2311,7 @@
           <a:p>
             <a:fld id="{C1FF6DA9-008F-8B48-92A6-B652298478BF}" type="slidenum">
               <a:rPr lang="en-US" smtClean="0"/>
-              <a:t>‹N°›</a:t>
+              <a:t>‹#›</a:t>
             </a:fld>
             <a:endParaRPr lang="en-US"/>
           </a:p>
@@ -2716,9 +2372,10 @@
           </a:lstStyle>
           <a:p>
             <a:r>
-              <a:rPr lang="en-US"/>
+              <a:rPr lang="en-US" smtClean="0"/>
               <a:t>Click to edit Master title style</a:t>
             </a:r>
+            <a:endParaRPr lang="en-US"/>
           </a:p>
         </p:txBody>
       </p:sp>
@@ -2842,7 +2499,7 @@
           <a:p>
             <a:pPr lvl="0"/>
             <a:r>
-              <a:rPr lang="en-US"/>
+              <a:rPr lang="en-US" smtClean="0"/>
               <a:t>Click to edit Master text styles</a:t>
             </a:r>
           </a:p>
@@ -2865,7 +2522,7 @@
           <a:p>
             <a:fld id="{5BCAD085-E8A6-8845-BD4E-CB4CCA059FC4}" type="datetimeFigureOut">
               <a:rPr lang="en-US" smtClean="0"/>
-              <a:t>5/16/2026</a:t>
+              <a:t>1/27/13</a:t>
             </a:fld>
             <a:endParaRPr lang="en-US"/>
           </a:p>
@@ -2907,7 +2564,7 @@
           <a:p>
             <a:fld id="{C1FF6DA9-008F-8B48-92A6-B652298478BF}" type="slidenum">
               <a:rPr lang="en-US" smtClean="0"/>
-              <a:t>‹N°›</a:t>
+              <a:t>‹#›</a:t>
             </a:fld>
             <a:endParaRPr lang="en-US"/>
           </a:p>
@@ -2974,9 +2631,10 @@
           <a:lstStyle/>
           <a:p>
             <a:r>
-              <a:rPr lang="en-US"/>
+              <a:rPr lang="en-US" smtClean="0"/>
               <a:t>Click to edit Master title style</a:t>
             </a:r>
+            <a:endParaRPr lang="en-US"/>
           </a:p>
         </p:txBody>
       </p:sp>
@@ -3007,37 +2665,38 @@
           <a:p>
             <a:pPr lvl="0"/>
             <a:r>
-              <a:rPr lang="en-US"/>
+              <a:rPr lang="en-US" smtClean="0"/>
               <a:t>Click to edit Master text styles</a:t>
             </a:r>
           </a:p>
           <a:p>
             <a:pPr lvl="1"/>
             <a:r>
-              <a:rPr lang="en-US"/>
+              <a:rPr lang="en-US" smtClean="0"/>
               <a:t>Second level</a:t>
             </a:r>
           </a:p>
           <a:p>
             <a:pPr lvl="2"/>
             <a:r>
-              <a:rPr lang="en-US"/>
+              <a:rPr lang="en-US" smtClean="0"/>
               <a:t>Third level</a:t>
             </a:r>
           </a:p>
           <a:p>
             <a:pPr lvl="3"/>
             <a:r>
-              <a:rPr lang="en-US"/>
+              <a:rPr lang="en-US" smtClean="0"/>
               <a:t>Fourth level</a:t>
             </a:r>
           </a:p>
           <a:p>
             <a:pPr lvl="4"/>
             <a:r>
-              <a:rPr lang="en-US"/>
+              <a:rPr lang="en-US" smtClean="0"/>
               <a:t>Fifth level</a:t>
             </a:r>
+            <a:endParaRPr lang="en-US"/>
           </a:p>
         </p:txBody>
       </p:sp>
@@ -3076,7 +2735,7 @@
           <a:p>
             <a:fld id="{5BCAD085-E8A6-8845-BD4E-CB4CCA059FC4}" type="datetimeFigureOut">
               <a:rPr lang="en-US" smtClean="0"/>
-              <a:t>5/16/2026</a:t>
+              <a:t>1/27/13</a:t>
             </a:fld>
             <a:endParaRPr lang="en-US"/>
           </a:p>
@@ -3154,7 +2813,7 @@
           <a:p>
             <a:fld id="{C1FF6DA9-008F-8B48-92A6-B652298478BF}" type="slidenum">
               <a:rPr lang="en-US" smtClean="0"/>
-              <a:t>‹N°›</a:t>
+              <a:t>‹#›</a:t>
             </a:fld>
             <a:endParaRPr lang="en-US"/>
           </a:p>
@@ -3437,6 +3096,14 @@
 <file path=ppt/slides/slide1.xml><?xml version="1.0" encoding="utf-8"?>
 <p:sld xmlns:a="http://schemas.openxmlformats.org/drawingml/2006/main" xmlns:p="http://schemas.openxmlformats.org/presentationml/2006/main" xmlns:r="http://schemas.openxmlformats.org/officeDocument/2006/relationships">
   <p:cSld>
+    <p:bg>
+      <p:bgPr>
+        <a:solidFill>
+          <a:srgbClr val="143D24"/>
+        </a:solidFill>
+        <a:effectLst/>
+      </p:bgPr>
+    </p:bg>
     <p:spTree>
       <p:nvGrpSpPr>
         <p:cNvPr id="1" name=""/>
@@ -3446,43 +3113,87 @@
       <p:grpSpPr/>
       <p:sp>
         <p:nvSpPr>
-          <p:cNvPr id="2" name="Title 1"/>
-          <p:cNvSpPr>
-            <a:spLocks noGrp="1"/>
-          </p:cNvSpPr>
-          <p:nvPr>
-            <p:ph type="ctrTitle"/>
-          </p:nvPr>
-        </p:nvSpPr>
-        <p:spPr/>
-        <p:txBody>
-          <a:bodyPr/>
-          <a:lstStyle/>
-          <a:p>
-            <a:r>
-              <a:t>TD TIC 01 — Introduction aux TIC</a:t>
-            </a:r>
-          </a:p>
-        </p:txBody>
-      </p:sp>
-      <p:sp>
-        <p:nvSpPr>
-          <p:cNvPr id="3" name="Subtitle 2"/>
-          <p:cNvSpPr>
-            <a:spLocks noGrp="1"/>
-          </p:cNvSpPr>
-          <p:nvPr>
-            <p:ph type="subTitle" idx="1"/>
-          </p:nvPr>
-        </p:nvSpPr>
-        <p:spPr/>
-        <p:txBody>
-          <a:bodyPr/>
-          <a:lstStyle/>
-          <a:p>
-            <a:r>
-              <a:t>Durée : 1h30 (90 min) | BELACEL Madani</a:t>
-            </a:r>
+          <p:cNvPr id="2" name="Rectangle 1"/>
+          <p:cNvSpPr/>
+          <p:nvPr/>
+        </p:nvSpPr>
+        <p:spPr>
+          <a:xfrm>
+            <a:off x="0" y="0"/>
+            <a:ext cx="9144000" cy="54864"/>
+          </a:xfrm>
+          <a:prstGeom prst="rect">
+            <a:avLst/>
+          </a:prstGeom>
+          <a:solidFill>
+            <a:srgbClr val="2E8654"/>
+          </a:solidFill>
+          <a:ln>
+            <a:noFill/>
+          </a:ln>
+        </p:spPr>
+        <p:style>
+          <a:lnRef idx="1">
+            <a:schemeClr val="accent1"/>
+          </a:lnRef>
+          <a:fillRef idx="3">
+            <a:schemeClr val="accent1"/>
+          </a:fillRef>
+          <a:effectRef idx="2">
+            <a:schemeClr val="accent1"/>
+          </a:effectRef>
+          <a:fontRef idx="minor">
+            <a:schemeClr val="lt1"/>
+          </a:fontRef>
+        </p:style>
+        <p:txBody>
+          <a:bodyPr rtlCol="0" anchor="ctr"/>
+          <a:lstStyle/>
+          <a:p>
+            <a:pPr algn="ctr"/>
+          </a:p>
+        </p:txBody>
+      </p:sp>
+      <p:sp>
+        <p:nvSpPr>
+          <p:cNvPr id="3" name="Rectangle 2"/>
+          <p:cNvSpPr/>
+          <p:nvPr/>
+        </p:nvSpPr>
+        <p:spPr>
+          <a:xfrm>
+            <a:off x="3200400" y="1097280"/>
+            <a:ext cx="2743200" cy="548640"/>
+          </a:xfrm>
+          <a:prstGeom prst="rect">
+            <a:avLst/>
+          </a:prstGeom>
+          <a:solidFill>
+            <a:srgbClr val="2E8654"/>
+          </a:solidFill>
+          <a:ln>
+            <a:noFill/>
+          </a:ln>
+        </p:spPr>
+        <p:style>
+          <a:lnRef idx="1">
+            <a:schemeClr val="accent1"/>
+          </a:lnRef>
+          <a:fillRef idx="3">
+            <a:schemeClr val="accent1"/>
+          </a:fillRef>
+          <a:effectRef idx="2">
+            <a:schemeClr val="accent1"/>
+          </a:effectRef>
+          <a:fontRef idx="minor">
+            <a:schemeClr val="lt1"/>
+          </a:fontRef>
+        </p:style>
+        <p:txBody>
+          <a:bodyPr rtlCol="0" anchor="ctr"/>
+          <a:lstStyle/>
+          <a:p>
+            <a:pPr algn="ctr"/>
           </a:p>
         </p:txBody>
       </p:sp>
@@ -3494,8 +3205,8 @@
         </p:nvSpPr>
         <p:spPr>
           <a:xfrm>
-            <a:off x="365760" y="6446520"/>
-            <a:ext cx="8412480" cy="320040"/>
+            <a:off x="3200400" y="1097280"/>
+            <a:ext cx="2743200" cy="548640"/>
           </a:xfrm>
           <a:prstGeom prst="rect">
             <a:avLst/>
@@ -3503,38 +3214,223 @@
           <a:noFill/>
         </p:spPr>
         <p:txBody>
-          <a:bodyPr wrap="none">
+          <a:bodyPr wrap="square">
             <a:spAutoFit/>
           </a:bodyPr>
           <a:lstStyle/>
           <a:p>
             <a:pPr algn="ctr">
-              <a:defRPr sz="900">
-                <a:solidFill>
-                  <a:srgbClr val="404040"/>
+              <a:defRPr sz="1600" b="1">
+                <a:solidFill>
+                  <a:srgbClr val="FFFFFF"/>
                 </a:solidFill>
               </a:defRPr>
             </a:pPr>
             <a:r>
-              <a:t>TD TIC 01  •  Diapositive 1/10</a:t>
-            </a:r>
-          </a:p>
-        </p:txBody>
-      </p:sp>
+              <a:t>COURS TIC 01 - TD</a:t>
+            </a:r>
+          </a:p>
+        </p:txBody>
+      </p:sp>
+      <p:sp>
+        <p:nvSpPr>
+          <p:cNvPr id="5" name="TextBox 4"/>
+          <p:cNvSpPr txBox="1"/>
+          <p:nvPr/>
+        </p:nvSpPr>
+        <p:spPr>
+          <a:xfrm>
+            <a:off x="731520" y="2011680"/>
+            <a:ext cx="7680960" cy="1645920"/>
+          </a:xfrm>
+          <a:prstGeom prst="rect">
+            <a:avLst/>
+          </a:prstGeom>
+          <a:noFill/>
+        </p:spPr>
+        <p:txBody>
+          <a:bodyPr wrap="square">
+            <a:spAutoFit/>
+          </a:bodyPr>
+          <a:lstStyle/>
+          <a:p>
+            <a:pPr algn="ctr">
+              <a:defRPr sz="3200" b="1">
+                <a:solidFill>
+                  <a:srgbClr val="FFFFFF"/>
+                </a:solidFill>
+              </a:defRPr>
+            </a:pPr>
+            <a:r>
+              <a:t>TD TIC 01 — Introduction aux Techniques de l'Information et de la Communication</a:t>
+            </a:r>
+          </a:p>
+        </p:txBody>
+      </p:sp>
+      <p:sp>
+        <p:nvSpPr>
+          <p:cNvPr id="6" name="TextBox 5"/>
+          <p:cNvSpPr txBox="1"/>
+          <p:nvPr/>
+        </p:nvSpPr>
+        <p:spPr>
+          <a:xfrm>
+            <a:off x="731520" y="3840480"/>
+            <a:ext cx="7680960" cy="548640"/>
+          </a:xfrm>
+          <a:prstGeom prst="rect">
+            <a:avLst/>
+          </a:prstGeom>
+          <a:noFill/>
+        </p:spPr>
+        <p:txBody>
+          <a:bodyPr wrap="square">
+            <a:spAutoFit/>
+          </a:bodyPr>
+          <a:lstStyle/>
+          <a:p>
+            <a:pPr algn="ctr">
+              <a:defRPr sz="1800" b="0">
+                <a:solidFill>
+                  <a:srgbClr val="D4EDDA"/>
+                </a:solidFill>
+              </a:defRPr>
+            </a:pPr>
+            <a:r>
+              <a:t>Module TIC · Licence 1</a:t>
+            </a:r>
+          </a:p>
+        </p:txBody>
+      </p:sp>
+      <p:sp>
+        <p:nvSpPr>
+          <p:cNvPr id="7" name="TextBox 6"/>
+          <p:cNvSpPr txBox="1"/>
+          <p:nvPr/>
+        </p:nvSpPr>
+        <p:spPr>
+          <a:xfrm>
+            <a:off x="731520" y="4846320"/>
+            <a:ext cx="7680960" cy="914400"/>
+          </a:xfrm>
+          <a:prstGeom prst="rect">
+            <a:avLst/>
+          </a:prstGeom>
+          <a:noFill/>
+        </p:spPr>
+        <p:txBody>
+          <a:bodyPr wrap="square">
+            <a:spAutoFit/>
+          </a:bodyPr>
+          <a:lstStyle/>
+          <a:p>
+            <a:pPr algn="ctr">
+              <a:defRPr sz="1400" b="0">
+                <a:solidFill>
+                  <a:srgbClr val="8BC39A"/>
+                </a:solidFill>
+              </a:defRPr>
+            </a:pPr>
+            <a:r>
+              <a:t>Dr. BELACEL Madani</a:t>
+            </a:r>
+            <a:br/>
+            <a:r>
+              <a:t>Université de Mostaganem</a:t>
+            </a:r>
+            <a:br/>
+            <a:r>
+              <a:t>madani.belacel@univ-mosta.dz</a:t>
+            </a:r>
+          </a:p>
+        </p:txBody>
+      </p:sp>
+      <p:sp>
+        <p:nvSpPr>
+          <p:cNvPr id="8" name="Rectangle 7"/>
+          <p:cNvSpPr/>
+          <p:nvPr/>
+        </p:nvSpPr>
+        <p:spPr>
+          <a:xfrm>
+            <a:off x="0" y="6803136"/>
+            <a:ext cx="9144000" cy="54864"/>
+          </a:xfrm>
+          <a:prstGeom prst="rect">
+            <a:avLst/>
+          </a:prstGeom>
+          <a:solidFill>
+            <a:srgbClr val="2E8654"/>
+          </a:solidFill>
+          <a:ln>
+            <a:noFill/>
+          </a:ln>
+        </p:spPr>
+        <p:style>
+          <a:lnRef idx="1">
+            <a:schemeClr val="accent1"/>
+          </a:lnRef>
+          <a:fillRef idx="3">
+            <a:schemeClr val="accent1"/>
+          </a:fillRef>
+          <a:effectRef idx="2">
+            <a:schemeClr val="accent1"/>
+          </a:effectRef>
+          <a:fontRef idx="minor">
+            <a:schemeClr val="lt1"/>
+          </a:fontRef>
+        </p:style>
+        <p:txBody>
+          <a:bodyPr rtlCol="0" anchor="ctr"/>
+          <a:lstStyle/>
+          <a:p>
+            <a:pPr algn="ctr"/>
+          </a:p>
+        </p:txBody>
+      </p:sp>
+      <p:pic>
+        <p:nvPicPr>
+          <p:cNvPr id="9" name="Picture 8" descr="Université_de_Mostaganem.png"/>
+          <p:cNvPicPr>
+            <a:picLocks noChangeAspect="1"/>
+          </p:cNvPicPr>
+          <p:nvPr/>
+        </p:nvPicPr>
+        <p:blipFill>
+          <a:blip r:embed="rId2"/>
+          <a:stretch>
+            <a:fillRect/>
+          </a:stretch>
+        </p:blipFill>
+        <p:spPr>
+          <a:xfrm>
+            <a:off x="7500000" y="200000"/>
+            <a:ext cx="1400000" cy="1400000"/>
+          </a:xfrm>
+          <a:prstGeom prst="rect">
+            <a:avLst/>
+          </a:prstGeom>
+        </p:spPr>
+      </p:pic>
     </p:spTree>
   </p:cSld>
   <p:clrMapOvr>
     <a:masterClrMapping/>
   </p:clrMapOvr>
-  <p:transition spd="med">
-    <p:fade/>
-  </p:transition>
 </p:sld>
 </file>
 
 <file path=ppt/slides/slide10.xml><?xml version="1.0" encoding="utf-8"?>
 <p:sld xmlns:a="http://schemas.openxmlformats.org/drawingml/2006/main" xmlns:p="http://schemas.openxmlformats.org/presentationml/2006/main" xmlns:r="http://schemas.openxmlformats.org/officeDocument/2006/relationships">
   <p:cSld>
+    <p:bg>
+      <p:bgPr>
+        <a:solidFill>
+          <a:srgbClr val="FFFFFF"/>
+        </a:solidFill>
+        <a:effectLst/>
+      </p:bgPr>
+    </p:bg>
     <p:spTree>
       <p:nvGrpSpPr>
         <p:cNvPr id="1" name=""/>
@@ -3544,83 +3440,57 @@
       <p:grpSpPr/>
       <p:sp>
         <p:nvSpPr>
-          <p:cNvPr id="2" name="Title 1"/>
-          <p:cNvSpPr>
-            <a:spLocks noGrp="1"/>
-          </p:cNvSpPr>
-          <p:nvPr>
-            <p:ph type="title"/>
-          </p:nvPr>
-        </p:nvSpPr>
-        <p:spPr/>
-        <p:txBody>
-          <a:bodyPr/>
-          <a:lstStyle/>
-          <a:p>
-            <a:r>
-              <a:t>Fin du TD</a:t>
-            </a:r>
-          </a:p>
-        </p:txBody>
-      </p:sp>
-      <p:sp>
-        <p:nvSpPr>
-          <p:cNvPr id="3" name="Content Placeholder 2"/>
-          <p:cNvSpPr>
-            <a:spLocks noGrp="1"/>
-          </p:cNvSpPr>
-          <p:nvPr>
-            <p:ph idx="1"/>
-          </p:nvPr>
-        </p:nvSpPr>
-        <p:spPr/>
-        <p:txBody>
-          <a:bodyPr/>
-          <a:lstStyle/>
-          <a:p>
-            <a:pPr>
-              <a:defRPr sz="2000"/>
-            </a:pPr>
-            <a:r>
-              <a:t>✅ Correction collective</a:t>
-            </a:r>
-          </a:p>
-          <a:p>
-            <a:pPr>
-              <a:defRPr sz="2000"/>
-            </a:pPr>
-            <a:r>
-              <a:t>✅ Relire cours PDF</a:t>
-            </a:r>
-          </a:p>
-          <a:p>
-            <a:pPr>
-              <a:defRPr sz="2000"/>
-            </a:pPr>
-            <a:r>
-              <a:t>✅ Séance suivante</a:t>
-            </a:r>
-          </a:p>
-          <a:p>
-            <a:pPr>
-              <a:defRPr sz="2000"/>
-            </a:pPr>
-            <a:r>
-              <a:t>✅ Questions ?</a:t>
-            </a:r>
-          </a:p>
-        </p:txBody>
-      </p:sp>
-      <p:sp>
-        <p:nvSpPr>
-          <p:cNvPr id="4" name="TextBox 3"/>
+          <p:cNvPr id="2" name="Rectangle 1"/>
+          <p:cNvSpPr/>
+          <p:nvPr/>
+        </p:nvSpPr>
+        <p:spPr>
+          <a:xfrm>
+            <a:off x="0" y="0"/>
+            <a:ext cx="137160" cy="6858000"/>
+          </a:xfrm>
+          <a:prstGeom prst="rect">
+            <a:avLst/>
+          </a:prstGeom>
+          <a:solidFill>
+            <a:srgbClr val="E86C00"/>
+          </a:solidFill>
+          <a:ln>
+            <a:noFill/>
+          </a:ln>
+        </p:spPr>
+        <p:style>
+          <a:lnRef idx="1">
+            <a:schemeClr val="accent1"/>
+          </a:lnRef>
+          <a:fillRef idx="3">
+            <a:schemeClr val="accent1"/>
+          </a:fillRef>
+          <a:effectRef idx="2">
+            <a:schemeClr val="accent1"/>
+          </a:effectRef>
+          <a:fontRef idx="minor">
+            <a:schemeClr val="lt1"/>
+          </a:fontRef>
+        </p:style>
+        <p:txBody>
+          <a:bodyPr rtlCol="0" anchor="ctr"/>
+          <a:lstStyle/>
+          <a:p>
+            <a:pPr algn="ctr"/>
+          </a:p>
+        </p:txBody>
+      </p:sp>
+      <p:sp>
+        <p:nvSpPr>
+          <p:cNvPr id="3" name="TextBox 2"/>
           <p:cNvSpPr txBox="1"/>
           <p:nvPr/>
         </p:nvSpPr>
         <p:spPr>
           <a:xfrm>
-            <a:off x="365760" y="6446520"/>
-            <a:ext cx="8412480" cy="320040"/>
+            <a:off x="548640" y="365760"/>
+            <a:ext cx="7772400" cy="731520"/>
           </a:xfrm>
           <a:prstGeom prst="rect">
             <a:avLst/>
@@ -3628,38 +3498,291 @@
           <a:noFill/>
         </p:spPr>
         <p:txBody>
-          <a:bodyPr wrap="none">
+          <a:bodyPr wrap="square">
             <a:spAutoFit/>
           </a:bodyPr>
           <a:lstStyle/>
           <a:p>
-            <a:pPr algn="ctr">
-              <a:defRPr sz="900">
-                <a:solidFill>
-                  <a:srgbClr val="404040"/>
+            <a:pPr algn="l">
+              <a:defRPr sz="2200" b="1">
+                <a:solidFill>
+                  <a:srgbClr val="E86C00"/>
                 </a:solidFill>
               </a:defRPr>
             </a:pPr>
             <a:r>
-              <a:t>TD TIC 01  •  Diapositive 10/10</a:t>
-            </a:r>
-          </a:p>
-        </p:txBody>
-      </p:sp>
+              <a:t>Application concrète</a:t>
+            </a:r>
+          </a:p>
+        </p:txBody>
+      </p:sp>
+      <p:sp>
+        <p:nvSpPr>
+          <p:cNvPr id="4" name="Rectangle 3"/>
+          <p:cNvSpPr/>
+          <p:nvPr/>
+        </p:nvSpPr>
+        <p:spPr>
+          <a:xfrm>
+            <a:off x="548640" y="1051560"/>
+            <a:ext cx="2743200" cy="36576"/>
+          </a:xfrm>
+          <a:prstGeom prst="rect">
+            <a:avLst/>
+          </a:prstGeom>
+          <a:solidFill>
+            <a:srgbClr val="E86C00"/>
+          </a:solidFill>
+          <a:ln>
+            <a:noFill/>
+          </a:ln>
+        </p:spPr>
+        <p:style>
+          <a:lnRef idx="1">
+            <a:schemeClr val="accent1"/>
+          </a:lnRef>
+          <a:fillRef idx="3">
+            <a:schemeClr val="accent1"/>
+          </a:fillRef>
+          <a:effectRef idx="2">
+            <a:schemeClr val="accent1"/>
+          </a:effectRef>
+          <a:fontRef idx="minor">
+            <a:schemeClr val="lt1"/>
+          </a:fontRef>
+        </p:style>
+        <p:txBody>
+          <a:bodyPr rtlCol="0" anchor="ctr"/>
+          <a:lstStyle/>
+          <a:p>
+            <a:pPr algn="ctr"/>
+          </a:p>
+        </p:txBody>
+      </p:sp>
+      <p:sp>
+        <p:nvSpPr>
+          <p:cNvPr id="5" name="TextBox 4"/>
+          <p:cNvSpPr txBox="1"/>
+          <p:nvPr/>
+        </p:nvSpPr>
+        <p:spPr>
+          <a:xfrm>
+            <a:off x="640080" y="2011680"/>
+            <a:ext cx="7863840" cy="4572000"/>
+          </a:xfrm>
+          <a:prstGeom prst="rect">
+            <a:avLst/>
+          </a:prstGeom>
+          <a:noFill/>
+        </p:spPr>
+        <p:txBody>
+          <a:bodyPr wrap="square">
+            <a:spAutoFit/>
+          </a:bodyPr>
+          <a:lstStyle/>
+          <a:p>
+            <a:pPr>
+              <a:spcAft>
+                <a:spcPts val="600"/>
+              </a:spcAft>
+              <a:defRPr sz="1500">
+                <a:solidFill>
+                  <a:srgbClr val="1A1A1A"/>
+                </a:solidFill>
+              </a:defRPr>
+            </a:pPr>
+            <a:r>
+              <a:t>•  Appliquez ces concepts dans vos travaux</a:t>
+            </a:r>
+          </a:p>
+          <a:p>
+            <a:pPr>
+              <a:spcAft>
+                <a:spcPts val="600"/>
+              </a:spcAft>
+              <a:defRPr sz="1500">
+                <a:solidFill>
+                  <a:srgbClr val="1A1A1A"/>
+                </a:solidFill>
+              </a:defRPr>
+            </a:pPr>
+            <a:r>
+              <a:t>•  Pratiquez lors des TD</a:t>
+            </a:r>
+          </a:p>
+        </p:txBody>
+      </p:sp>
+      <p:sp>
+        <p:nvSpPr>
+          <p:cNvPr id="6" name="Rectangle 5"/>
+          <p:cNvSpPr/>
+          <p:nvPr/>
+        </p:nvSpPr>
+        <p:spPr>
+          <a:xfrm>
+            <a:off x="457200" y="4572000"/>
+            <a:ext cx="8229600" cy="2011680"/>
+          </a:xfrm>
+          <a:prstGeom prst="rect">
+            <a:avLst/>
+          </a:prstGeom>
+          <a:solidFill>
+            <a:srgbClr val="FFF8F0"/>
+          </a:solidFill>
+          <a:ln>
+            <a:noFill/>
+          </a:ln>
+        </p:spPr>
+        <p:style>
+          <a:lnRef idx="1">
+            <a:schemeClr val="accent1"/>
+          </a:lnRef>
+          <a:fillRef idx="3">
+            <a:schemeClr val="accent1"/>
+          </a:fillRef>
+          <a:effectRef idx="2">
+            <a:schemeClr val="accent1"/>
+          </a:effectRef>
+          <a:fontRef idx="minor">
+            <a:schemeClr val="lt1"/>
+          </a:fontRef>
+        </p:style>
+        <p:txBody>
+          <a:bodyPr rtlCol="0" anchor="ctr"/>
+          <a:lstStyle/>
+          <a:p>
+            <a:pPr algn="ctr"/>
+          </a:p>
+        </p:txBody>
+      </p:sp>
+      <p:sp>
+        <p:nvSpPr>
+          <p:cNvPr id="7" name="Rectangle 6"/>
+          <p:cNvSpPr/>
+          <p:nvPr/>
+        </p:nvSpPr>
+        <p:spPr>
+          <a:xfrm>
+            <a:off x="457200" y="4572000"/>
+            <a:ext cx="91440" cy="2011680"/>
+          </a:xfrm>
+          <a:prstGeom prst="rect">
+            <a:avLst/>
+          </a:prstGeom>
+          <a:solidFill>
+            <a:srgbClr val="E86C00"/>
+          </a:solidFill>
+          <a:ln>
+            <a:noFill/>
+          </a:ln>
+        </p:spPr>
+        <p:style>
+          <a:lnRef idx="1">
+            <a:schemeClr val="accent1"/>
+          </a:lnRef>
+          <a:fillRef idx="3">
+            <a:schemeClr val="accent1"/>
+          </a:fillRef>
+          <a:effectRef idx="2">
+            <a:schemeClr val="accent1"/>
+          </a:effectRef>
+          <a:fontRef idx="minor">
+            <a:schemeClr val="lt1"/>
+          </a:fontRef>
+        </p:style>
+        <p:txBody>
+          <a:bodyPr rtlCol="0" anchor="ctr"/>
+          <a:lstStyle/>
+          <a:p>
+            <a:pPr algn="ctr"/>
+          </a:p>
+        </p:txBody>
+      </p:sp>
+      <p:sp>
+        <p:nvSpPr>
+          <p:cNvPr id="8" name="TextBox 7"/>
+          <p:cNvSpPr txBox="1"/>
+          <p:nvPr/>
+        </p:nvSpPr>
+        <p:spPr>
+          <a:xfrm>
+            <a:off x="731520" y="4663440"/>
+            <a:ext cx="7772400" cy="1828800"/>
+          </a:xfrm>
+          <a:prstGeom prst="rect">
+            <a:avLst/>
+          </a:prstGeom>
+          <a:noFill/>
+        </p:spPr>
+        <p:txBody>
+          <a:bodyPr wrap="square">
+            <a:spAutoFit/>
+          </a:bodyPr>
+          <a:lstStyle/>
+          <a:p>
+            <a:r>
+              <a:rPr sz="1300" b="1">
+                <a:solidFill>
+                  <a:srgbClr val="E86C00"/>
+                </a:solidFill>
+              </a:rPr>
+              <a:t>Intérêt pratique pour vous
+</a:t>
+            </a:r>
+            <a:r>
+              <a:rPr sz="1200">
+                <a:solidFill>
+                  <a:srgbClr val="1A1A1A"/>
+                </a:solidFill>
+              </a:rPr>
+              <a:t>Cette compétence vous servira dans votre vie universitaire et professionnelle.</a:t>
+            </a:r>
+          </a:p>
+        </p:txBody>
+      </p:sp>
+      <p:pic>
+        <p:nvPicPr>
+          <p:cNvPr id="9" name="Picture 8" descr="c01_08_divide.png"/>
+          <p:cNvPicPr>
+            <a:picLocks noChangeAspect="1"/>
+          </p:cNvPicPr>
+          <p:nvPr/>
+        </p:nvPicPr>
+        <p:blipFill>
+          <a:blip r:embed="rId2"/>
+          <a:stretch>
+            <a:fillRect/>
+          </a:stretch>
+        </p:blipFill>
+        <p:spPr>
+          <a:xfrm>
+            <a:off x="5029200" y="3200400"/>
+            <a:ext cx="3200400" cy="1828800"/>
+          </a:xfrm>
+          <a:prstGeom prst="rect">
+            <a:avLst/>
+          </a:prstGeom>
+        </p:spPr>
+      </p:pic>
     </p:spTree>
   </p:cSld>
   <p:clrMapOvr>
     <a:masterClrMapping/>
   </p:clrMapOvr>
-  <p:transition spd="med">
-    <p:fade/>
-  </p:transition>
 </p:sld>
 </file>
 
-<file path=ppt/slides/slide2.xml><?xml version="1.0" encoding="utf-8"?>
+<file path=ppt/slides/slide11.xml><?xml version="1.0" encoding="utf-8"?>
 <p:sld xmlns:a="http://schemas.openxmlformats.org/drawingml/2006/main" xmlns:p="http://schemas.openxmlformats.org/presentationml/2006/main" xmlns:r="http://schemas.openxmlformats.org/officeDocument/2006/relationships">
   <p:cSld>
+    <p:bg>
+      <p:bgPr>
+        <a:solidFill>
+          <a:srgbClr val="FFFFFF"/>
+        </a:solidFill>
+        <a:effectLst/>
+      </p:bgPr>
+    </p:bg>
     <p:spTree>
       <p:nvGrpSpPr>
         <p:cNvPr id="1" name=""/>
@@ -3669,83 +3792,57 @@
       <p:grpSpPr/>
       <p:sp>
         <p:nvSpPr>
-          <p:cNvPr id="2" name="Title 1"/>
-          <p:cNvSpPr>
-            <a:spLocks noGrp="1"/>
-          </p:cNvSpPr>
-          <p:nvPr>
-            <p:ph type="title"/>
-          </p:nvPr>
-        </p:nvSpPr>
-        <p:spPr/>
-        <p:txBody>
-          <a:bodyPr/>
-          <a:lstStyle/>
-          <a:p>
-            <a:r>
-              <a:t>Déroulement TD — 1h30</a:t>
-            </a:r>
-          </a:p>
-        </p:txBody>
-      </p:sp>
-      <p:sp>
-        <p:nvSpPr>
-          <p:cNvPr id="3" name="Content Placeholder 2"/>
-          <p:cNvSpPr>
-            <a:spLocks noGrp="1"/>
-          </p:cNvSpPr>
-          <p:nvPr>
-            <p:ph idx="1"/>
-          </p:nvPr>
-        </p:nvSpPr>
-        <p:spPr/>
-        <p:txBody>
-          <a:bodyPr/>
-          <a:lstStyle/>
-          <a:p>
-            <a:pPr>
-              <a:defRPr sz="2000"/>
-            </a:pPr>
-            <a:r>
-              <a:t>⏱️ Accueil et consignes : 5 min</a:t>
-            </a:r>
-          </a:p>
-          <a:p>
-            <a:pPr>
-              <a:defRPr sz="2000"/>
-            </a:pPr>
-            <a:r>
-              <a:t>⏱️ Exercice 1 — Définition personnelle : 15 min</a:t>
-            </a:r>
-          </a:p>
-          <a:p>
-            <a:pPr>
-              <a:defRPr sz="2000"/>
-            </a:pPr>
-            <a:r>
-              <a:t>⏱️ Exercice 2 — Trois dimensions : 15 min</a:t>
-            </a:r>
-          </a:p>
-          <a:p>
-            <a:pPr>
-              <a:defRPr sz="2000"/>
-            </a:pPr>
-            <a:r>
-              <a:t>⏱️ Exercice 3 — Fonctions des TIC : 18 min</a:t>
-            </a:r>
-          </a:p>
-        </p:txBody>
-      </p:sp>
-      <p:sp>
-        <p:nvSpPr>
-          <p:cNvPr id="4" name="TextBox 3"/>
+          <p:cNvPr id="2" name="Rectangle 1"/>
+          <p:cNvSpPr/>
+          <p:nvPr/>
+        </p:nvSpPr>
+        <p:spPr>
+          <a:xfrm>
+            <a:off x="0" y="0"/>
+            <a:ext cx="137160" cy="6858000"/>
+          </a:xfrm>
+          <a:prstGeom prst="rect">
+            <a:avLst/>
+          </a:prstGeom>
+          <a:solidFill>
+            <a:srgbClr val="E86C00"/>
+          </a:solidFill>
+          <a:ln>
+            <a:noFill/>
+          </a:ln>
+        </p:spPr>
+        <p:style>
+          <a:lnRef idx="1">
+            <a:schemeClr val="accent1"/>
+          </a:lnRef>
+          <a:fillRef idx="3">
+            <a:schemeClr val="accent1"/>
+          </a:fillRef>
+          <a:effectRef idx="2">
+            <a:schemeClr val="accent1"/>
+          </a:effectRef>
+          <a:fontRef idx="minor">
+            <a:schemeClr val="lt1"/>
+          </a:fontRef>
+        </p:style>
+        <p:txBody>
+          <a:bodyPr rtlCol="0" anchor="ctr"/>
+          <a:lstStyle/>
+          <a:p>
+            <a:pPr algn="ctr"/>
+          </a:p>
+        </p:txBody>
+      </p:sp>
+      <p:sp>
+        <p:nvSpPr>
+          <p:cNvPr id="3" name="TextBox 2"/>
           <p:cNvSpPr txBox="1"/>
           <p:nvPr/>
         </p:nvSpPr>
         <p:spPr>
           <a:xfrm>
-            <a:off x="365760" y="6446520"/>
-            <a:ext cx="8412480" cy="320040"/>
+            <a:off x="548640" y="365760"/>
+            <a:ext cx="7772400" cy="731520"/>
           </a:xfrm>
           <a:prstGeom prst="rect">
             <a:avLst/>
@@ -3753,38 +3850,291 @@
           <a:noFill/>
         </p:spPr>
         <p:txBody>
-          <a:bodyPr wrap="none">
+          <a:bodyPr wrap="square">
             <a:spAutoFit/>
           </a:bodyPr>
           <a:lstStyle/>
           <a:p>
-            <a:pPr algn="ctr">
-              <a:defRPr sz="900">
-                <a:solidFill>
-                  <a:srgbClr val="404040"/>
+            <a:pPr algn="l">
+              <a:defRPr sz="2200" b="1">
+                <a:solidFill>
+                  <a:srgbClr val="E86C00"/>
                 </a:solidFill>
               </a:defRPr>
             </a:pPr>
             <a:r>
-              <a:t>TD TIC 01  •  Diapositive 2/10</a:t>
-            </a:r>
-          </a:p>
-        </p:txBody>
-      </p:sp>
+              <a:t>Application concrète</a:t>
+            </a:r>
+          </a:p>
+        </p:txBody>
+      </p:sp>
+      <p:sp>
+        <p:nvSpPr>
+          <p:cNvPr id="4" name="Rectangle 3"/>
+          <p:cNvSpPr/>
+          <p:nvPr/>
+        </p:nvSpPr>
+        <p:spPr>
+          <a:xfrm>
+            <a:off x="548640" y="1051560"/>
+            <a:ext cx="2743200" cy="36576"/>
+          </a:xfrm>
+          <a:prstGeom prst="rect">
+            <a:avLst/>
+          </a:prstGeom>
+          <a:solidFill>
+            <a:srgbClr val="E86C00"/>
+          </a:solidFill>
+          <a:ln>
+            <a:noFill/>
+          </a:ln>
+        </p:spPr>
+        <p:style>
+          <a:lnRef idx="1">
+            <a:schemeClr val="accent1"/>
+          </a:lnRef>
+          <a:fillRef idx="3">
+            <a:schemeClr val="accent1"/>
+          </a:fillRef>
+          <a:effectRef idx="2">
+            <a:schemeClr val="accent1"/>
+          </a:effectRef>
+          <a:fontRef idx="minor">
+            <a:schemeClr val="lt1"/>
+          </a:fontRef>
+        </p:style>
+        <p:txBody>
+          <a:bodyPr rtlCol="0" anchor="ctr"/>
+          <a:lstStyle/>
+          <a:p>
+            <a:pPr algn="ctr"/>
+          </a:p>
+        </p:txBody>
+      </p:sp>
+      <p:sp>
+        <p:nvSpPr>
+          <p:cNvPr id="5" name="TextBox 4"/>
+          <p:cNvSpPr txBox="1"/>
+          <p:nvPr/>
+        </p:nvSpPr>
+        <p:spPr>
+          <a:xfrm>
+            <a:off x="640080" y="2011680"/>
+            <a:ext cx="7863840" cy="4572000"/>
+          </a:xfrm>
+          <a:prstGeom prst="rect">
+            <a:avLst/>
+          </a:prstGeom>
+          <a:noFill/>
+        </p:spPr>
+        <p:txBody>
+          <a:bodyPr wrap="square">
+            <a:spAutoFit/>
+          </a:bodyPr>
+          <a:lstStyle/>
+          <a:p>
+            <a:pPr>
+              <a:spcAft>
+                <a:spcPts val="600"/>
+              </a:spcAft>
+              <a:defRPr sz="1500">
+                <a:solidFill>
+                  <a:srgbClr val="1A1A1A"/>
+                </a:solidFill>
+              </a:defRPr>
+            </a:pPr>
+            <a:r>
+              <a:t>•  Appliquez ces concepts dans vos travaux</a:t>
+            </a:r>
+          </a:p>
+          <a:p>
+            <a:pPr>
+              <a:spcAft>
+                <a:spcPts val="600"/>
+              </a:spcAft>
+              <a:defRPr sz="1500">
+                <a:solidFill>
+                  <a:srgbClr val="1A1A1A"/>
+                </a:solidFill>
+              </a:defRPr>
+            </a:pPr>
+            <a:r>
+              <a:t>•  Pratiquez lors des TD</a:t>
+            </a:r>
+          </a:p>
+        </p:txBody>
+      </p:sp>
+      <p:sp>
+        <p:nvSpPr>
+          <p:cNvPr id="6" name="Rectangle 5"/>
+          <p:cNvSpPr/>
+          <p:nvPr/>
+        </p:nvSpPr>
+        <p:spPr>
+          <a:xfrm>
+            <a:off x="457200" y="4572000"/>
+            <a:ext cx="8229600" cy="2011680"/>
+          </a:xfrm>
+          <a:prstGeom prst="rect">
+            <a:avLst/>
+          </a:prstGeom>
+          <a:solidFill>
+            <a:srgbClr val="FFF8F0"/>
+          </a:solidFill>
+          <a:ln>
+            <a:noFill/>
+          </a:ln>
+        </p:spPr>
+        <p:style>
+          <a:lnRef idx="1">
+            <a:schemeClr val="accent1"/>
+          </a:lnRef>
+          <a:fillRef idx="3">
+            <a:schemeClr val="accent1"/>
+          </a:fillRef>
+          <a:effectRef idx="2">
+            <a:schemeClr val="accent1"/>
+          </a:effectRef>
+          <a:fontRef idx="minor">
+            <a:schemeClr val="lt1"/>
+          </a:fontRef>
+        </p:style>
+        <p:txBody>
+          <a:bodyPr rtlCol="0" anchor="ctr"/>
+          <a:lstStyle/>
+          <a:p>
+            <a:pPr algn="ctr"/>
+          </a:p>
+        </p:txBody>
+      </p:sp>
+      <p:sp>
+        <p:nvSpPr>
+          <p:cNvPr id="7" name="Rectangle 6"/>
+          <p:cNvSpPr/>
+          <p:nvPr/>
+        </p:nvSpPr>
+        <p:spPr>
+          <a:xfrm>
+            <a:off x="457200" y="4572000"/>
+            <a:ext cx="91440" cy="2011680"/>
+          </a:xfrm>
+          <a:prstGeom prst="rect">
+            <a:avLst/>
+          </a:prstGeom>
+          <a:solidFill>
+            <a:srgbClr val="E86C00"/>
+          </a:solidFill>
+          <a:ln>
+            <a:noFill/>
+          </a:ln>
+        </p:spPr>
+        <p:style>
+          <a:lnRef idx="1">
+            <a:schemeClr val="accent1"/>
+          </a:lnRef>
+          <a:fillRef idx="3">
+            <a:schemeClr val="accent1"/>
+          </a:fillRef>
+          <a:effectRef idx="2">
+            <a:schemeClr val="accent1"/>
+          </a:effectRef>
+          <a:fontRef idx="minor">
+            <a:schemeClr val="lt1"/>
+          </a:fontRef>
+        </p:style>
+        <p:txBody>
+          <a:bodyPr rtlCol="0" anchor="ctr"/>
+          <a:lstStyle/>
+          <a:p>
+            <a:pPr algn="ctr"/>
+          </a:p>
+        </p:txBody>
+      </p:sp>
+      <p:sp>
+        <p:nvSpPr>
+          <p:cNvPr id="8" name="TextBox 7"/>
+          <p:cNvSpPr txBox="1"/>
+          <p:nvPr/>
+        </p:nvSpPr>
+        <p:spPr>
+          <a:xfrm>
+            <a:off x="731520" y="4663440"/>
+            <a:ext cx="7772400" cy="1828800"/>
+          </a:xfrm>
+          <a:prstGeom prst="rect">
+            <a:avLst/>
+          </a:prstGeom>
+          <a:noFill/>
+        </p:spPr>
+        <p:txBody>
+          <a:bodyPr wrap="square">
+            <a:spAutoFit/>
+          </a:bodyPr>
+          <a:lstStyle/>
+          <a:p>
+            <a:r>
+              <a:rPr sz="1300" b="1">
+                <a:solidFill>
+                  <a:srgbClr val="E86C00"/>
+                </a:solidFill>
+              </a:rPr>
+              <a:t>Intérêt pratique pour vous
+</a:t>
+            </a:r>
+            <a:r>
+              <a:rPr sz="1200">
+                <a:solidFill>
+                  <a:srgbClr val="1A1A1A"/>
+                </a:solidFill>
+              </a:rPr>
+              <a:t>Cette compétence vous servira dans votre vie universitaire et professionnelle.</a:t>
+            </a:r>
+          </a:p>
+        </p:txBody>
+      </p:sp>
+      <p:pic>
+        <p:nvPicPr>
+          <p:cNvPr id="9" name="Picture 8" descr="c01_09_pedagogy.png"/>
+          <p:cNvPicPr>
+            <a:picLocks noChangeAspect="1"/>
+          </p:cNvPicPr>
+          <p:nvPr/>
+        </p:nvPicPr>
+        <p:blipFill>
+          <a:blip r:embed="rId2"/>
+          <a:stretch>
+            <a:fillRect/>
+          </a:stretch>
+        </p:blipFill>
+        <p:spPr>
+          <a:xfrm>
+            <a:off x="5029200" y="3200400"/>
+            <a:ext cx="3200400" cy="1828800"/>
+          </a:xfrm>
+          <a:prstGeom prst="rect">
+            <a:avLst/>
+          </a:prstGeom>
+        </p:spPr>
+      </p:pic>
     </p:spTree>
   </p:cSld>
   <p:clrMapOvr>
     <a:masterClrMapping/>
   </p:clrMapOvr>
-  <p:transition spd="med">
-    <p:fade/>
-  </p:transition>
 </p:sld>
 </file>
 
-<file path=ppt/slides/slide3.xml><?xml version="1.0" encoding="utf-8"?>
+<file path=ppt/slides/slide12.xml><?xml version="1.0" encoding="utf-8"?>
 <p:sld xmlns:a="http://schemas.openxmlformats.org/drawingml/2006/main" xmlns:p="http://schemas.openxmlformats.org/presentationml/2006/main" xmlns:r="http://schemas.openxmlformats.org/officeDocument/2006/relationships">
   <p:cSld>
+    <p:bg>
+      <p:bgPr>
+        <a:solidFill>
+          <a:srgbClr val="FFFFFF"/>
+        </a:solidFill>
+        <a:effectLst/>
+      </p:bgPr>
+    </p:bg>
     <p:spTree>
       <p:nvGrpSpPr>
         <p:cNvPr id="1" name=""/>
@@ -3794,75 +4144,57 @@
       <p:grpSpPr/>
       <p:sp>
         <p:nvSpPr>
-          <p:cNvPr id="2" name="Title 1"/>
-          <p:cNvSpPr>
-            <a:spLocks noGrp="1"/>
-          </p:cNvSpPr>
-          <p:nvPr>
-            <p:ph type="title"/>
-          </p:nvPr>
-        </p:nvSpPr>
-        <p:spPr/>
-        <p:txBody>
-          <a:bodyPr/>
-          <a:lstStyle/>
-          <a:p>
-            <a:r>
-              <a:t>Exercice 1 (15 min)</a:t>
-            </a:r>
-          </a:p>
-        </p:txBody>
-      </p:sp>
-      <p:sp>
-        <p:nvSpPr>
-          <p:cNvPr id="3" name="Content Placeholder 2"/>
-          <p:cNvSpPr>
-            <a:spLocks noGrp="1"/>
-          </p:cNvSpPr>
-          <p:nvPr>
-            <p:ph idx="1"/>
-          </p:nvPr>
-        </p:nvSpPr>
-        <p:spPr/>
-        <p:txBody>
-          <a:bodyPr/>
-          <a:lstStyle/>
-          <a:p>
-            <a:pPr>
-              <a:defRPr sz="2000"/>
-            </a:pPr>
-            <a:r>
-              <a:t>1️⃣ Énoncé polycopié TD</a:t>
-            </a:r>
-          </a:p>
-          <a:p>
-            <a:pPr>
-              <a:defRPr sz="2000"/>
-            </a:pPr>
-            <a:r>
-              <a:t>1️⃣ Travail guidé</a:t>
-            </a:r>
-          </a:p>
-          <a:p>
-            <a:pPr>
-              <a:defRPr sz="2000"/>
-            </a:pPr>
-            <a:r>
-              <a:t>1️⃣ Corrigé détaillé</a:t>
-            </a:r>
-          </a:p>
-        </p:txBody>
-      </p:sp>
-      <p:sp>
-        <p:nvSpPr>
-          <p:cNvPr id="4" name="TextBox 3"/>
+          <p:cNvPr id="2" name="Rectangle 1"/>
+          <p:cNvSpPr/>
+          <p:nvPr/>
+        </p:nvSpPr>
+        <p:spPr>
+          <a:xfrm>
+            <a:off x="0" y="0"/>
+            <a:ext cx="137160" cy="6858000"/>
+          </a:xfrm>
+          <a:prstGeom prst="rect">
+            <a:avLst/>
+          </a:prstGeom>
+          <a:solidFill>
+            <a:srgbClr val="E86C00"/>
+          </a:solidFill>
+          <a:ln>
+            <a:noFill/>
+          </a:ln>
+        </p:spPr>
+        <p:style>
+          <a:lnRef idx="1">
+            <a:schemeClr val="accent1"/>
+          </a:lnRef>
+          <a:fillRef idx="3">
+            <a:schemeClr val="accent1"/>
+          </a:fillRef>
+          <a:effectRef idx="2">
+            <a:schemeClr val="accent1"/>
+          </a:effectRef>
+          <a:fontRef idx="minor">
+            <a:schemeClr val="lt1"/>
+          </a:fontRef>
+        </p:style>
+        <p:txBody>
+          <a:bodyPr rtlCol="0" anchor="ctr"/>
+          <a:lstStyle/>
+          <a:p>
+            <a:pPr algn="ctr"/>
+          </a:p>
+        </p:txBody>
+      </p:sp>
+      <p:sp>
+        <p:nvSpPr>
+          <p:cNvPr id="3" name="TextBox 2"/>
           <p:cNvSpPr txBox="1"/>
           <p:nvPr/>
         </p:nvSpPr>
         <p:spPr>
           <a:xfrm>
-            <a:off x="365760" y="6446520"/>
-            <a:ext cx="8412480" cy="320040"/>
+            <a:off x="548640" y="365760"/>
+            <a:ext cx="7772400" cy="731520"/>
           </a:xfrm>
           <a:prstGeom prst="rect">
             <a:avLst/>
@@ -3870,38 +4202,291 @@
           <a:noFill/>
         </p:spPr>
         <p:txBody>
-          <a:bodyPr wrap="none">
+          <a:bodyPr wrap="square">
             <a:spAutoFit/>
           </a:bodyPr>
           <a:lstStyle/>
           <a:p>
-            <a:pPr algn="ctr">
-              <a:defRPr sz="900">
-                <a:solidFill>
-                  <a:srgbClr val="404040"/>
+            <a:pPr algn="l">
+              <a:defRPr sz="2200" b="1">
+                <a:solidFill>
+                  <a:srgbClr val="E86C00"/>
                 </a:solidFill>
               </a:defRPr>
             </a:pPr>
             <a:r>
-              <a:t>TD TIC 01  •  Diapositive 3/10</a:t>
-            </a:r>
-          </a:p>
-        </p:txBody>
-      </p:sp>
+              <a:t>Application concrète</a:t>
+            </a:r>
+          </a:p>
+        </p:txBody>
+      </p:sp>
+      <p:sp>
+        <p:nvSpPr>
+          <p:cNvPr id="4" name="Rectangle 3"/>
+          <p:cNvSpPr/>
+          <p:nvPr/>
+        </p:nvSpPr>
+        <p:spPr>
+          <a:xfrm>
+            <a:off x="548640" y="1051560"/>
+            <a:ext cx="2743200" cy="36576"/>
+          </a:xfrm>
+          <a:prstGeom prst="rect">
+            <a:avLst/>
+          </a:prstGeom>
+          <a:solidFill>
+            <a:srgbClr val="E86C00"/>
+          </a:solidFill>
+          <a:ln>
+            <a:noFill/>
+          </a:ln>
+        </p:spPr>
+        <p:style>
+          <a:lnRef idx="1">
+            <a:schemeClr val="accent1"/>
+          </a:lnRef>
+          <a:fillRef idx="3">
+            <a:schemeClr val="accent1"/>
+          </a:fillRef>
+          <a:effectRef idx="2">
+            <a:schemeClr val="accent1"/>
+          </a:effectRef>
+          <a:fontRef idx="minor">
+            <a:schemeClr val="lt1"/>
+          </a:fontRef>
+        </p:style>
+        <p:txBody>
+          <a:bodyPr rtlCol="0" anchor="ctr"/>
+          <a:lstStyle/>
+          <a:p>
+            <a:pPr algn="ctr"/>
+          </a:p>
+        </p:txBody>
+      </p:sp>
+      <p:sp>
+        <p:nvSpPr>
+          <p:cNvPr id="5" name="TextBox 4"/>
+          <p:cNvSpPr txBox="1"/>
+          <p:nvPr/>
+        </p:nvSpPr>
+        <p:spPr>
+          <a:xfrm>
+            <a:off x="640080" y="2011680"/>
+            <a:ext cx="7863840" cy="4572000"/>
+          </a:xfrm>
+          <a:prstGeom prst="rect">
+            <a:avLst/>
+          </a:prstGeom>
+          <a:noFill/>
+        </p:spPr>
+        <p:txBody>
+          <a:bodyPr wrap="square">
+            <a:spAutoFit/>
+          </a:bodyPr>
+          <a:lstStyle/>
+          <a:p>
+            <a:pPr>
+              <a:spcAft>
+                <a:spcPts val="600"/>
+              </a:spcAft>
+              <a:defRPr sz="1500">
+                <a:solidFill>
+                  <a:srgbClr val="1A1A1A"/>
+                </a:solidFill>
+              </a:defRPr>
+            </a:pPr>
+            <a:r>
+              <a:t>•  Appliquez ces concepts dans vos travaux</a:t>
+            </a:r>
+          </a:p>
+          <a:p>
+            <a:pPr>
+              <a:spcAft>
+                <a:spcPts val="600"/>
+              </a:spcAft>
+              <a:defRPr sz="1500">
+                <a:solidFill>
+                  <a:srgbClr val="1A1A1A"/>
+                </a:solidFill>
+              </a:defRPr>
+            </a:pPr>
+            <a:r>
+              <a:t>•  Pratiquez lors des TD</a:t>
+            </a:r>
+          </a:p>
+        </p:txBody>
+      </p:sp>
+      <p:sp>
+        <p:nvSpPr>
+          <p:cNvPr id="6" name="Rectangle 5"/>
+          <p:cNvSpPr/>
+          <p:nvPr/>
+        </p:nvSpPr>
+        <p:spPr>
+          <a:xfrm>
+            <a:off x="457200" y="4572000"/>
+            <a:ext cx="8229600" cy="2011680"/>
+          </a:xfrm>
+          <a:prstGeom prst="rect">
+            <a:avLst/>
+          </a:prstGeom>
+          <a:solidFill>
+            <a:srgbClr val="FFF8F0"/>
+          </a:solidFill>
+          <a:ln>
+            <a:noFill/>
+          </a:ln>
+        </p:spPr>
+        <p:style>
+          <a:lnRef idx="1">
+            <a:schemeClr val="accent1"/>
+          </a:lnRef>
+          <a:fillRef idx="3">
+            <a:schemeClr val="accent1"/>
+          </a:fillRef>
+          <a:effectRef idx="2">
+            <a:schemeClr val="accent1"/>
+          </a:effectRef>
+          <a:fontRef idx="minor">
+            <a:schemeClr val="lt1"/>
+          </a:fontRef>
+        </p:style>
+        <p:txBody>
+          <a:bodyPr rtlCol="0" anchor="ctr"/>
+          <a:lstStyle/>
+          <a:p>
+            <a:pPr algn="ctr"/>
+          </a:p>
+        </p:txBody>
+      </p:sp>
+      <p:sp>
+        <p:nvSpPr>
+          <p:cNvPr id="7" name="Rectangle 6"/>
+          <p:cNvSpPr/>
+          <p:nvPr/>
+        </p:nvSpPr>
+        <p:spPr>
+          <a:xfrm>
+            <a:off x="457200" y="4572000"/>
+            <a:ext cx="91440" cy="2011680"/>
+          </a:xfrm>
+          <a:prstGeom prst="rect">
+            <a:avLst/>
+          </a:prstGeom>
+          <a:solidFill>
+            <a:srgbClr val="E86C00"/>
+          </a:solidFill>
+          <a:ln>
+            <a:noFill/>
+          </a:ln>
+        </p:spPr>
+        <p:style>
+          <a:lnRef idx="1">
+            <a:schemeClr val="accent1"/>
+          </a:lnRef>
+          <a:fillRef idx="3">
+            <a:schemeClr val="accent1"/>
+          </a:fillRef>
+          <a:effectRef idx="2">
+            <a:schemeClr val="accent1"/>
+          </a:effectRef>
+          <a:fontRef idx="minor">
+            <a:schemeClr val="lt1"/>
+          </a:fontRef>
+        </p:style>
+        <p:txBody>
+          <a:bodyPr rtlCol="0" anchor="ctr"/>
+          <a:lstStyle/>
+          <a:p>
+            <a:pPr algn="ctr"/>
+          </a:p>
+        </p:txBody>
+      </p:sp>
+      <p:sp>
+        <p:nvSpPr>
+          <p:cNvPr id="8" name="TextBox 7"/>
+          <p:cNvSpPr txBox="1"/>
+          <p:nvPr/>
+        </p:nvSpPr>
+        <p:spPr>
+          <a:xfrm>
+            <a:off x="731520" y="4663440"/>
+            <a:ext cx="7772400" cy="1828800"/>
+          </a:xfrm>
+          <a:prstGeom prst="rect">
+            <a:avLst/>
+          </a:prstGeom>
+          <a:noFill/>
+        </p:spPr>
+        <p:txBody>
+          <a:bodyPr wrap="square">
+            <a:spAutoFit/>
+          </a:bodyPr>
+          <a:lstStyle/>
+          <a:p>
+            <a:r>
+              <a:rPr sz="1300" b="1">
+                <a:solidFill>
+                  <a:srgbClr val="E86C00"/>
+                </a:solidFill>
+              </a:rPr>
+              <a:t>Intérêt pratique pour vous
+</a:t>
+            </a:r>
+            <a:r>
+              <a:rPr sz="1200">
+                <a:solidFill>
+                  <a:srgbClr val="1A1A1A"/>
+                </a:solidFill>
+              </a:rPr>
+              <a:t>Cette compétence vous servira dans votre vie universitaire et professionnelle.</a:t>
+            </a:r>
+          </a:p>
+        </p:txBody>
+      </p:sp>
+      <p:pic>
+        <p:nvPicPr>
+          <p:cNvPr id="9" name="Picture 8" descr="c01_10_vs.png"/>
+          <p:cNvPicPr>
+            <a:picLocks noChangeAspect="1"/>
+          </p:cNvPicPr>
+          <p:nvPr/>
+        </p:nvPicPr>
+        <p:blipFill>
+          <a:blip r:embed="rId2"/>
+          <a:stretch>
+            <a:fillRect/>
+          </a:stretch>
+        </p:blipFill>
+        <p:spPr>
+          <a:xfrm>
+            <a:off x="5029200" y="3200400"/>
+            <a:ext cx="3200400" cy="1828800"/>
+          </a:xfrm>
+          <a:prstGeom prst="rect">
+            <a:avLst/>
+          </a:prstGeom>
+        </p:spPr>
+      </p:pic>
     </p:spTree>
   </p:cSld>
   <p:clrMapOvr>
     <a:masterClrMapping/>
   </p:clrMapOvr>
-  <p:transition spd="med">
-    <p:fade/>
-  </p:transition>
 </p:sld>
 </file>
 
-<file path=ppt/slides/slide4.xml><?xml version="1.0" encoding="utf-8"?>
+<file path=ppt/slides/slide13.xml><?xml version="1.0" encoding="utf-8"?>
 <p:sld xmlns:a="http://schemas.openxmlformats.org/drawingml/2006/main" xmlns:p="http://schemas.openxmlformats.org/presentationml/2006/main" xmlns:r="http://schemas.openxmlformats.org/officeDocument/2006/relationships">
   <p:cSld>
+    <p:bg>
+      <p:bgPr>
+        <a:solidFill>
+          <a:srgbClr val="FFFFFF"/>
+        </a:solidFill>
+        <a:effectLst/>
+      </p:bgPr>
+    </p:bg>
     <p:spTree>
       <p:nvGrpSpPr>
         <p:cNvPr id="1" name=""/>
@@ -3911,75 +4496,57 @@
       <p:grpSpPr/>
       <p:sp>
         <p:nvSpPr>
-          <p:cNvPr id="2" name="Title 1"/>
-          <p:cNvSpPr>
-            <a:spLocks noGrp="1"/>
-          </p:cNvSpPr>
-          <p:nvPr>
-            <p:ph type="title"/>
-          </p:nvPr>
-        </p:nvSpPr>
-        <p:spPr/>
-        <p:txBody>
-          <a:bodyPr/>
-          <a:lstStyle/>
-          <a:p>
-            <a:r>
-              <a:t>Exercice 2 (15 min)</a:t>
-            </a:r>
-          </a:p>
-        </p:txBody>
-      </p:sp>
-      <p:sp>
-        <p:nvSpPr>
-          <p:cNvPr id="3" name="Content Placeholder 2"/>
-          <p:cNvSpPr>
-            <a:spLocks noGrp="1"/>
-          </p:cNvSpPr>
-          <p:nvPr>
-            <p:ph idx="1"/>
-          </p:nvPr>
-        </p:nvSpPr>
-        <p:spPr/>
-        <p:txBody>
-          <a:bodyPr/>
-          <a:lstStyle/>
-          <a:p>
-            <a:pPr>
-              <a:defRPr sz="2000"/>
-            </a:pPr>
-            <a:r>
-              <a:t>2️⃣ Énoncé polycopié TD</a:t>
-            </a:r>
-          </a:p>
-          <a:p>
-            <a:pPr>
-              <a:defRPr sz="2000"/>
-            </a:pPr>
-            <a:r>
-              <a:t>2️⃣ Travail guidé</a:t>
-            </a:r>
-          </a:p>
-          <a:p>
-            <a:pPr>
-              <a:defRPr sz="2000"/>
-            </a:pPr>
-            <a:r>
-              <a:t>2️⃣ Corrigé détaillé</a:t>
-            </a:r>
-          </a:p>
-        </p:txBody>
-      </p:sp>
-      <p:sp>
-        <p:nvSpPr>
-          <p:cNvPr id="4" name="TextBox 3"/>
+          <p:cNvPr id="2" name="Rectangle 1"/>
+          <p:cNvSpPr/>
+          <p:nvPr/>
+        </p:nvSpPr>
+        <p:spPr>
+          <a:xfrm>
+            <a:off x="0" y="0"/>
+            <a:ext cx="137160" cy="6858000"/>
+          </a:xfrm>
+          <a:prstGeom prst="rect">
+            <a:avLst/>
+          </a:prstGeom>
+          <a:solidFill>
+            <a:srgbClr val="E86C00"/>
+          </a:solidFill>
+          <a:ln>
+            <a:noFill/>
+          </a:ln>
+        </p:spPr>
+        <p:style>
+          <a:lnRef idx="1">
+            <a:schemeClr val="accent1"/>
+          </a:lnRef>
+          <a:fillRef idx="3">
+            <a:schemeClr val="accent1"/>
+          </a:fillRef>
+          <a:effectRef idx="2">
+            <a:schemeClr val="accent1"/>
+          </a:effectRef>
+          <a:fontRef idx="minor">
+            <a:schemeClr val="lt1"/>
+          </a:fontRef>
+        </p:style>
+        <p:txBody>
+          <a:bodyPr rtlCol="0" anchor="ctr"/>
+          <a:lstStyle/>
+          <a:p>
+            <a:pPr algn="ctr"/>
+          </a:p>
+        </p:txBody>
+      </p:sp>
+      <p:sp>
+        <p:nvSpPr>
+          <p:cNvPr id="3" name="TextBox 2"/>
           <p:cNvSpPr txBox="1"/>
           <p:nvPr/>
         </p:nvSpPr>
         <p:spPr>
           <a:xfrm>
-            <a:off x="365760" y="6446520"/>
-            <a:ext cx="8412480" cy="320040"/>
+            <a:off x="548640" y="365760"/>
+            <a:ext cx="7772400" cy="731520"/>
           </a:xfrm>
           <a:prstGeom prst="rect">
             <a:avLst/>
@@ -3987,38 +4554,291 @@
           <a:noFill/>
         </p:spPr>
         <p:txBody>
-          <a:bodyPr wrap="none">
+          <a:bodyPr wrap="square">
             <a:spAutoFit/>
           </a:bodyPr>
           <a:lstStyle/>
           <a:p>
-            <a:pPr algn="ctr">
-              <a:defRPr sz="900">
-                <a:solidFill>
-                  <a:srgbClr val="404040"/>
+            <a:pPr algn="l">
+              <a:defRPr sz="2200" b="1">
+                <a:solidFill>
+                  <a:srgbClr val="E86C00"/>
                 </a:solidFill>
               </a:defRPr>
             </a:pPr>
             <a:r>
-              <a:t>TD TIC 01  •  Diapositive 4/10</a:t>
-            </a:r>
-          </a:p>
-        </p:txBody>
-      </p:sp>
+              <a:t>Application concrète</a:t>
+            </a:r>
+          </a:p>
+        </p:txBody>
+      </p:sp>
+      <p:sp>
+        <p:nvSpPr>
+          <p:cNvPr id="4" name="Rectangle 3"/>
+          <p:cNvSpPr/>
+          <p:nvPr/>
+        </p:nvSpPr>
+        <p:spPr>
+          <a:xfrm>
+            <a:off x="548640" y="1051560"/>
+            <a:ext cx="2743200" cy="36576"/>
+          </a:xfrm>
+          <a:prstGeom prst="rect">
+            <a:avLst/>
+          </a:prstGeom>
+          <a:solidFill>
+            <a:srgbClr val="E86C00"/>
+          </a:solidFill>
+          <a:ln>
+            <a:noFill/>
+          </a:ln>
+        </p:spPr>
+        <p:style>
+          <a:lnRef idx="1">
+            <a:schemeClr val="accent1"/>
+          </a:lnRef>
+          <a:fillRef idx="3">
+            <a:schemeClr val="accent1"/>
+          </a:fillRef>
+          <a:effectRef idx="2">
+            <a:schemeClr val="accent1"/>
+          </a:effectRef>
+          <a:fontRef idx="minor">
+            <a:schemeClr val="lt1"/>
+          </a:fontRef>
+        </p:style>
+        <p:txBody>
+          <a:bodyPr rtlCol="0" anchor="ctr"/>
+          <a:lstStyle/>
+          <a:p>
+            <a:pPr algn="ctr"/>
+          </a:p>
+        </p:txBody>
+      </p:sp>
+      <p:sp>
+        <p:nvSpPr>
+          <p:cNvPr id="5" name="TextBox 4"/>
+          <p:cNvSpPr txBox="1"/>
+          <p:nvPr/>
+        </p:nvSpPr>
+        <p:spPr>
+          <a:xfrm>
+            <a:off x="640080" y="2011680"/>
+            <a:ext cx="7863840" cy="4572000"/>
+          </a:xfrm>
+          <a:prstGeom prst="rect">
+            <a:avLst/>
+          </a:prstGeom>
+          <a:noFill/>
+        </p:spPr>
+        <p:txBody>
+          <a:bodyPr wrap="square">
+            <a:spAutoFit/>
+          </a:bodyPr>
+          <a:lstStyle/>
+          <a:p>
+            <a:pPr>
+              <a:spcAft>
+                <a:spcPts val="600"/>
+              </a:spcAft>
+              <a:defRPr sz="1500">
+                <a:solidFill>
+                  <a:srgbClr val="1A1A1A"/>
+                </a:solidFill>
+              </a:defRPr>
+            </a:pPr>
+            <a:r>
+              <a:t>•  Appliquez ces concepts dans vos travaux</a:t>
+            </a:r>
+          </a:p>
+          <a:p>
+            <a:pPr>
+              <a:spcAft>
+                <a:spcPts val="600"/>
+              </a:spcAft>
+              <a:defRPr sz="1500">
+                <a:solidFill>
+                  <a:srgbClr val="1A1A1A"/>
+                </a:solidFill>
+              </a:defRPr>
+            </a:pPr>
+            <a:r>
+              <a:t>•  Pratiquez lors des TD</a:t>
+            </a:r>
+          </a:p>
+        </p:txBody>
+      </p:sp>
+      <p:sp>
+        <p:nvSpPr>
+          <p:cNvPr id="6" name="Rectangle 5"/>
+          <p:cNvSpPr/>
+          <p:nvPr/>
+        </p:nvSpPr>
+        <p:spPr>
+          <a:xfrm>
+            <a:off x="457200" y="4572000"/>
+            <a:ext cx="8229600" cy="2011680"/>
+          </a:xfrm>
+          <a:prstGeom prst="rect">
+            <a:avLst/>
+          </a:prstGeom>
+          <a:solidFill>
+            <a:srgbClr val="FFF8F0"/>
+          </a:solidFill>
+          <a:ln>
+            <a:noFill/>
+          </a:ln>
+        </p:spPr>
+        <p:style>
+          <a:lnRef idx="1">
+            <a:schemeClr val="accent1"/>
+          </a:lnRef>
+          <a:fillRef idx="3">
+            <a:schemeClr val="accent1"/>
+          </a:fillRef>
+          <a:effectRef idx="2">
+            <a:schemeClr val="accent1"/>
+          </a:effectRef>
+          <a:fontRef idx="minor">
+            <a:schemeClr val="lt1"/>
+          </a:fontRef>
+        </p:style>
+        <p:txBody>
+          <a:bodyPr rtlCol="0" anchor="ctr"/>
+          <a:lstStyle/>
+          <a:p>
+            <a:pPr algn="ctr"/>
+          </a:p>
+        </p:txBody>
+      </p:sp>
+      <p:sp>
+        <p:nvSpPr>
+          <p:cNvPr id="7" name="Rectangle 6"/>
+          <p:cNvSpPr/>
+          <p:nvPr/>
+        </p:nvSpPr>
+        <p:spPr>
+          <a:xfrm>
+            <a:off x="457200" y="4572000"/>
+            <a:ext cx="91440" cy="2011680"/>
+          </a:xfrm>
+          <a:prstGeom prst="rect">
+            <a:avLst/>
+          </a:prstGeom>
+          <a:solidFill>
+            <a:srgbClr val="E86C00"/>
+          </a:solidFill>
+          <a:ln>
+            <a:noFill/>
+          </a:ln>
+        </p:spPr>
+        <p:style>
+          <a:lnRef idx="1">
+            <a:schemeClr val="accent1"/>
+          </a:lnRef>
+          <a:fillRef idx="3">
+            <a:schemeClr val="accent1"/>
+          </a:fillRef>
+          <a:effectRef idx="2">
+            <a:schemeClr val="accent1"/>
+          </a:effectRef>
+          <a:fontRef idx="minor">
+            <a:schemeClr val="lt1"/>
+          </a:fontRef>
+        </p:style>
+        <p:txBody>
+          <a:bodyPr rtlCol="0" anchor="ctr"/>
+          <a:lstStyle/>
+          <a:p>
+            <a:pPr algn="ctr"/>
+          </a:p>
+        </p:txBody>
+      </p:sp>
+      <p:sp>
+        <p:nvSpPr>
+          <p:cNvPr id="8" name="TextBox 7"/>
+          <p:cNvSpPr txBox="1"/>
+          <p:nvPr/>
+        </p:nvSpPr>
+        <p:spPr>
+          <a:xfrm>
+            <a:off x="731520" y="4663440"/>
+            <a:ext cx="7772400" cy="1828800"/>
+          </a:xfrm>
+          <a:prstGeom prst="rect">
+            <a:avLst/>
+          </a:prstGeom>
+          <a:noFill/>
+        </p:spPr>
+        <p:txBody>
+          <a:bodyPr wrap="square">
+            <a:spAutoFit/>
+          </a:bodyPr>
+          <a:lstStyle/>
+          <a:p>
+            <a:r>
+              <a:rPr sz="1300" b="1">
+                <a:solidFill>
+                  <a:srgbClr val="E86C00"/>
+                </a:solidFill>
+              </a:rPr>
+              <a:t>Intérêt pratique pour vous
+</a:t>
+            </a:r>
+            <a:r>
+              <a:rPr sz="1200">
+                <a:solidFill>
+                  <a:srgbClr val="1A1A1A"/>
+                </a:solidFill>
+              </a:rPr>
+              <a:t>Cette compétence vous servira dans votre vie universitaire et professionnelle.</a:t>
+            </a:r>
+          </a:p>
+        </p:txBody>
+      </p:sp>
+      <p:pic>
+        <p:nvPicPr>
+          <p:cNvPr id="9" name="Picture 8" descr="c01_11_trends.png"/>
+          <p:cNvPicPr>
+            <a:picLocks noChangeAspect="1"/>
+          </p:cNvPicPr>
+          <p:nvPr/>
+        </p:nvPicPr>
+        <p:blipFill>
+          <a:blip r:embed="rId2"/>
+          <a:stretch>
+            <a:fillRect/>
+          </a:stretch>
+        </p:blipFill>
+        <p:spPr>
+          <a:xfrm>
+            <a:off x="5029200" y="3200400"/>
+            <a:ext cx="3200400" cy="1828800"/>
+          </a:xfrm>
+          <a:prstGeom prst="rect">
+            <a:avLst/>
+          </a:prstGeom>
+        </p:spPr>
+      </p:pic>
     </p:spTree>
   </p:cSld>
   <p:clrMapOvr>
     <a:masterClrMapping/>
   </p:clrMapOvr>
-  <p:transition spd="med">
-    <p:fade/>
-  </p:transition>
 </p:sld>
 </file>
 
-<file path=ppt/slides/slide5.xml><?xml version="1.0" encoding="utf-8"?>
+<file path=ppt/slides/slide14.xml><?xml version="1.0" encoding="utf-8"?>
 <p:sld xmlns:a="http://schemas.openxmlformats.org/drawingml/2006/main" xmlns:p="http://schemas.openxmlformats.org/presentationml/2006/main" xmlns:r="http://schemas.openxmlformats.org/officeDocument/2006/relationships">
   <p:cSld>
+    <p:bg>
+      <p:bgPr>
+        <a:solidFill>
+          <a:srgbClr val="FFFFFF"/>
+        </a:solidFill>
+        <a:effectLst/>
+      </p:bgPr>
+    </p:bg>
     <p:spTree>
       <p:nvGrpSpPr>
         <p:cNvPr id="1" name=""/>
@@ -4028,75 +4848,57 @@
       <p:grpSpPr/>
       <p:sp>
         <p:nvSpPr>
-          <p:cNvPr id="2" name="Title 1"/>
-          <p:cNvSpPr>
-            <a:spLocks noGrp="1"/>
-          </p:cNvSpPr>
-          <p:nvPr>
-            <p:ph type="title"/>
-          </p:nvPr>
-        </p:nvSpPr>
-        <p:spPr/>
-        <p:txBody>
-          <a:bodyPr/>
-          <a:lstStyle/>
-          <a:p>
-            <a:r>
-              <a:t>Exercice 3 (18 min)</a:t>
-            </a:r>
-          </a:p>
-        </p:txBody>
-      </p:sp>
-      <p:sp>
-        <p:nvSpPr>
-          <p:cNvPr id="3" name="Content Placeholder 2"/>
-          <p:cNvSpPr>
-            <a:spLocks noGrp="1"/>
-          </p:cNvSpPr>
-          <p:nvPr>
-            <p:ph idx="1"/>
-          </p:nvPr>
-        </p:nvSpPr>
-        <p:spPr/>
-        <p:txBody>
-          <a:bodyPr/>
-          <a:lstStyle/>
-          <a:p>
-            <a:pPr>
-              <a:defRPr sz="2000"/>
-            </a:pPr>
-            <a:r>
-              <a:t>3️⃣ Énoncé polycopié TD</a:t>
-            </a:r>
-          </a:p>
-          <a:p>
-            <a:pPr>
-              <a:defRPr sz="2000"/>
-            </a:pPr>
-            <a:r>
-              <a:t>3️⃣ Travail guidé</a:t>
-            </a:r>
-          </a:p>
-          <a:p>
-            <a:pPr>
-              <a:defRPr sz="2000"/>
-            </a:pPr>
-            <a:r>
-              <a:t>3️⃣ Corrigé détaillé</a:t>
-            </a:r>
-          </a:p>
-        </p:txBody>
-      </p:sp>
-      <p:sp>
-        <p:nvSpPr>
-          <p:cNvPr id="4" name="TextBox 3"/>
+          <p:cNvPr id="2" name="Rectangle 1"/>
+          <p:cNvSpPr/>
+          <p:nvPr/>
+        </p:nvSpPr>
+        <p:spPr>
+          <a:xfrm>
+            <a:off x="0" y="0"/>
+            <a:ext cx="137160" cy="6858000"/>
+          </a:xfrm>
+          <a:prstGeom prst="rect">
+            <a:avLst/>
+          </a:prstGeom>
+          <a:solidFill>
+            <a:srgbClr val="E86C00"/>
+          </a:solidFill>
+          <a:ln>
+            <a:noFill/>
+          </a:ln>
+        </p:spPr>
+        <p:style>
+          <a:lnRef idx="1">
+            <a:schemeClr val="accent1"/>
+          </a:lnRef>
+          <a:fillRef idx="3">
+            <a:schemeClr val="accent1"/>
+          </a:fillRef>
+          <a:effectRef idx="2">
+            <a:schemeClr val="accent1"/>
+          </a:effectRef>
+          <a:fontRef idx="minor">
+            <a:schemeClr val="lt1"/>
+          </a:fontRef>
+        </p:style>
+        <p:txBody>
+          <a:bodyPr rtlCol="0" anchor="ctr"/>
+          <a:lstStyle/>
+          <a:p>
+            <a:pPr algn="ctr"/>
+          </a:p>
+        </p:txBody>
+      </p:sp>
+      <p:sp>
+        <p:nvSpPr>
+          <p:cNvPr id="3" name="TextBox 2"/>
           <p:cNvSpPr txBox="1"/>
           <p:nvPr/>
         </p:nvSpPr>
         <p:spPr>
           <a:xfrm>
-            <a:off x="365760" y="6446520"/>
-            <a:ext cx="8412480" cy="320040"/>
+            <a:off x="548640" y="365760"/>
+            <a:ext cx="7772400" cy="731520"/>
           </a:xfrm>
           <a:prstGeom prst="rect">
             <a:avLst/>
@@ -4104,38 +4906,336 @@
           <a:noFill/>
         </p:spPr>
         <p:txBody>
-          <a:bodyPr wrap="none">
+          <a:bodyPr wrap="square">
             <a:spAutoFit/>
           </a:bodyPr>
           <a:lstStyle/>
           <a:p>
-            <a:pPr algn="ctr">
-              <a:defRPr sz="900">
-                <a:solidFill>
-                  <a:srgbClr val="404040"/>
+            <a:pPr algn="l">
+              <a:defRPr sz="2200" b="1">
+                <a:solidFill>
+                  <a:srgbClr val="E86C00"/>
                 </a:solidFill>
               </a:defRPr>
             </a:pPr>
             <a:r>
-              <a:t>TD TIC 01  •  Diapositive 5/10</a:t>
-            </a:r>
-          </a:p>
-        </p:txBody>
-      </p:sp>
+              <a:t>Synthèse : Intérêt pratique global</a:t>
+            </a:r>
+          </a:p>
+        </p:txBody>
+      </p:sp>
+      <p:sp>
+        <p:nvSpPr>
+          <p:cNvPr id="4" name="Rectangle 3"/>
+          <p:cNvSpPr/>
+          <p:nvPr/>
+        </p:nvSpPr>
+        <p:spPr>
+          <a:xfrm>
+            <a:off x="548640" y="1051560"/>
+            <a:ext cx="2743200" cy="36576"/>
+          </a:xfrm>
+          <a:prstGeom prst="rect">
+            <a:avLst/>
+          </a:prstGeom>
+          <a:solidFill>
+            <a:srgbClr val="E86C00"/>
+          </a:solidFill>
+          <a:ln>
+            <a:noFill/>
+          </a:ln>
+        </p:spPr>
+        <p:style>
+          <a:lnRef idx="1">
+            <a:schemeClr val="accent1"/>
+          </a:lnRef>
+          <a:fillRef idx="3">
+            <a:schemeClr val="accent1"/>
+          </a:fillRef>
+          <a:effectRef idx="2">
+            <a:schemeClr val="accent1"/>
+          </a:effectRef>
+          <a:fontRef idx="minor">
+            <a:schemeClr val="lt1"/>
+          </a:fontRef>
+        </p:style>
+        <p:txBody>
+          <a:bodyPr rtlCol="0" anchor="ctr"/>
+          <a:lstStyle/>
+          <a:p>
+            <a:pPr algn="ctr"/>
+          </a:p>
+        </p:txBody>
+      </p:sp>
+      <p:sp>
+        <p:nvSpPr>
+          <p:cNvPr id="5" name="TextBox 4"/>
+          <p:cNvSpPr txBox="1"/>
+          <p:nvPr/>
+        </p:nvSpPr>
+        <p:spPr>
+          <a:xfrm>
+            <a:off x="640080" y="2011680"/>
+            <a:ext cx="7863840" cy="4572000"/>
+          </a:xfrm>
+          <a:prstGeom prst="rect">
+            <a:avLst/>
+          </a:prstGeom>
+          <a:noFill/>
+        </p:spPr>
+        <p:txBody>
+          <a:bodyPr wrap="square">
+            <a:spAutoFit/>
+          </a:bodyPr>
+          <a:lstStyle/>
+          <a:p>
+            <a:pPr>
+              <a:spcAft>
+                <a:spcPts val="600"/>
+              </a:spcAft>
+              <a:defRPr sz="1500">
+                <a:solidFill>
+                  <a:srgbClr val="1A1A1A"/>
+                </a:solidFill>
+              </a:defRPr>
+            </a:pPr>
+            <a:r>
+              <a:t>•  Exercice 1 — Définition personnelle(15 min)</a:t>
+            </a:r>
+          </a:p>
+          <a:p>
+            <a:pPr>
+              <a:spcAft>
+                <a:spcPts val="600"/>
+              </a:spcAft>
+              <a:defRPr sz="1500">
+                <a:solidFill>
+                  <a:srgbClr val="1A1A1A"/>
+                </a:solidFill>
+              </a:defRPr>
+            </a:pPr>
+            <a:r>
+              <a:t>•  Exercice 2 — Les trois dimensions(15 min)</a:t>
+            </a:r>
+          </a:p>
+          <a:p>
+            <a:pPr>
+              <a:spcAft>
+                <a:spcPts val="600"/>
+              </a:spcAft>
+              <a:defRPr sz="1500">
+                <a:solidFill>
+                  <a:srgbClr val="1A1A1A"/>
+                </a:solidFill>
+              </a:defRPr>
+            </a:pPr>
+            <a:r>
+              <a:t>•  Exercice 3 — Fonctions des TIC(18 min)</a:t>
+            </a:r>
+          </a:p>
+          <a:p>
+            <a:pPr>
+              <a:spcAft>
+                <a:spcPts val="600"/>
+              </a:spcAft>
+              <a:defRPr sz="1500">
+                <a:solidFill>
+                  <a:srgbClr val="1A1A1A"/>
+                </a:solidFill>
+              </a:defRPr>
+            </a:pPr>
+            <a:r>
+              <a:t>•  Exercice 4 — Applications en langues(18 min)</a:t>
+            </a:r>
+          </a:p>
+          <a:p>
+            <a:pPr>
+              <a:spcAft>
+                <a:spcPts val="600"/>
+              </a:spcAft>
+              <a:defRPr sz="1500">
+                <a:solidFill>
+                  <a:srgbClr val="1A1A1A"/>
+                </a:solidFill>
+              </a:defRPr>
+            </a:pPr>
+            <a:r>
+              <a:t>•  Exercice 5 — Réflexion critique(14 min)</a:t>
+            </a:r>
+          </a:p>
+        </p:txBody>
+      </p:sp>
+      <p:sp>
+        <p:nvSpPr>
+          <p:cNvPr id="6" name="Rectangle 5"/>
+          <p:cNvSpPr/>
+          <p:nvPr/>
+        </p:nvSpPr>
+        <p:spPr>
+          <a:xfrm>
+            <a:off x="457200" y="4572000"/>
+            <a:ext cx="8229600" cy="2011680"/>
+          </a:xfrm>
+          <a:prstGeom prst="rect">
+            <a:avLst/>
+          </a:prstGeom>
+          <a:solidFill>
+            <a:srgbClr val="FFF8F0"/>
+          </a:solidFill>
+          <a:ln>
+            <a:noFill/>
+          </a:ln>
+        </p:spPr>
+        <p:style>
+          <a:lnRef idx="1">
+            <a:schemeClr val="accent1"/>
+          </a:lnRef>
+          <a:fillRef idx="3">
+            <a:schemeClr val="accent1"/>
+          </a:fillRef>
+          <a:effectRef idx="2">
+            <a:schemeClr val="accent1"/>
+          </a:effectRef>
+          <a:fontRef idx="minor">
+            <a:schemeClr val="lt1"/>
+          </a:fontRef>
+        </p:style>
+        <p:txBody>
+          <a:bodyPr rtlCol="0" anchor="ctr"/>
+          <a:lstStyle/>
+          <a:p>
+            <a:pPr algn="ctr"/>
+          </a:p>
+        </p:txBody>
+      </p:sp>
+      <p:sp>
+        <p:nvSpPr>
+          <p:cNvPr id="7" name="Rectangle 6"/>
+          <p:cNvSpPr/>
+          <p:nvPr/>
+        </p:nvSpPr>
+        <p:spPr>
+          <a:xfrm>
+            <a:off x="457200" y="4572000"/>
+            <a:ext cx="91440" cy="2011680"/>
+          </a:xfrm>
+          <a:prstGeom prst="rect">
+            <a:avLst/>
+          </a:prstGeom>
+          <a:solidFill>
+            <a:srgbClr val="E86C00"/>
+          </a:solidFill>
+          <a:ln>
+            <a:noFill/>
+          </a:ln>
+        </p:spPr>
+        <p:style>
+          <a:lnRef idx="1">
+            <a:schemeClr val="accent1"/>
+          </a:lnRef>
+          <a:fillRef idx="3">
+            <a:schemeClr val="accent1"/>
+          </a:fillRef>
+          <a:effectRef idx="2">
+            <a:schemeClr val="accent1"/>
+          </a:effectRef>
+          <a:fontRef idx="minor">
+            <a:schemeClr val="lt1"/>
+          </a:fontRef>
+        </p:style>
+        <p:txBody>
+          <a:bodyPr rtlCol="0" anchor="ctr"/>
+          <a:lstStyle/>
+          <a:p>
+            <a:pPr algn="ctr"/>
+          </a:p>
+        </p:txBody>
+      </p:sp>
+      <p:sp>
+        <p:nvSpPr>
+          <p:cNvPr id="8" name="TextBox 7"/>
+          <p:cNvSpPr txBox="1"/>
+          <p:nvPr/>
+        </p:nvSpPr>
+        <p:spPr>
+          <a:xfrm>
+            <a:off x="731520" y="4663440"/>
+            <a:ext cx="7772400" cy="1828800"/>
+          </a:xfrm>
+          <a:prstGeom prst="rect">
+            <a:avLst/>
+          </a:prstGeom>
+          <a:noFill/>
+        </p:spPr>
+        <p:txBody>
+          <a:bodyPr wrap="square">
+            <a:spAutoFit/>
+          </a:bodyPr>
+          <a:lstStyle/>
+          <a:p>
+            <a:r>
+              <a:rPr sz="1300" b="1">
+                <a:solidFill>
+                  <a:srgbClr val="E86C00"/>
+                </a:solidFill>
+              </a:rPr>
+              <a:t>Intérêt pratique pour vous
+</a:t>
+            </a:r>
+            <a:r>
+              <a:rPr sz="1200">
+                <a:solidFill>
+                  <a:srgbClr val="1A1A1A"/>
+                </a:solidFill>
+              </a:rPr>
+              <a:t>Ensemble, ces compétences numériques vous permettent de travailler efficacement, communiquer professionnellement et résoudre les problèmes courants de la vie universitaire.</a:t>
+            </a:r>
+          </a:p>
+        </p:txBody>
+      </p:sp>
+      <p:pic>
+        <p:nvPicPr>
+          <p:cNvPr id="9" name="Picture 8" descr="c01_12_summary.png"/>
+          <p:cNvPicPr>
+            <a:picLocks noChangeAspect="1"/>
+          </p:cNvPicPr>
+          <p:nvPr/>
+        </p:nvPicPr>
+        <p:blipFill>
+          <a:blip r:embed="rId2"/>
+          <a:stretch>
+            <a:fillRect/>
+          </a:stretch>
+        </p:blipFill>
+        <p:spPr>
+          <a:xfrm>
+            <a:off x="5029200" y="3200400"/>
+            <a:ext cx="3200400" cy="1828800"/>
+          </a:xfrm>
+          <a:prstGeom prst="rect">
+            <a:avLst/>
+          </a:prstGeom>
+        </p:spPr>
+      </p:pic>
     </p:spTree>
   </p:cSld>
   <p:clrMapOvr>
     <a:masterClrMapping/>
   </p:clrMapOvr>
-  <p:transition spd="med">
-    <p:fade/>
-  </p:transition>
 </p:sld>
 </file>
 
-<file path=ppt/slides/slide6.xml><?xml version="1.0" encoding="utf-8"?>
+<file path=ppt/slides/slide15.xml><?xml version="1.0" encoding="utf-8"?>
 <p:sld xmlns:a="http://schemas.openxmlformats.org/drawingml/2006/main" xmlns:p="http://schemas.openxmlformats.org/presentationml/2006/main" xmlns:r="http://schemas.openxmlformats.org/officeDocument/2006/relationships">
   <p:cSld>
+    <p:bg>
+      <p:bgPr>
+        <a:solidFill>
+          <a:srgbClr val="143D24"/>
+        </a:solidFill>
+        <a:effectLst/>
+      </p:bgPr>
+    </p:bg>
     <p:spTree>
       <p:nvGrpSpPr>
         <p:cNvPr id="1" name=""/>
@@ -4145,61 +5245,78 @@
       <p:grpSpPr/>
       <p:sp>
         <p:nvSpPr>
-          <p:cNvPr id="2" name="Title 1"/>
-          <p:cNvSpPr>
-            <a:spLocks noGrp="1"/>
-          </p:cNvSpPr>
-          <p:nvPr>
-            <p:ph type="title"/>
-          </p:nvPr>
-        </p:nvSpPr>
-        <p:spPr/>
-        <p:txBody>
-          <a:bodyPr/>
-          <a:lstStyle/>
-          <a:p>
-            <a:r>
-              <a:t>Exercice 4 (18 min)</a:t>
-            </a:r>
-          </a:p>
-        </p:txBody>
-      </p:sp>
-      <p:sp>
-        <p:nvSpPr>
-          <p:cNvPr id="3" name="Content Placeholder 2"/>
-          <p:cNvSpPr>
-            <a:spLocks noGrp="1"/>
-          </p:cNvSpPr>
-          <p:nvPr>
-            <p:ph idx="1"/>
-          </p:nvPr>
-        </p:nvSpPr>
-        <p:spPr/>
-        <p:txBody>
-          <a:bodyPr/>
-          <a:lstStyle/>
-          <a:p>
-            <a:pPr>
-              <a:defRPr sz="2000"/>
+          <p:cNvPr id="2" name="Rectangle 1"/>
+          <p:cNvSpPr/>
+          <p:nvPr/>
+        </p:nvSpPr>
+        <p:spPr>
+          <a:xfrm>
+            <a:off x="0" y="0"/>
+            <a:ext cx="9144000" cy="54864"/>
+          </a:xfrm>
+          <a:prstGeom prst="rect">
+            <a:avLst/>
+          </a:prstGeom>
+          <a:solidFill>
+            <a:srgbClr val="2E8654"/>
+          </a:solidFill>
+          <a:ln>
+            <a:noFill/>
+          </a:ln>
+        </p:spPr>
+        <p:style>
+          <a:lnRef idx="1">
+            <a:schemeClr val="accent1"/>
+          </a:lnRef>
+          <a:fillRef idx="3">
+            <a:schemeClr val="accent1"/>
+          </a:fillRef>
+          <a:effectRef idx="2">
+            <a:schemeClr val="accent1"/>
+          </a:effectRef>
+          <a:fontRef idx="minor">
+            <a:schemeClr val="lt1"/>
+          </a:fontRef>
+        </p:style>
+        <p:txBody>
+          <a:bodyPr rtlCol="0" anchor="ctr"/>
+          <a:lstStyle/>
+          <a:p>
+            <a:pPr algn="ctr"/>
+          </a:p>
+        </p:txBody>
+      </p:sp>
+      <p:sp>
+        <p:nvSpPr>
+          <p:cNvPr id="3" name="TextBox 2"/>
+          <p:cNvSpPr txBox="1"/>
+          <p:nvPr/>
+        </p:nvSpPr>
+        <p:spPr>
+          <a:xfrm>
+            <a:off x="731520" y="457200"/>
+            <a:ext cx="7680960" cy="731520"/>
+          </a:xfrm>
+          <a:prstGeom prst="rect">
+            <a:avLst/>
+          </a:prstGeom>
+          <a:noFill/>
+        </p:spPr>
+        <p:txBody>
+          <a:bodyPr wrap="square">
+            <a:spAutoFit/>
+          </a:bodyPr>
+          <a:lstStyle/>
+          <a:p>
+            <a:pPr algn="ctr">
+              <a:defRPr sz="2800" b="1">
+                <a:solidFill>
+                  <a:srgbClr val="FFFFFF"/>
+                </a:solidFill>
+              </a:defRPr>
             </a:pPr>
             <a:r>
-              <a:t>4️⃣ Énoncé polycopié TD</a:t>
-            </a:r>
-          </a:p>
-          <a:p>
-            <a:pPr>
-              <a:defRPr sz="2000"/>
-            </a:pPr>
-            <a:r>
-              <a:t>4️⃣ Travail guidé</a:t>
-            </a:r>
-          </a:p>
-          <a:p>
-            <a:pPr>
-              <a:defRPr sz="2000"/>
-            </a:pPr>
-            <a:r>
-              <a:t>4️⃣ Corrigé détaillé</a:t>
+              <a:t>Conclusion</a:t>
             </a:r>
           </a:p>
         </p:txBody>
@@ -4212,8 +5329,8 @@
         </p:nvSpPr>
         <p:spPr>
           <a:xfrm>
-            <a:off x="365760" y="6446520"/>
-            <a:ext cx="8412480" cy="320040"/>
+            <a:off x="731520" y="1645920"/>
+            <a:ext cx="7863840" cy="4572000"/>
           </a:xfrm>
           <a:prstGeom prst="rect">
             <a:avLst/>
@@ -4221,38 +5338,259 @@
           <a:noFill/>
         </p:spPr>
         <p:txBody>
-          <a:bodyPr wrap="none">
+          <a:bodyPr wrap="square">
             <a:spAutoFit/>
           </a:bodyPr>
           <a:lstStyle/>
           <a:p>
-            <a:pPr algn="ctr">
-              <a:defRPr sz="900">
-                <a:solidFill>
-                  <a:srgbClr val="404040"/>
+            <a:pPr>
+              <a:spcAft>
+                <a:spcPts val="600"/>
+              </a:spcAft>
+              <a:defRPr sz="1600">
+                <a:solidFill>
+                  <a:srgbClr val="D4EDDA"/>
                 </a:solidFill>
               </a:defRPr>
             </a:pPr>
             <a:r>
-              <a:t>TD TIC 01  •  Diapositive 6/10</a:t>
-            </a:r>
-          </a:p>
-        </p:txBody>
-      </p:sp>
+              <a:t>•  Exercice 1 — Définition personnelle(15 min)</a:t>
+            </a:r>
+          </a:p>
+          <a:p>
+            <a:pPr>
+              <a:spcAft>
+                <a:spcPts val="600"/>
+              </a:spcAft>
+              <a:defRPr sz="1600">
+                <a:solidFill>
+                  <a:srgbClr val="D4EDDA"/>
+                </a:solidFill>
+              </a:defRPr>
+            </a:pPr>
+            <a:r>
+              <a:t>•  Exercice 2 — Les trois dimensions(15 min)</a:t>
+            </a:r>
+          </a:p>
+          <a:p>
+            <a:pPr>
+              <a:spcAft>
+                <a:spcPts val="600"/>
+              </a:spcAft>
+              <a:defRPr sz="1600">
+                <a:solidFill>
+                  <a:srgbClr val="D4EDDA"/>
+                </a:solidFill>
+              </a:defRPr>
+            </a:pPr>
+            <a:r>
+              <a:t>•  Exercice 3 — Fonctions des TIC(18 min)</a:t>
+            </a:r>
+          </a:p>
+          <a:p>
+            <a:pPr>
+              <a:spcAft>
+                <a:spcPts val="600"/>
+              </a:spcAft>
+              <a:defRPr sz="1600">
+                <a:solidFill>
+                  <a:srgbClr val="D4EDDA"/>
+                </a:solidFill>
+              </a:defRPr>
+            </a:pPr>
+            <a:r>
+              <a:t>•  Exercice 4 — Applications en langues(18 min)</a:t>
+            </a:r>
+          </a:p>
+          <a:p>
+            <a:pPr>
+              <a:spcAft>
+                <a:spcPts val="600"/>
+              </a:spcAft>
+              <a:defRPr sz="1600">
+                <a:solidFill>
+                  <a:srgbClr val="D4EDDA"/>
+                </a:solidFill>
+              </a:defRPr>
+            </a:pPr>
+            <a:r>
+              <a:t>•  Exercice 5 — Réflexion critique(14 min)</a:t>
+            </a:r>
+          </a:p>
+        </p:txBody>
+      </p:sp>
+      <p:sp>
+        <p:nvSpPr>
+          <p:cNvPr id="5" name="Rectangle 4"/>
+          <p:cNvSpPr/>
+          <p:nvPr/>
+        </p:nvSpPr>
+        <p:spPr>
+          <a:xfrm>
+            <a:off x="731520" y="5029200"/>
+            <a:ext cx="7680960" cy="36576"/>
+          </a:xfrm>
+          <a:prstGeom prst="rect">
+            <a:avLst/>
+          </a:prstGeom>
+          <a:solidFill>
+            <a:srgbClr val="2E8654"/>
+          </a:solidFill>
+          <a:ln>
+            <a:noFill/>
+          </a:ln>
+        </p:spPr>
+        <p:style>
+          <a:lnRef idx="1">
+            <a:schemeClr val="accent1"/>
+          </a:lnRef>
+          <a:fillRef idx="3">
+            <a:schemeClr val="accent1"/>
+          </a:fillRef>
+          <a:effectRef idx="2">
+            <a:schemeClr val="accent1"/>
+          </a:effectRef>
+          <a:fontRef idx="minor">
+            <a:schemeClr val="lt1"/>
+          </a:fontRef>
+        </p:style>
+        <p:txBody>
+          <a:bodyPr rtlCol="0" anchor="ctr"/>
+          <a:lstStyle/>
+          <a:p>
+            <a:pPr algn="ctr"/>
+          </a:p>
+        </p:txBody>
+      </p:sp>
+      <p:sp>
+        <p:nvSpPr>
+          <p:cNvPr id="6" name="TextBox 5"/>
+          <p:cNvSpPr txBox="1"/>
+          <p:nvPr/>
+        </p:nvSpPr>
+        <p:spPr>
+          <a:xfrm>
+            <a:off x="731520" y="5303520"/>
+            <a:ext cx="7680960" cy="914400"/>
+          </a:xfrm>
+          <a:prstGeom prst="rect">
+            <a:avLst/>
+          </a:prstGeom>
+          <a:noFill/>
+        </p:spPr>
+        <p:txBody>
+          <a:bodyPr wrap="square">
+            <a:spAutoFit/>
+          </a:bodyPr>
+          <a:lstStyle/>
+          <a:p>
+            <a:pPr algn="ctr">
+              <a:defRPr sz="1400" b="0">
+                <a:solidFill>
+                  <a:srgbClr val="8BC39A"/>
+                </a:solidFill>
+              </a:defRPr>
+            </a:pPr>
+            <a:r>
+              <a:t>Dr. BELACEL Madani</a:t>
+            </a:r>
+            <a:br/>
+            <a:r>
+              <a:t>Université de Mostaganem</a:t>
+            </a:r>
+            <a:br/>
+            <a:r>
+              <a:t>madani.belacel@univ-mosta.dz</a:t>
+            </a:r>
+          </a:p>
+        </p:txBody>
+      </p:sp>
+      <p:sp>
+        <p:nvSpPr>
+          <p:cNvPr id="7" name="Rectangle 6"/>
+          <p:cNvSpPr/>
+          <p:nvPr/>
+        </p:nvSpPr>
+        <p:spPr>
+          <a:xfrm>
+            <a:off x="0" y="6803136"/>
+            <a:ext cx="9144000" cy="54864"/>
+          </a:xfrm>
+          <a:prstGeom prst="rect">
+            <a:avLst/>
+          </a:prstGeom>
+          <a:solidFill>
+            <a:srgbClr val="2E8654"/>
+          </a:solidFill>
+          <a:ln>
+            <a:noFill/>
+          </a:ln>
+        </p:spPr>
+        <p:style>
+          <a:lnRef idx="1">
+            <a:schemeClr val="accent1"/>
+          </a:lnRef>
+          <a:fillRef idx="3">
+            <a:schemeClr val="accent1"/>
+          </a:fillRef>
+          <a:effectRef idx="2">
+            <a:schemeClr val="accent1"/>
+          </a:effectRef>
+          <a:fontRef idx="minor">
+            <a:schemeClr val="lt1"/>
+          </a:fontRef>
+        </p:style>
+        <p:txBody>
+          <a:bodyPr rtlCol="0" anchor="ctr"/>
+          <a:lstStyle/>
+          <a:p>
+            <a:pPr algn="ctr"/>
+          </a:p>
+        </p:txBody>
+      </p:sp>
+      <p:pic>
+        <p:nvPicPr>
+          <p:cNvPr id="8" name="Picture 7" descr="c01_01_timeline.png"/>
+          <p:cNvPicPr>
+            <a:picLocks noChangeAspect="1"/>
+          </p:cNvPicPr>
+          <p:nvPr/>
+        </p:nvPicPr>
+        <p:blipFill>
+          <a:blip r:embed="rId2"/>
+          <a:stretch>
+            <a:fillRect/>
+          </a:stretch>
+        </p:blipFill>
+        <p:spPr>
+          <a:xfrm>
+            <a:off x="5029200" y="3200400"/>
+            <a:ext cx="3200400" cy="1828800"/>
+          </a:xfrm>
+          <a:prstGeom prst="rect">
+            <a:avLst/>
+          </a:prstGeom>
+        </p:spPr>
+      </p:pic>
     </p:spTree>
   </p:cSld>
   <p:clrMapOvr>
     <a:masterClrMapping/>
   </p:clrMapOvr>
-  <p:transition spd="med">
-    <p:fade/>
-  </p:transition>
 </p:sld>
 </file>
 
-<file path=ppt/slides/slide7.xml><?xml version="1.0" encoding="utf-8"?>
+<file path=ppt/slides/slide16.xml><?xml version="1.0" encoding="utf-8"?>
 <p:sld xmlns:a="http://schemas.openxmlformats.org/drawingml/2006/main" xmlns:p="http://schemas.openxmlformats.org/presentationml/2006/main" xmlns:r="http://schemas.openxmlformats.org/officeDocument/2006/relationships">
   <p:cSld>
+    <p:bg>
+      <p:bgPr>
+        <a:solidFill>
+          <a:srgbClr val="FFFFFF"/>
+        </a:solidFill>
+        <a:effectLst/>
+      </p:bgPr>
+    </p:bg>
     <p:spTree>
       <p:nvGrpSpPr>
         <p:cNvPr id="1" name=""/>
@@ -4262,61 +5600,78 @@
       <p:grpSpPr/>
       <p:sp>
         <p:nvSpPr>
-          <p:cNvPr id="2" name="Title 1"/>
-          <p:cNvSpPr>
-            <a:spLocks noGrp="1"/>
-          </p:cNvSpPr>
-          <p:nvPr>
-            <p:ph type="title"/>
-          </p:nvPr>
-        </p:nvSpPr>
-        <p:spPr/>
-        <p:txBody>
-          <a:bodyPr/>
-          <a:lstStyle/>
-          <a:p>
-            <a:r>
-              <a:t>Exercice 5 (14 min)</a:t>
-            </a:r>
-          </a:p>
-        </p:txBody>
-      </p:sp>
-      <p:sp>
-        <p:nvSpPr>
-          <p:cNvPr id="3" name="Content Placeholder 2"/>
-          <p:cNvSpPr>
-            <a:spLocks noGrp="1"/>
-          </p:cNvSpPr>
-          <p:nvPr>
-            <p:ph idx="1"/>
-          </p:nvPr>
-        </p:nvSpPr>
-        <p:spPr/>
-        <p:txBody>
-          <a:bodyPr/>
-          <a:lstStyle/>
-          <a:p>
-            <a:pPr>
-              <a:defRPr sz="2000"/>
+          <p:cNvPr id="2" name="Rectangle 1"/>
+          <p:cNvSpPr/>
+          <p:nvPr/>
+        </p:nvSpPr>
+        <p:spPr>
+          <a:xfrm>
+            <a:off x="0" y="0"/>
+            <a:ext cx="137160" cy="6858000"/>
+          </a:xfrm>
+          <a:prstGeom prst="rect">
+            <a:avLst/>
+          </a:prstGeom>
+          <a:solidFill>
+            <a:srgbClr val="555555"/>
+          </a:solidFill>
+          <a:ln>
+            <a:noFill/>
+          </a:ln>
+        </p:spPr>
+        <p:style>
+          <a:lnRef idx="1">
+            <a:schemeClr val="accent1"/>
+          </a:lnRef>
+          <a:fillRef idx="3">
+            <a:schemeClr val="accent1"/>
+          </a:fillRef>
+          <a:effectRef idx="2">
+            <a:schemeClr val="accent1"/>
+          </a:effectRef>
+          <a:fontRef idx="minor">
+            <a:schemeClr val="lt1"/>
+          </a:fontRef>
+        </p:style>
+        <p:txBody>
+          <a:bodyPr rtlCol="0" anchor="ctr"/>
+          <a:lstStyle/>
+          <a:p>
+            <a:pPr algn="ctr"/>
+          </a:p>
+        </p:txBody>
+      </p:sp>
+      <p:sp>
+        <p:nvSpPr>
+          <p:cNvPr id="3" name="TextBox 2"/>
+          <p:cNvSpPr txBox="1"/>
+          <p:nvPr/>
+        </p:nvSpPr>
+        <p:spPr>
+          <a:xfrm>
+            <a:off x="548640" y="365760"/>
+            <a:ext cx="7772400" cy="640080"/>
+          </a:xfrm>
+          <a:prstGeom prst="rect">
+            <a:avLst/>
+          </a:prstGeom>
+          <a:noFill/>
+        </p:spPr>
+        <p:txBody>
+          <a:bodyPr wrap="square">
+            <a:spAutoFit/>
+          </a:bodyPr>
+          <a:lstStyle/>
+          <a:p>
+            <a:pPr algn="l">
+              <a:defRPr sz="2400" b="1">
+                <a:solidFill>
+                  <a:srgbClr val="555555"/>
+                </a:solidFill>
+              </a:defRPr>
             </a:pPr>
             <a:r>
-              <a:t>5️⃣ Énoncé polycopié TD</a:t>
-            </a:r>
-          </a:p>
-          <a:p>
-            <a:pPr>
-              <a:defRPr sz="2000"/>
-            </a:pPr>
-            <a:r>
-              <a:t>5️⃣ Travail guidé</a:t>
-            </a:r>
-          </a:p>
-          <a:p>
-            <a:pPr>
-              <a:defRPr sz="2000"/>
-            </a:pPr>
-            <a:r>
-              <a:t>5️⃣ Corrigé détaillé</a:t>
+              <a:t>Références et ressources</a:t>
             </a:r>
           </a:p>
         </p:txBody>
@@ -4329,8 +5684,8 @@
         </p:nvSpPr>
         <p:spPr>
           <a:xfrm>
-            <a:off x="365760" y="6446520"/>
-            <a:ext cx="8412480" cy="320040"/>
+            <a:off x="640080" y="1280160"/>
+            <a:ext cx="7863840" cy="4572000"/>
           </a:xfrm>
           <a:prstGeom prst="rect">
             <a:avLst/>
@@ -4338,38 +5693,115 @@
           <a:noFill/>
         </p:spPr>
         <p:txBody>
-          <a:bodyPr wrap="none">
+          <a:bodyPr wrap="square">
             <a:spAutoFit/>
           </a:bodyPr>
           <a:lstStyle/>
           <a:p>
-            <a:pPr algn="ctr">
-              <a:defRPr sz="900">
-                <a:solidFill>
-                  <a:srgbClr val="404040"/>
+            <a:pPr>
+              <a:spcAft>
+                <a:spcPts val="600"/>
+              </a:spcAft>
+              <a:defRPr sz="1400">
+                <a:solidFill>
+                  <a:srgbClr val="555555"/>
                 </a:solidFill>
               </a:defRPr>
             </a:pPr>
             <a:r>
-              <a:t>TD TIC 01  •  Diapositive 7/10</a:t>
-            </a:r>
-          </a:p>
-        </p:txBody>
-      </p:sp>
+              <a:t>•  Programme national TIC - Ministère</a:t>
+            </a:r>
+          </a:p>
+          <a:p>
+            <a:pPr>
+              <a:spcAft>
+                <a:spcPts val="600"/>
+              </a:spcAft>
+              <a:defRPr sz="1400">
+                <a:solidFill>
+                  <a:srgbClr val="555555"/>
+                </a:solidFill>
+              </a:defRPr>
+            </a:pPr>
+            <a:r>
+              <a:t>•  UIT - Définitions TIC</a:t>
+            </a:r>
+          </a:p>
+          <a:p>
+            <a:pPr>
+              <a:spcAft>
+                <a:spcPts val="600"/>
+              </a:spcAft>
+              <a:defRPr sz="1400">
+                <a:solidFill>
+                  <a:srgbClr val="555555"/>
+                </a:solidFill>
+              </a:defRPr>
+            </a:pPr>
+            <a:r>
+              <a:t>•  UNESCO - Compétences numériques</a:t>
+            </a:r>
+          </a:p>
+          <a:p>
+            <a:pPr>
+              <a:spcAft>
+                <a:spcPts val="600"/>
+              </a:spcAft>
+              <a:defRPr sz="1400">
+                <a:solidFill>
+                  <a:srgbClr val="555555"/>
+                </a:solidFill>
+              </a:defRPr>
+            </a:pPr>
+            <a:r>
+              <a:t>•  Guide Moodle Univ-Mosta</a:t>
+            </a:r>
+          </a:p>
+        </p:txBody>
+      </p:sp>
+      <p:pic>
+        <p:nvPicPr>
+          <p:cNvPr id="5" name="Picture 4" descr="c01_02_components.png"/>
+          <p:cNvPicPr>
+            <a:picLocks noChangeAspect="1"/>
+          </p:cNvPicPr>
+          <p:nvPr/>
+        </p:nvPicPr>
+        <p:blipFill>
+          <a:blip r:embed="rId2"/>
+          <a:stretch>
+            <a:fillRect/>
+          </a:stretch>
+        </p:blipFill>
+        <p:spPr>
+          <a:xfrm>
+            <a:off x="5029200" y="3200400"/>
+            <a:ext cx="3200400" cy="1828800"/>
+          </a:xfrm>
+          <a:prstGeom prst="rect">
+            <a:avLst/>
+          </a:prstGeom>
+        </p:spPr>
+      </p:pic>
     </p:spTree>
   </p:cSld>
   <p:clrMapOvr>
     <a:masterClrMapping/>
   </p:clrMapOvr>
-  <p:transition spd="med">
-    <p:fade/>
-  </p:transition>
 </p:sld>
 </file>
 
-<file path=ppt/slides/slide8.xml><?xml version="1.0" encoding="utf-8"?>
+<file path=ppt/slides/slide2.xml><?xml version="1.0" encoding="utf-8"?>
 <p:sld xmlns:a="http://schemas.openxmlformats.org/drawingml/2006/main" xmlns:p="http://schemas.openxmlformats.org/presentationml/2006/main" xmlns:r="http://schemas.openxmlformats.org/officeDocument/2006/relationships">
   <p:cSld>
+    <p:bg>
+      <p:bgPr>
+        <a:solidFill>
+          <a:srgbClr val="FFFFFF"/>
+        </a:solidFill>
+        <a:effectLst/>
+      </p:bgPr>
+    </p:bg>
     <p:spTree>
       <p:nvGrpSpPr>
         <p:cNvPr id="1" name=""/>
@@ -4379,83 +5811,57 @@
       <p:grpSpPr/>
       <p:sp>
         <p:nvSpPr>
-          <p:cNvPr id="2" name="Title 1"/>
-          <p:cNvSpPr>
-            <a:spLocks noGrp="1"/>
-          </p:cNvSpPr>
-          <p:nvPr>
-            <p:ph type="title"/>
-          </p:nvPr>
-        </p:nvSpPr>
-        <p:spPr/>
-        <p:txBody>
-          <a:bodyPr/>
-          <a:lstStyle/>
-          <a:p>
-            <a:r>
-              <a:t>Timing (suite)</a:t>
-            </a:r>
-          </a:p>
-        </p:txBody>
-      </p:sp>
-      <p:sp>
-        <p:nvSpPr>
-          <p:cNvPr id="3" name="Content Placeholder 2"/>
-          <p:cNvSpPr>
-            <a:spLocks noGrp="1"/>
-          </p:cNvSpPr>
-          <p:nvPr>
-            <p:ph idx="1"/>
-          </p:nvPr>
-        </p:nvSpPr>
-        <p:spPr/>
-        <p:txBody>
-          <a:bodyPr/>
-          <a:lstStyle/>
-          <a:p>
-            <a:pPr>
-              <a:defRPr sz="2000"/>
-            </a:pPr>
-            <a:r>
-              <a:t>⏱️ Exercice 4 — Applications en langues : 18 min</a:t>
-            </a:r>
-          </a:p>
-          <a:p>
-            <a:pPr>
-              <a:defRPr sz="2000"/>
-            </a:pPr>
-            <a:r>
-              <a:t>⏱️ Exercice 5 — Réflexion critique : 14 min</a:t>
-            </a:r>
-          </a:p>
-          <a:p>
-            <a:pPr>
-              <a:defRPr sz="2000"/>
-            </a:pPr>
-            <a:r>
-              <a:t>⏱️ Correction collective et synthèse : 5 min</a:t>
-            </a:r>
-          </a:p>
-          <a:p>
-            <a:pPr>
-              <a:defRPr sz="2000"/>
-            </a:pPr>
-            <a:r>
-              <a:t>⏱️ Total : 90 min</a:t>
-            </a:r>
-          </a:p>
-        </p:txBody>
-      </p:sp>
-      <p:sp>
-        <p:nvSpPr>
-          <p:cNvPr id="4" name="TextBox 3"/>
+          <p:cNvPr id="2" name="Rectangle 1"/>
+          <p:cNvSpPr/>
+          <p:nvPr/>
+        </p:nvSpPr>
+        <p:spPr>
+          <a:xfrm>
+            <a:off x="0" y="0"/>
+            <a:ext cx="137160" cy="6858000"/>
+          </a:xfrm>
+          <a:prstGeom prst="rect">
+            <a:avLst/>
+          </a:prstGeom>
+          <a:solidFill>
+            <a:srgbClr val="1A6B3C"/>
+          </a:solidFill>
+          <a:ln>
+            <a:noFill/>
+          </a:ln>
+        </p:spPr>
+        <p:style>
+          <a:lnRef idx="1">
+            <a:schemeClr val="accent1"/>
+          </a:lnRef>
+          <a:fillRef idx="3">
+            <a:schemeClr val="accent1"/>
+          </a:fillRef>
+          <a:effectRef idx="2">
+            <a:schemeClr val="accent1"/>
+          </a:effectRef>
+          <a:fontRef idx="minor">
+            <a:schemeClr val="lt1"/>
+          </a:fontRef>
+        </p:style>
+        <p:txBody>
+          <a:bodyPr rtlCol="0" anchor="ctr"/>
+          <a:lstStyle/>
+          <a:p>
+            <a:pPr algn="ctr"/>
+          </a:p>
+        </p:txBody>
+      </p:sp>
+      <p:sp>
+        <p:nvSpPr>
+          <p:cNvPr id="3" name="TextBox 2"/>
           <p:cNvSpPr txBox="1"/>
           <p:nvPr/>
         </p:nvSpPr>
         <p:spPr>
           <a:xfrm>
-            <a:off x="365760" y="6446520"/>
-            <a:ext cx="8412480" cy="320040"/>
+            <a:off x="548640" y="365760"/>
+            <a:ext cx="7772400" cy="640080"/>
           </a:xfrm>
           <a:prstGeom prst="rect">
             <a:avLst/>
@@ -4463,20 +5869,161 @@
           <a:noFill/>
         </p:spPr>
         <p:txBody>
-          <a:bodyPr wrap="none">
+          <a:bodyPr wrap="square">
             <a:spAutoFit/>
           </a:bodyPr>
           <a:lstStyle/>
           <a:p>
-            <a:pPr algn="ctr">
-              <a:defRPr sz="900">
-                <a:solidFill>
-                  <a:srgbClr val="404040"/>
+            <a:pPr algn="l">
+              <a:defRPr sz="2600" b="1">
+                <a:solidFill>
+                  <a:srgbClr val="1A6B3C"/>
                 </a:solidFill>
               </a:defRPr>
             </a:pPr>
             <a:r>
-              <a:t>TD TIC 01  •  Diapositive 8/10</a:t>
+              <a:t>Plan du cours</a:t>
+            </a:r>
+          </a:p>
+        </p:txBody>
+      </p:sp>
+      <p:sp>
+        <p:nvSpPr>
+          <p:cNvPr id="4" name="Rectangle 3"/>
+          <p:cNvSpPr/>
+          <p:nvPr/>
+        </p:nvSpPr>
+        <p:spPr>
+          <a:xfrm>
+            <a:off x="548640" y="1005840"/>
+            <a:ext cx="2743200" cy="36576"/>
+          </a:xfrm>
+          <a:prstGeom prst="rect">
+            <a:avLst/>
+          </a:prstGeom>
+          <a:solidFill>
+            <a:srgbClr val="2E8654"/>
+          </a:solidFill>
+          <a:ln>
+            <a:noFill/>
+          </a:ln>
+        </p:spPr>
+        <p:style>
+          <a:lnRef idx="1">
+            <a:schemeClr val="accent1"/>
+          </a:lnRef>
+          <a:fillRef idx="3">
+            <a:schemeClr val="accent1"/>
+          </a:fillRef>
+          <a:effectRef idx="2">
+            <a:schemeClr val="accent1"/>
+          </a:effectRef>
+          <a:fontRef idx="minor">
+            <a:schemeClr val="lt1"/>
+          </a:fontRef>
+        </p:style>
+        <p:txBody>
+          <a:bodyPr rtlCol="0" anchor="ctr"/>
+          <a:lstStyle/>
+          <a:p>
+            <a:pPr algn="ctr"/>
+          </a:p>
+        </p:txBody>
+      </p:sp>
+      <p:sp>
+        <p:nvSpPr>
+          <p:cNvPr id="5" name="TextBox 4"/>
+          <p:cNvSpPr txBox="1"/>
+          <p:nvPr/>
+        </p:nvSpPr>
+        <p:spPr>
+          <a:xfrm>
+            <a:off x="548640" y="1371600"/>
+            <a:ext cx="7772400" cy="5029200"/>
+          </a:xfrm>
+          <a:prstGeom prst="rect">
+            <a:avLst/>
+          </a:prstGeom>
+          <a:noFill/>
+        </p:spPr>
+        <p:txBody>
+          <a:bodyPr wrap="square">
+            <a:spAutoFit/>
+          </a:bodyPr>
+          <a:lstStyle/>
+          <a:p>
+            <a:pPr>
+              <a:spcAft>
+                <a:spcPts val="1000"/>
+              </a:spcAft>
+              <a:defRPr sz="1600">
+                <a:solidFill>
+                  <a:srgbClr val="1A1A1A"/>
+                </a:solidFill>
+              </a:defRPr>
+            </a:pPr>
+            <a:r>
+              <a:t>  1.  Exercice 1 — Définition personnelle(15 min)</a:t>
+            </a:r>
+          </a:p>
+          <a:p>
+            <a:pPr>
+              <a:spcAft>
+                <a:spcPts val="1000"/>
+              </a:spcAft>
+              <a:defRPr sz="1600">
+                <a:solidFill>
+                  <a:srgbClr val="1A1A1A"/>
+                </a:solidFill>
+              </a:defRPr>
+            </a:pPr>
+            <a:r>
+              <a:t>  2.  Exercice 2 — Les trois dimensions(15 min)</a:t>
+            </a:r>
+          </a:p>
+          <a:p>
+            <a:pPr>
+              <a:spcAft>
+                <a:spcPts val="1000"/>
+              </a:spcAft>
+              <a:defRPr sz="1600">
+                <a:solidFill>
+                  <a:srgbClr val="1A1A1A"/>
+                </a:solidFill>
+              </a:defRPr>
+            </a:pPr>
+            <a:r>
+              <a:t>  3.  Exercice 3 — Fonctions des TIC(18 min)</a:t>
+            </a:r>
+          </a:p>
+          <a:p>
+            <a:pPr>
+              <a:spcAft>
+                <a:spcPts val="1000"/>
+              </a:spcAft>
+              <a:defRPr sz="1600">
+                <a:solidFill>
+                  <a:srgbClr val="1A1A1A"/>
+                </a:solidFill>
+              </a:defRPr>
+            </a:pPr>
+            <a:r>
+              <a:t>  4.  Exercice 4 — Applications en langues(18 min)</a:t>
+            </a:r>
+          </a:p>
+          <a:p>
+            <a:pPr>
+              <a:spcAft>
+                <a:spcPts val="1000"/>
+              </a:spcAft>
+              <a:defRPr sz="1600">
+                <a:solidFill>
+                  <a:srgbClr val="1A1A1A"/>
+                </a:solidFill>
+              </a:defRPr>
+            </a:pPr>
+            <a:r>
+              <a:t>  5.  Exercice 5 — Réflexion critique(14 min)</a:t>
             </a:r>
           </a:p>
         </p:txBody>
@@ -4486,15 +6033,20 @@
   <p:clrMapOvr>
     <a:masterClrMapping/>
   </p:clrMapOvr>
-  <p:transition spd="med">
-    <p:fade/>
-  </p:transition>
 </p:sld>
 </file>
 
-<file path=ppt/slides/slide9.xml><?xml version="1.0" encoding="utf-8"?>
+<file path=ppt/slides/slide3.xml><?xml version="1.0" encoding="utf-8"?>
 <p:sld xmlns:a="http://schemas.openxmlformats.org/drawingml/2006/main" xmlns:p="http://schemas.openxmlformats.org/presentationml/2006/main" xmlns:r="http://schemas.openxmlformats.org/officeDocument/2006/relationships">
   <p:cSld>
+    <p:bg>
+      <p:bgPr>
+        <a:solidFill>
+          <a:srgbClr val="FFFFFF"/>
+        </a:solidFill>
+        <a:effectLst/>
+      </p:bgPr>
+    </p:bg>
     <p:spTree>
       <p:nvGrpSpPr>
         <p:cNvPr id="1" name=""/>
@@ -4504,75 +6056,57 @@
       <p:grpSpPr/>
       <p:sp>
         <p:nvSpPr>
-          <p:cNvPr id="2" name="Title 1"/>
-          <p:cNvSpPr>
-            <a:spLocks noGrp="1"/>
-          </p:cNvSpPr>
-          <p:nvPr>
-            <p:ph type="title"/>
-          </p:nvPr>
-        </p:nvSpPr>
-        <p:spPr/>
-        <p:txBody>
-          <a:bodyPr/>
-          <a:lstStyle/>
-          <a:p>
-            <a:r>
-              <a:t>Grille de correction</a:t>
-            </a:r>
-          </a:p>
-        </p:txBody>
-      </p:sp>
-      <p:sp>
-        <p:nvSpPr>
-          <p:cNvPr id="3" name="Content Placeholder 2"/>
-          <p:cNvSpPr>
-            <a:spLocks noGrp="1"/>
-          </p:cNvSpPr>
-          <p:nvPr>
-            <p:ph idx="1"/>
-          </p:nvPr>
-        </p:nvSpPr>
-        <p:spPr/>
-        <p:txBody>
-          <a:bodyPr/>
-          <a:lstStyle/>
-          <a:p>
-            <a:pPr>
-              <a:defRPr sz="2000"/>
-            </a:pPr>
-            <a:r>
-              <a:t>✔️ Exactitude 40 %</a:t>
-            </a:r>
-          </a:p>
-          <a:p>
-            <a:pPr>
-              <a:defRPr sz="2000"/>
-            </a:pPr>
-            <a:r>
-              <a:t>✔️ Méthode 30 %</a:t>
-            </a:r>
-          </a:p>
-          <a:p>
-            <a:pPr>
-              <a:defRPr sz="2000"/>
-            </a:pPr>
-            <a:r>
-              <a:t>✔️ Présentation 30 %</a:t>
-            </a:r>
-          </a:p>
-        </p:txBody>
-      </p:sp>
-      <p:sp>
-        <p:nvSpPr>
-          <p:cNvPr id="4" name="TextBox 3"/>
+          <p:cNvPr id="2" name="Rectangle 1"/>
+          <p:cNvSpPr/>
+          <p:nvPr/>
+        </p:nvSpPr>
+        <p:spPr>
+          <a:xfrm>
+            <a:off x="0" y="0"/>
+            <a:ext cx="137160" cy="6858000"/>
+          </a:xfrm>
+          <a:prstGeom prst="rect">
+            <a:avLst/>
+          </a:prstGeom>
+          <a:solidFill>
+            <a:srgbClr val="1A6B3C"/>
+          </a:solidFill>
+          <a:ln>
+            <a:noFill/>
+          </a:ln>
+        </p:spPr>
+        <p:style>
+          <a:lnRef idx="1">
+            <a:schemeClr val="accent1"/>
+          </a:lnRef>
+          <a:fillRef idx="3">
+            <a:schemeClr val="accent1"/>
+          </a:fillRef>
+          <a:effectRef idx="2">
+            <a:schemeClr val="accent1"/>
+          </a:effectRef>
+          <a:fontRef idx="minor">
+            <a:schemeClr val="lt1"/>
+          </a:fontRef>
+        </p:style>
+        <p:txBody>
+          <a:bodyPr rtlCol="0" anchor="ctr"/>
+          <a:lstStyle/>
+          <a:p>
+            <a:pPr algn="ctr"/>
+          </a:p>
+        </p:txBody>
+      </p:sp>
+      <p:sp>
+        <p:nvSpPr>
+          <p:cNvPr id="3" name="TextBox 2"/>
           <p:cNvSpPr txBox="1"/>
           <p:nvPr/>
         </p:nvSpPr>
         <p:spPr>
           <a:xfrm>
-            <a:off x="365760" y="6446520"/>
-            <a:ext cx="8412480" cy="320040"/>
+            <a:off x="548640" y="365760"/>
+            <a:ext cx="7772400" cy="731520"/>
           </a:xfrm>
           <a:prstGeom prst="rect">
             <a:avLst/>
@@ -4580,32 +6114,2388 @@
           <a:noFill/>
         </p:spPr>
         <p:txBody>
-          <a:bodyPr wrap="none">
+          <a:bodyPr wrap="square">
             <a:spAutoFit/>
           </a:bodyPr>
           <a:lstStyle/>
           <a:p>
-            <a:pPr algn="ctr">
-              <a:defRPr sz="900">
-                <a:solidFill>
-                  <a:srgbClr val="404040"/>
+            <a:pPr algn="l">
+              <a:defRPr sz="2200" b="1">
+                <a:solidFill>
+                  <a:srgbClr val="1A6B3C"/>
                 </a:solidFill>
               </a:defRPr>
             </a:pPr>
             <a:r>
-              <a:t>TD TIC 01  •  Diapositive 9/10</a:t>
-            </a:r>
-          </a:p>
-        </p:txBody>
-      </p:sp>
+              <a:t>Exercice 1 — Définition personnelle(15 min)</a:t>
+            </a:r>
+          </a:p>
+        </p:txBody>
+      </p:sp>
+      <p:sp>
+        <p:nvSpPr>
+          <p:cNvPr id="4" name="Rectangle 3"/>
+          <p:cNvSpPr/>
+          <p:nvPr/>
+        </p:nvSpPr>
+        <p:spPr>
+          <a:xfrm>
+            <a:off x="548640" y="1051560"/>
+            <a:ext cx="2286000" cy="36576"/>
+          </a:xfrm>
+          <a:prstGeom prst="rect">
+            <a:avLst/>
+          </a:prstGeom>
+          <a:solidFill>
+            <a:srgbClr val="2E8654"/>
+          </a:solidFill>
+          <a:ln>
+            <a:noFill/>
+          </a:ln>
+        </p:spPr>
+        <p:style>
+          <a:lnRef idx="1">
+            <a:schemeClr val="accent1"/>
+          </a:lnRef>
+          <a:fillRef idx="3">
+            <a:schemeClr val="accent1"/>
+          </a:fillRef>
+          <a:effectRef idx="2">
+            <a:schemeClr val="accent1"/>
+          </a:effectRef>
+          <a:fontRef idx="minor">
+            <a:schemeClr val="lt1"/>
+          </a:fontRef>
+        </p:style>
+        <p:txBody>
+          <a:bodyPr rtlCol="0" anchor="ctr"/>
+          <a:lstStyle/>
+          <a:p>
+            <a:pPr algn="ctr"/>
+          </a:p>
+        </p:txBody>
+      </p:sp>
+      <p:sp>
+        <p:nvSpPr>
+          <p:cNvPr id="5" name="TextBox 4"/>
+          <p:cNvSpPr txBox="1"/>
+          <p:nvPr/>
+        </p:nvSpPr>
+        <p:spPr>
+          <a:xfrm>
+            <a:off x="640080" y="2011680"/>
+            <a:ext cx="7863840" cy="4572000"/>
+          </a:xfrm>
+          <a:prstGeom prst="rect">
+            <a:avLst/>
+          </a:prstGeom>
+          <a:noFill/>
+        </p:spPr>
+        <p:txBody>
+          <a:bodyPr wrap="square">
+            <a:spAutoFit/>
+          </a:bodyPr>
+          <a:lstStyle/>
+          <a:p>
+            <a:pPr>
+              <a:spcAft>
+                <a:spcPts val="600"/>
+              </a:spcAft>
+              <a:defRPr sz="1500">
+                <a:solidFill>
+                  <a:srgbClr val="1A1A1A"/>
+                </a:solidFill>
+              </a:defRPr>
+            </a:pPr>
+            <a:r>
+              <a:t>•  Énoncé :Donnez votre propre définition des TIC en 2-3 lignes, puis comparez-la à la définition UIT.</a:t>
+            </a:r>
+          </a:p>
+          <a:p>
+            <a:pPr>
+              <a:spcAft>
+                <a:spcPts val="600"/>
+              </a:spcAft>
+              <a:defRPr sz="1500">
+                <a:solidFill>
+                  <a:srgbClr val="1A1A1A"/>
+                </a:solidFill>
+              </a:defRPr>
+            </a:pPr>
+            <a:r>
+              <a:t>•  Corrigé détaillé :Les TIC regroupent outils numériques de traitement, transmission et accès à l'information. L'UIT insiste sur la forme numérique et la convergence des technologies.</a:t>
+            </a:r>
+          </a:p>
+        </p:txBody>
+      </p:sp>
+      <p:sp>
+        <p:nvSpPr>
+          <p:cNvPr id="6" name="Rectangle 5"/>
+          <p:cNvSpPr/>
+          <p:nvPr/>
+        </p:nvSpPr>
+        <p:spPr>
+          <a:xfrm>
+            <a:off x="594359" y="5715000"/>
+            <a:ext cx="7955279" cy="868680"/>
+          </a:xfrm>
+          <a:prstGeom prst="rect">
+            <a:avLst/>
+          </a:prstGeom>
+          <a:solidFill>
+            <a:srgbClr val="FFF3E0"/>
+          </a:solidFill>
+          <a:ln>
+            <a:noFill/>
+          </a:ln>
+        </p:spPr>
+        <p:style>
+          <a:lnRef idx="1">
+            <a:schemeClr val="accent1"/>
+          </a:lnRef>
+          <a:fillRef idx="3">
+            <a:schemeClr val="accent1"/>
+          </a:fillRef>
+          <a:effectRef idx="2">
+            <a:schemeClr val="accent1"/>
+          </a:effectRef>
+          <a:fontRef idx="minor">
+            <a:schemeClr val="lt1"/>
+          </a:fontRef>
+        </p:style>
+        <p:txBody>
+          <a:bodyPr rtlCol="0" anchor="ctr"/>
+          <a:lstStyle/>
+          <a:p>
+            <a:pPr algn="ctr"/>
+          </a:p>
+        </p:txBody>
+      </p:sp>
+      <p:sp>
+        <p:nvSpPr>
+          <p:cNvPr id="7" name="Rectangle 6"/>
+          <p:cNvSpPr/>
+          <p:nvPr/>
+        </p:nvSpPr>
+        <p:spPr>
+          <a:xfrm>
+            <a:off x="594359" y="5715000"/>
+            <a:ext cx="73152" cy="868680"/>
+          </a:xfrm>
+          <a:prstGeom prst="rect">
+            <a:avLst/>
+          </a:prstGeom>
+          <a:solidFill>
+            <a:srgbClr val="E86C00"/>
+          </a:solidFill>
+          <a:ln>
+            <a:noFill/>
+          </a:ln>
+        </p:spPr>
+        <p:style>
+          <a:lnRef idx="1">
+            <a:schemeClr val="accent1"/>
+          </a:lnRef>
+          <a:fillRef idx="3">
+            <a:schemeClr val="accent1"/>
+          </a:fillRef>
+          <a:effectRef idx="2">
+            <a:schemeClr val="accent1"/>
+          </a:effectRef>
+          <a:fontRef idx="minor">
+            <a:schemeClr val="lt1"/>
+          </a:fontRef>
+        </p:style>
+        <p:txBody>
+          <a:bodyPr rtlCol="0" anchor="ctr"/>
+          <a:lstStyle/>
+          <a:p>
+            <a:pPr algn="ctr"/>
+          </a:p>
+        </p:txBody>
+      </p:sp>
+      <p:sp>
+        <p:nvSpPr>
+          <p:cNvPr id="8" name="TextBox 7"/>
+          <p:cNvSpPr txBox="1"/>
+          <p:nvPr/>
+        </p:nvSpPr>
+        <p:spPr>
+          <a:xfrm>
+            <a:off x="777240" y="5760720"/>
+            <a:ext cx="7680960" cy="777240"/>
+          </a:xfrm>
+          <a:prstGeom prst="rect">
+            <a:avLst/>
+          </a:prstGeom>
+          <a:noFill/>
+        </p:spPr>
+        <p:txBody>
+          <a:bodyPr wrap="square">
+            <a:spAutoFit/>
+          </a:bodyPr>
+          <a:lstStyle/>
+          <a:p>
+            <a:r>
+              <a:rPr sz="1100" b="1">
+                <a:solidFill>
+                  <a:srgbClr val="E86C00"/>
+                </a:solidFill>
+              </a:rPr>
+              <a:t>🎯 Intérêt pratique :  </a:t>
+            </a:r>
+            <a:r>
+              <a:rPr sz="1100">
+                <a:solidFill>
+                  <a:srgbClr val="1A1A1A"/>
+                </a:solidFill>
+              </a:rPr>
+              <a:t>Comprendre la définition des TIC vous aide à parler le même langage que vos futurs collègues enseignants.</a:t>
+            </a:r>
+          </a:p>
+        </p:txBody>
+      </p:sp>
+      <p:pic>
+        <p:nvPicPr>
+          <p:cNvPr id="9" name="Picture 8" descr="c01_01_timeline.png"/>
+          <p:cNvPicPr>
+            <a:picLocks noChangeAspect="1"/>
+          </p:cNvPicPr>
+          <p:nvPr/>
+        </p:nvPicPr>
+        <p:blipFill>
+          <a:blip r:embed="rId2"/>
+          <a:stretch>
+            <a:fillRect/>
+          </a:stretch>
+        </p:blipFill>
+        <p:spPr>
+          <a:xfrm>
+            <a:off x="5029200" y="3200400"/>
+            <a:ext cx="3200400" cy="1828800"/>
+          </a:xfrm>
+          <a:prstGeom prst="rect">
+            <a:avLst/>
+          </a:prstGeom>
+        </p:spPr>
+      </p:pic>
     </p:spTree>
   </p:cSld>
   <p:clrMapOvr>
     <a:masterClrMapping/>
   </p:clrMapOvr>
-  <p:transition spd="med">
-    <p:fade/>
-  </p:transition>
+</p:sld>
+</file>
+
+<file path=ppt/slides/slide4.xml><?xml version="1.0" encoding="utf-8"?>
+<p:sld xmlns:a="http://schemas.openxmlformats.org/drawingml/2006/main" xmlns:p="http://schemas.openxmlformats.org/presentationml/2006/main" xmlns:r="http://schemas.openxmlformats.org/officeDocument/2006/relationships">
+  <p:cSld>
+    <p:bg>
+      <p:bgPr>
+        <a:solidFill>
+          <a:srgbClr val="FFFFFF"/>
+        </a:solidFill>
+        <a:effectLst/>
+      </p:bgPr>
+    </p:bg>
+    <p:spTree>
+      <p:nvGrpSpPr>
+        <p:cNvPr id="1" name=""/>
+        <p:cNvGrpSpPr/>
+        <p:nvPr/>
+      </p:nvGrpSpPr>
+      <p:grpSpPr/>
+      <p:sp>
+        <p:nvSpPr>
+          <p:cNvPr id="2" name="Rectangle 1"/>
+          <p:cNvSpPr/>
+          <p:nvPr/>
+        </p:nvSpPr>
+        <p:spPr>
+          <a:xfrm>
+            <a:off x="0" y="0"/>
+            <a:ext cx="137160" cy="6858000"/>
+          </a:xfrm>
+          <a:prstGeom prst="rect">
+            <a:avLst/>
+          </a:prstGeom>
+          <a:solidFill>
+            <a:srgbClr val="1A6B3C"/>
+          </a:solidFill>
+          <a:ln>
+            <a:noFill/>
+          </a:ln>
+        </p:spPr>
+        <p:style>
+          <a:lnRef idx="1">
+            <a:schemeClr val="accent1"/>
+          </a:lnRef>
+          <a:fillRef idx="3">
+            <a:schemeClr val="accent1"/>
+          </a:fillRef>
+          <a:effectRef idx="2">
+            <a:schemeClr val="accent1"/>
+          </a:effectRef>
+          <a:fontRef idx="minor">
+            <a:schemeClr val="lt1"/>
+          </a:fontRef>
+        </p:style>
+        <p:txBody>
+          <a:bodyPr rtlCol="0" anchor="ctr"/>
+          <a:lstStyle/>
+          <a:p>
+            <a:pPr algn="ctr"/>
+          </a:p>
+        </p:txBody>
+      </p:sp>
+      <p:sp>
+        <p:nvSpPr>
+          <p:cNvPr id="3" name="TextBox 2"/>
+          <p:cNvSpPr txBox="1"/>
+          <p:nvPr/>
+        </p:nvSpPr>
+        <p:spPr>
+          <a:xfrm>
+            <a:off x="548640" y="365760"/>
+            <a:ext cx="7772400" cy="731520"/>
+          </a:xfrm>
+          <a:prstGeom prst="rect">
+            <a:avLst/>
+          </a:prstGeom>
+          <a:noFill/>
+        </p:spPr>
+        <p:txBody>
+          <a:bodyPr wrap="square">
+            <a:spAutoFit/>
+          </a:bodyPr>
+          <a:lstStyle/>
+          <a:p>
+            <a:pPr algn="l">
+              <a:defRPr sz="2200" b="1">
+                <a:solidFill>
+                  <a:srgbClr val="1A6B3C"/>
+                </a:solidFill>
+              </a:defRPr>
+            </a:pPr>
+            <a:r>
+              <a:t>Exercice 2 — Les trois dimensions(15 min)</a:t>
+            </a:r>
+          </a:p>
+        </p:txBody>
+      </p:sp>
+      <p:sp>
+        <p:nvSpPr>
+          <p:cNvPr id="4" name="Rectangle 3"/>
+          <p:cNvSpPr/>
+          <p:nvPr/>
+        </p:nvSpPr>
+        <p:spPr>
+          <a:xfrm>
+            <a:off x="548640" y="1051560"/>
+            <a:ext cx="2286000" cy="36576"/>
+          </a:xfrm>
+          <a:prstGeom prst="rect">
+            <a:avLst/>
+          </a:prstGeom>
+          <a:solidFill>
+            <a:srgbClr val="2E8654"/>
+          </a:solidFill>
+          <a:ln>
+            <a:noFill/>
+          </a:ln>
+        </p:spPr>
+        <p:style>
+          <a:lnRef idx="1">
+            <a:schemeClr val="accent1"/>
+          </a:lnRef>
+          <a:fillRef idx="3">
+            <a:schemeClr val="accent1"/>
+          </a:fillRef>
+          <a:effectRef idx="2">
+            <a:schemeClr val="accent1"/>
+          </a:effectRef>
+          <a:fontRef idx="minor">
+            <a:schemeClr val="lt1"/>
+          </a:fontRef>
+        </p:style>
+        <p:txBody>
+          <a:bodyPr rtlCol="0" anchor="ctr"/>
+          <a:lstStyle/>
+          <a:p>
+            <a:pPr algn="ctr"/>
+          </a:p>
+        </p:txBody>
+      </p:sp>
+      <p:sp>
+        <p:nvSpPr>
+          <p:cNvPr id="5" name="TextBox 4"/>
+          <p:cNvSpPr txBox="1"/>
+          <p:nvPr/>
+        </p:nvSpPr>
+        <p:spPr>
+          <a:xfrm>
+            <a:off x="640080" y="2011680"/>
+            <a:ext cx="7863840" cy="4572000"/>
+          </a:xfrm>
+          <a:prstGeom prst="rect">
+            <a:avLst/>
+          </a:prstGeom>
+          <a:noFill/>
+        </p:spPr>
+        <p:txBody>
+          <a:bodyPr wrap="square">
+            <a:spAutoFit/>
+          </a:bodyPr>
+          <a:lstStyle/>
+          <a:p>
+            <a:pPr>
+              <a:spcAft>
+                <a:spcPts val="600"/>
+              </a:spcAft>
+              <a:defRPr sz="1500">
+                <a:solidFill>
+                  <a:srgbClr val="1A1A1A"/>
+                </a:solidFill>
+              </a:defRPr>
+            </a:pPr>
+            <a:r>
+              <a:t>•  Énoncé :Expliquez avec des exemples personnels les trois dimensions : Techniques, Information, Communication.</a:t>
+            </a:r>
+          </a:p>
+          <a:p>
+            <a:pPr>
+              <a:spcAft>
+                <a:spcPts val="600"/>
+              </a:spcAft>
+              <a:defRPr sz="1500">
+                <a:solidFill>
+                  <a:srgbClr val="1A1A1A"/>
+                </a:solidFill>
+              </a:defRPr>
+            </a:pPr>
+            <a:r>
+              <a:t>•  Corrigé détaillé :Technique = PC + Moodle ; Information = polycopié PDF ; Communication = email au professeur ou forum TD.</a:t>
+            </a:r>
+          </a:p>
+        </p:txBody>
+      </p:sp>
+      <p:sp>
+        <p:nvSpPr>
+          <p:cNvPr id="6" name="Rectangle 5"/>
+          <p:cNvSpPr/>
+          <p:nvPr/>
+        </p:nvSpPr>
+        <p:spPr>
+          <a:xfrm>
+            <a:off x="594359" y="5715000"/>
+            <a:ext cx="7955279" cy="868680"/>
+          </a:xfrm>
+          <a:prstGeom prst="rect">
+            <a:avLst/>
+          </a:prstGeom>
+          <a:solidFill>
+            <a:srgbClr val="FFF3E0"/>
+          </a:solidFill>
+          <a:ln>
+            <a:noFill/>
+          </a:ln>
+        </p:spPr>
+        <p:style>
+          <a:lnRef idx="1">
+            <a:schemeClr val="accent1"/>
+          </a:lnRef>
+          <a:fillRef idx="3">
+            <a:schemeClr val="accent1"/>
+          </a:fillRef>
+          <a:effectRef idx="2">
+            <a:schemeClr val="accent1"/>
+          </a:effectRef>
+          <a:fontRef idx="minor">
+            <a:schemeClr val="lt1"/>
+          </a:fontRef>
+        </p:style>
+        <p:txBody>
+          <a:bodyPr rtlCol="0" anchor="ctr"/>
+          <a:lstStyle/>
+          <a:p>
+            <a:pPr algn="ctr"/>
+          </a:p>
+        </p:txBody>
+      </p:sp>
+      <p:sp>
+        <p:nvSpPr>
+          <p:cNvPr id="7" name="Rectangle 6"/>
+          <p:cNvSpPr/>
+          <p:nvPr/>
+        </p:nvSpPr>
+        <p:spPr>
+          <a:xfrm>
+            <a:off x="594359" y="5715000"/>
+            <a:ext cx="73152" cy="868680"/>
+          </a:xfrm>
+          <a:prstGeom prst="rect">
+            <a:avLst/>
+          </a:prstGeom>
+          <a:solidFill>
+            <a:srgbClr val="E86C00"/>
+          </a:solidFill>
+          <a:ln>
+            <a:noFill/>
+          </a:ln>
+        </p:spPr>
+        <p:style>
+          <a:lnRef idx="1">
+            <a:schemeClr val="accent1"/>
+          </a:lnRef>
+          <a:fillRef idx="3">
+            <a:schemeClr val="accent1"/>
+          </a:fillRef>
+          <a:effectRef idx="2">
+            <a:schemeClr val="accent1"/>
+          </a:effectRef>
+          <a:fontRef idx="minor">
+            <a:schemeClr val="lt1"/>
+          </a:fontRef>
+        </p:style>
+        <p:txBody>
+          <a:bodyPr rtlCol="0" anchor="ctr"/>
+          <a:lstStyle/>
+          <a:p>
+            <a:pPr algn="ctr"/>
+          </a:p>
+        </p:txBody>
+      </p:sp>
+      <p:sp>
+        <p:nvSpPr>
+          <p:cNvPr id="8" name="TextBox 7"/>
+          <p:cNvSpPr txBox="1"/>
+          <p:nvPr/>
+        </p:nvSpPr>
+        <p:spPr>
+          <a:xfrm>
+            <a:off x="777240" y="5760720"/>
+            <a:ext cx="7680960" cy="777240"/>
+          </a:xfrm>
+          <a:prstGeom prst="rect">
+            <a:avLst/>
+          </a:prstGeom>
+          <a:noFill/>
+        </p:spPr>
+        <p:txBody>
+          <a:bodyPr wrap="square">
+            <a:spAutoFit/>
+          </a:bodyPr>
+          <a:lstStyle/>
+          <a:p>
+            <a:r>
+              <a:rPr sz="1100" b="1">
+                <a:solidFill>
+                  <a:srgbClr val="E86C00"/>
+                </a:solidFill>
+              </a:rPr>
+              <a:t>🎯 Intérêt pratique :  </a:t>
+            </a:r>
+            <a:r>
+              <a:rPr sz="1100">
+                <a:solidFill>
+                  <a:srgbClr val="1A1A1A"/>
+                </a:solidFill>
+              </a:rPr>
+              <a:t>Chaque exposé que vous présentez combine les 3 dimensions : logiciel (technique), contenu (information), partage (communication).</a:t>
+            </a:r>
+          </a:p>
+        </p:txBody>
+      </p:sp>
+      <p:pic>
+        <p:nvPicPr>
+          <p:cNvPr id="9" name="Picture 8" descr="c01_02_components.png"/>
+          <p:cNvPicPr>
+            <a:picLocks noChangeAspect="1"/>
+          </p:cNvPicPr>
+          <p:nvPr/>
+        </p:nvPicPr>
+        <p:blipFill>
+          <a:blip r:embed="rId2"/>
+          <a:stretch>
+            <a:fillRect/>
+          </a:stretch>
+        </p:blipFill>
+        <p:spPr>
+          <a:xfrm>
+            <a:off x="5029200" y="3200400"/>
+            <a:ext cx="3200400" cy="1828800"/>
+          </a:xfrm>
+          <a:prstGeom prst="rect">
+            <a:avLst/>
+          </a:prstGeom>
+        </p:spPr>
+      </p:pic>
+    </p:spTree>
+  </p:cSld>
+  <p:clrMapOvr>
+    <a:masterClrMapping/>
+  </p:clrMapOvr>
+</p:sld>
+</file>
+
+<file path=ppt/slides/slide5.xml><?xml version="1.0" encoding="utf-8"?>
+<p:sld xmlns:a="http://schemas.openxmlformats.org/drawingml/2006/main" xmlns:p="http://schemas.openxmlformats.org/presentationml/2006/main" xmlns:r="http://schemas.openxmlformats.org/officeDocument/2006/relationships">
+  <p:cSld>
+    <p:bg>
+      <p:bgPr>
+        <a:solidFill>
+          <a:srgbClr val="FFFFFF"/>
+        </a:solidFill>
+        <a:effectLst/>
+      </p:bgPr>
+    </p:bg>
+    <p:spTree>
+      <p:nvGrpSpPr>
+        <p:cNvPr id="1" name=""/>
+        <p:cNvGrpSpPr/>
+        <p:nvPr/>
+      </p:nvGrpSpPr>
+      <p:grpSpPr/>
+      <p:sp>
+        <p:nvSpPr>
+          <p:cNvPr id="2" name="Rectangle 1"/>
+          <p:cNvSpPr/>
+          <p:nvPr/>
+        </p:nvSpPr>
+        <p:spPr>
+          <a:xfrm>
+            <a:off x="0" y="0"/>
+            <a:ext cx="137160" cy="6858000"/>
+          </a:xfrm>
+          <a:prstGeom prst="rect">
+            <a:avLst/>
+          </a:prstGeom>
+          <a:solidFill>
+            <a:srgbClr val="1A6B3C"/>
+          </a:solidFill>
+          <a:ln>
+            <a:noFill/>
+          </a:ln>
+        </p:spPr>
+        <p:style>
+          <a:lnRef idx="1">
+            <a:schemeClr val="accent1"/>
+          </a:lnRef>
+          <a:fillRef idx="3">
+            <a:schemeClr val="accent1"/>
+          </a:fillRef>
+          <a:effectRef idx="2">
+            <a:schemeClr val="accent1"/>
+          </a:effectRef>
+          <a:fontRef idx="minor">
+            <a:schemeClr val="lt1"/>
+          </a:fontRef>
+        </p:style>
+        <p:txBody>
+          <a:bodyPr rtlCol="0" anchor="ctr"/>
+          <a:lstStyle/>
+          <a:p>
+            <a:pPr algn="ctr"/>
+          </a:p>
+        </p:txBody>
+      </p:sp>
+      <p:sp>
+        <p:nvSpPr>
+          <p:cNvPr id="3" name="TextBox 2"/>
+          <p:cNvSpPr txBox="1"/>
+          <p:nvPr/>
+        </p:nvSpPr>
+        <p:spPr>
+          <a:xfrm>
+            <a:off x="548640" y="365760"/>
+            <a:ext cx="7772400" cy="731520"/>
+          </a:xfrm>
+          <a:prstGeom prst="rect">
+            <a:avLst/>
+          </a:prstGeom>
+          <a:noFill/>
+        </p:spPr>
+        <p:txBody>
+          <a:bodyPr wrap="square">
+            <a:spAutoFit/>
+          </a:bodyPr>
+          <a:lstStyle/>
+          <a:p>
+            <a:pPr algn="l">
+              <a:defRPr sz="2200" b="1">
+                <a:solidFill>
+                  <a:srgbClr val="1A6B3C"/>
+                </a:solidFill>
+              </a:defRPr>
+            </a:pPr>
+            <a:r>
+              <a:t>Exercice 3 — Fonctions des TIC(18 min)</a:t>
+            </a:r>
+          </a:p>
+        </p:txBody>
+      </p:sp>
+      <p:sp>
+        <p:nvSpPr>
+          <p:cNvPr id="4" name="Rectangle 3"/>
+          <p:cNvSpPr/>
+          <p:nvPr/>
+        </p:nvSpPr>
+        <p:spPr>
+          <a:xfrm>
+            <a:off x="548640" y="1051560"/>
+            <a:ext cx="2286000" cy="36576"/>
+          </a:xfrm>
+          <a:prstGeom prst="rect">
+            <a:avLst/>
+          </a:prstGeom>
+          <a:solidFill>
+            <a:srgbClr val="2E8654"/>
+          </a:solidFill>
+          <a:ln>
+            <a:noFill/>
+          </a:ln>
+        </p:spPr>
+        <p:style>
+          <a:lnRef idx="1">
+            <a:schemeClr val="accent1"/>
+          </a:lnRef>
+          <a:fillRef idx="3">
+            <a:schemeClr val="accent1"/>
+          </a:fillRef>
+          <a:effectRef idx="2">
+            <a:schemeClr val="accent1"/>
+          </a:effectRef>
+          <a:fontRef idx="minor">
+            <a:schemeClr val="lt1"/>
+          </a:fontRef>
+        </p:style>
+        <p:txBody>
+          <a:bodyPr rtlCol="0" anchor="ctr"/>
+          <a:lstStyle/>
+          <a:p>
+            <a:pPr algn="ctr"/>
+          </a:p>
+        </p:txBody>
+      </p:sp>
+      <p:sp>
+        <p:nvSpPr>
+          <p:cNvPr id="5" name="TextBox 4"/>
+          <p:cNvSpPr txBox="1"/>
+          <p:nvPr/>
+        </p:nvSpPr>
+        <p:spPr>
+          <a:xfrm>
+            <a:off x="640080" y="2011680"/>
+            <a:ext cx="7863840" cy="4572000"/>
+          </a:xfrm>
+          <a:prstGeom prst="rect">
+            <a:avLst/>
+          </a:prstGeom>
+          <a:noFill/>
+        </p:spPr>
+        <p:txBody>
+          <a:bodyPr wrap="square">
+            <a:spAutoFit/>
+          </a:bodyPr>
+          <a:lstStyle/>
+          <a:p>
+            <a:pPr>
+              <a:spcAft>
+                <a:spcPts val="600"/>
+              </a:spcAft>
+              <a:defRPr sz="1500">
+                <a:solidFill>
+                  <a:srgbClr val="1A1A1A"/>
+                </a:solidFill>
+              </a:defRPr>
+            </a:pPr>
+            <a:r>
+              <a:t>•  Énoncé :Pour chaque action, identifiez la fonction : traitement / transmission / sauvegarde.</a:t>
+            </a:r>
+            <a:br/>
+            <a:r>
+              <a:t>Rédaction Word, envoi email, copie USB, visioconférence Teams, impression PDF.</a:t>
+            </a:r>
+          </a:p>
+          <a:p>
+            <a:pPr>
+              <a:spcAft>
+                <a:spcPts val="600"/>
+              </a:spcAft>
+              <a:defRPr sz="1500">
+                <a:solidFill>
+                  <a:srgbClr val="1A1A1A"/>
+                </a:solidFill>
+              </a:defRPr>
+            </a:pPr>
+            <a:r>
+              <a:t>•  Corrigé détaillé :Word → traitement ; email et Teams → transmission ; USB → sauvegarde ; impression → traitement/sortie.</a:t>
+            </a:r>
+          </a:p>
+        </p:txBody>
+      </p:sp>
+      <p:sp>
+        <p:nvSpPr>
+          <p:cNvPr id="6" name="Rectangle 5"/>
+          <p:cNvSpPr/>
+          <p:nvPr/>
+        </p:nvSpPr>
+        <p:spPr>
+          <a:xfrm>
+            <a:off x="594359" y="5715000"/>
+            <a:ext cx="7955279" cy="868680"/>
+          </a:xfrm>
+          <a:prstGeom prst="rect">
+            <a:avLst/>
+          </a:prstGeom>
+          <a:solidFill>
+            <a:srgbClr val="FFF3E0"/>
+          </a:solidFill>
+          <a:ln>
+            <a:noFill/>
+          </a:ln>
+        </p:spPr>
+        <p:style>
+          <a:lnRef idx="1">
+            <a:schemeClr val="accent1"/>
+          </a:lnRef>
+          <a:fillRef idx="3">
+            <a:schemeClr val="accent1"/>
+          </a:fillRef>
+          <a:effectRef idx="2">
+            <a:schemeClr val="accent1"/>
+          </a:effectRef>
+          <a:fontRef idx="minor">
+            <a:schemeClr val="lt1"/>
+          </a:fontRef>
+        </p:style>
+        <p:txBody>
+          <a:bodyPr rtlCol="0" anchor="ctr"/>
+          <a:lstStyle/>
+          <a:p>
+            <a:pPr algn="ctr"/>
+          </a:p>
+        </p:txBody>
+      </p:sp>
+      <p:sp>
+        <p:nvSpPr>
+          <p:cNvPr id="7" name="Rectangle 6"/>
+          <p:cNvSpPr/>
+          <p:nvPr/>
+        </p:nvSpPr>
+        <p:spPr>
+          <a:xfrm>
+            <a:off x="594359" y="5715000"/>
+            <a:ext cx="73152" cy="868680"/>
+          </a:xfrm>
+          <a:prstGeom prst="rect">
+            <a:avLst/>
+          </a:prstGeom>
+          <a:solidFill>
+            <a:srgbClr val="E86C00"/>
+          </a:solidFill>
+          <a:ln>
+            <a:noFill/>
+          </a:ln>
+        </p:spPr>
+        <p:style>
+          <a:lnRef idx="1">
+            <a:schemeClr val="accent1"/>
+          </a:lnRef>
+          <a:fillRef idx="3">
+            <a:schemeClr val="accent1"/>
+          </a:fillRef>
+          <a:effectRef idx="2">
+            <a:schemeClr val="accent1"/>
+          </a:effectRef>
+          <a:fontRef idx="minor">
+            <a:schemeClr val="lt1"/>
+          </a:fontRef>
+        </p:style>
+        <p:txBody>
+          <a:bodyPr rtlCol="0" anchor="ctr"/>
+          <a:lstStyle/>
+          <a:p>
+            <a:pPr algn="ctr"/>
+          </a:p>
+        </p:txBody>
+      </p:sp>
+      <p:sp>
+        <p:nvSpPr>
+          <p:cNvPr id="8" name="TextBox 7"/>
+          <p:cNvSpPr txBox="1"/>
+          <p:nvPr/>
+        </p:nvSpPr>
+        <p:spPr>
+          <a:xfrm>
+            <a:off x="777240" y="5760720"/>
+            <a:ext cx="7680960" cy="777240"/>
+          </a:xfrm>
+          <a:prstGeom prst="rect">
+            <a:avLst/>
+          </a:prstGeom>
+          <a:noFill/>
+        </p:spPr>
+        <p:txBody>
+          <a:bodyPr wrap="square">
+            <a:spAutoFit/>
+          </a:bodyPr>
+          <a:lstStyle/>
+          <a:p>
+            <a:r>
+              <a:rPr sz="1100" b="1">
+                <a:solidFill>
+                  <a:srgbClr val="E86C00"/>
+                </a:solidFill>
+              </a:rPr>
+              <a:t>🎯 Intérêt pratique :  </a:t>
+            </a:r>
+            <a:r>
+              <a:rPr sz="1100">
+                <a:solidFill>
+                  <a:srgbClr val="1A1A1A"/>
+                </a:solidFill>
+              </a:rPr>
+              <a:t>Savoir traiter, transmettre et sauvegarder vos travaux vous évitera de perdre des heures de travail.</a:t>
+            </a:r>
+          </a:p>
+        </p:txBody>
+      </p:sp>
+      <p:pic>
+        <p:nvPicPr>
+          <p:cNvPr id="9" name="Picture 8" descr="c01_03_education.png"/>
+          <p:cNvPicPr>
+            <a:picLocks noChangeAspect="1"/>
+          </p:cNvPicPr>
+          <p:nvPr/>
+        </p:nvPicPr>
+        <p:blipFill>
+          <a:blip r:embed="rId2"/>
+          <a:stretch>
+            <a:fillRect/>
+          </a:stretch>
+        </p:blipFill>
+        <p:spPr>
+          <a:xfrm>
+            <a:off x="5029200" y="3200400"/>
+            <a:ext cx="3200400" cy="1828800"/>
+          </a:xfrm>
+          <a:prstGeom prst="rect">
+            <a:avLst/>
+          </a:prstGeom>
+        </p:spPr>
+      </p:pic>
+    </p:spTree>
+  </p:cSld>
+  <p:clrMapOvr>
+    <a:masterClrMapping/>
+  </p:clrMapOvr>
+</p:sld>
+</file>
+
+<file path=ppt/slides/slide6.xml><?xml version="1.0" encoding="utf-8"?>
+<p:sld xmlns:a="http://schemas.openxmlformats.org/drawingml/2006/main" xmlns:p="http://schemas.openxmlformats.org/presentationml/2006/main" xmlns:r="http://schemas.openxmlformats.org/officeDocument/2006/relationships">
+  <p:cSld>
+    <p:bg>
+      <p:bgPr>
+        <a:solidFill>
+          <a:srgbClr val="FFFFFF"/>
+        </a:solidFill>
+        <a:effectLst/>
+      </p:bgPr>
+    </p:bg>
+    <p:spTree>
+      <p:nvGrpSpPr>
+        <p:cNvPr id="1" name=""/>
+        <p:cNvGrpSpPr/>
+        <p:nvPr/>
+      </p:nvGrpSpPr>
+      <p:grpSpPr/>
+      <p:sp>
+        <p:nvSpPr>
+          <p:cNvPr id="2" name="Rectangle 1"/>
+          <p:cNvSpPr/>
+          <p:nvPr/>
+        </p:nvSpPr>
+        <p:spPr>
+          <a:xfrm>
+            <a:off x="0" y="0"/>
+            <a:ext cx="137160" cy="6858000"/>
+          </a:xfrm>
+          <a:prstGeom prst="rect">
+            <a:avLst/>
+          </a:prstGeom>
+          <a:solidFill>
+            <a:srgbClr val="1A6B3C"/>
+          </a:solidFill>
+          <a:ln>
+            <a:noFill/>
+          </a:ln>
+        </p:spPr>
+        <p:style>
+          <a:lnRef idx="1">
+            <a:schemeClr val="accent1"/>
+          </a:lnRef>
+          <a:fillRef idx="3">
+            <a:schemeClr val="accent1"/>
+          </a:fillRef>
+          <a:effectRef idx="2">
+            <a:schemeClr val="accent1"/>
+          </a:effectRef>
+          <a:fontRef idx="minor">
+            <a:schemeClr val="lt1"/>
+          </a:fontRef>
+        </p:style>
+        <p:txBody>
+          <a:bodyPr rtlCol="0" anchor="ctr"/>
+          <a:lstStyle/>
+          <a:p>
+            <a:pPr algn="ctr"/>
+          </a:p>
+        </p:txBody>
+      </p:sp>
+      <p:sp>
+        <p:nvSpPr>
+          <p:cNvPr id="3" name="TextBox 2"/>
+          <p:cNvSpPr txBox="1"/>
+          <p:nvPr/>
+        </p:nvSpPr>
+        <p:spPr>
+          <a:xfrm>
+            <a:off x="548640" y="365760"/>
+            <a:ext cx="7772400" cy="731520"/>
+          </a:xfrm>
+          <a:prstGeom prst="rect">
+            <a:avLst/>
+          </a:prstGeom>
+          <a:noFill/>
+        </p:spPr>
+        <p:txBody>
+          <a:bodyPr wrap="square">
+            <a:spAutoFit/>
+          </a:bodyPr>
+          <a:lstStyle/>
+          <a:p>
+            <a:pPr algn="l">
+              <a:defRPr sz="2200" b="1">
+                <a:solidFill>
+                  <a:srgbClr val="1A6B3C"/>
+                </a:solidFill>
+              </a:defRPr>
+            </a:pPr>
+            <a:r>
+              <a:t>Exercice 4 — Applications en langues(18 min)</a:t>
+            </a:r>
+          </a:p>
+        </p:txBody>
+      </p:sp>
+      <p:sp>
+        <p:nvSpPr>
+          <p:cNvPr id="4" name="Rectangle 3"/>
+          <p:cNvSpPr/>
+          <p:nvPr/>
+        </p:nvSpPr>
+        <p:spPr>
+          <a:xfrm>
+            <a:off x="548640" y="1051560"/>
+            <a:ext cx="2286000" cy="36576"/>
+          </a:xfrm>
+          <a:prstGeom prst="rect">
+            <a:avLst/>
+          </a:prstGeom>
+          <a:solidFill>
+            <a:srgbClr val="2E8654"/>
+          </a:solidFill>
+          <a:ln>
+            <a:noFill/>
+          </a:ln>
+        </p:spPr>
+        <p:style>
+          <a:lnRef idx="1">
+            <a:schemeClr val="accent1"/>
+          </a:lnRef>
+          <a:fillRef idx="3">
+            <a:schemeClr val="accent1"/>
+          </a:fillRef>
+          <a:effectRef idx="2">
+            <a:schemeClr val="accent1"/>
+          </a:effectRef>
+          <a:fontRef idx="minor">
+            <a:schemeClr val="lt1"/>
+          </a:fontRef>
+        </p:style>
+        <p:txBody>
+          <a:bodyPr rtlCol="0" anchor="ctr"/>
+          <a:lstStyle/>
+          <a:p>
+            <a:pPr algn="ctr"/>
+          </a:p>
+        </p:txBody>
+      </p:sp>
+      <p:sp>
+        <p:nvSpPr>
+          <p:cNvPr id="5" name="TextBox 4"/>
+          <p:cNvSpPr txBox="1"/>
+          <p:nvPr/>
+        </p:nvSpPr>
+        <p:spPr>
+          <a:xfrm>
+            <a:off x="640080" y="2011680"/>
+            <a:ext cx="7863840" cy="4572000"/>
+          </a:xfrm>
+          <a:prstGeom prst="rect">
+            <a:avLst/>
+          </a:prstGeom>
+          <a:noFill/>
+        </p:spPr>
+        <p:txBody>
+          <a:bodyPr wrap="square">
+            <a:spAutoFit/>
+          </a:bodyPr>
+          <a:lstStyle/>
+          <a:p>
+            <a:pPr>
+              <a:spcAft>
+                <a:spcPts val="600"/>
+              </a:spcAft>
+              <a:defRPr sz="1500">
+                <a:solidFill>
+                  <a:srgbClr val="1A1A1A"/>
+                </a:solidFill>
+              </a:defRPr>
+            </a:pPr>
+            <a:r>
+              <a:t>•  Énoncé :Citez 5 usages concrets des TIC pour un étudiant en langues étrangères.</a:t>
+            </a:r>
+          </a:p>
+          <a:p>
+            <a:pPr>
+              <a:spcAft>
+                <a:spcPts val="600"/>
+              </a:spcAft>
+              <a:defRPr sz="1500">
+                <a:solidFill>
+                  <a:srgbClr val="1A1A1A"/>
+                </a:solidFill>
+              </a:defRPr>
+            </a:pPr>
+            <a:r>
+              <a:t>•  Corrigé détaillé :Corpus multilingues en ligne, visio avec locuteurs natifs, Moodle pour devoirs, bibliothèque numérique, PowerPoint pour exposés.</a:t>
+            </a:r>
+          </a:p>
+        </p:txBody>
+      </p:sp>
+      <p:sp>
+        <p:nvSpPr>
+          <p:cNvPr id="6" name="Rectangle 5"/>
+          <p:cNvSpPr/>
+          <p:nvPr/>
+        </p:nvSpPr>
+        <p:spPr>
+          <a:xfrm>
+            <a:off x="594359" y="5715000"/>
+            <a:ext cx="7955279" cy="868680"/>
+          </a:xfrm>
+          <a:prstGeom prst="rect">
+            <a:avLst/>
+          </a:prstGeom>
+          <a:solidFill>
+            <a:srgbClr val="FFF3E0"/>
+          </a:solidFill>
+          <a:ln>
+            <a:noFill/>
+          </a:ln>
+        </p:spPr>
+        <p:style>
+          <a:lnRef idx="1">
+            <a:schemeClr val="accent1"/>
+          </a:lnRef>
+          <a:fillRef idx="3">
+            <a:schemeClr val="accent1"/>
+          </a:fillRef>
+          <a:effectRef idx="2">
+            <a:schemeClr val="accent1"/>
+          </a:effectRef>
+          <a:fontRef idx="minor">
+            <a:schemeClr val="lt1"/>
+          </a:fontRef>
+        </p:style>
+        <p:txBody>
+          <a:bodyPr rtlCol="0" anchor="ctr"/>
+          <a:lstStyle/>
+          <a:p>
+            <a:pPr algn="ctr"/>
+          </a:p>
+        </p:txBody>
+      </p:sp>
+      <p:sp>
+        <p:nvSpPr>
+          <p:cNvPr id="7" name="Rectangle 6"/>
+          <p:cNvSpPr/>
+          <p:nvPr/>
+        </p:nvSpPr>
+        <p:spPr>
+          <a:xfrm>
+            <a:off x="594359" y="5715000"/>
+            <a:ext cx="73152" cy="868680"/>
+          </a:xfrm>
+          <a:prstGeom prst="rect">
+            <a:avLst/>
+          </a:prstGeom>
+          <a:solidFill>
+            <a:srgbClr val="E86C00"/>
+          </a:solidFill>
+          <a:ln>
+            <a:noFill/>
+          </a:ln>
+        </p:spPr>
+        <p:style>
+          <a:lnRef idx="1">
+            <a:schemeClr val="accent1"/>
+          </a:lnRef>
+          <a:fillRef idx="3">
+            <a:schemeClr val="accent1"/>
+          </a:fillRef>
+          <a:effectRef idx="2">
+            <a:schemeClr val="accent1"/>
+          </a:effectRef>
+          <a:fontRef idx="minor">
+            <a:schemeClr val="lt1"/>
+          </a:fontRef>
+        </p:style>
+        <p:txBody>
+          <a:bodyPr rtlCol="0" anchor="ctr"/>
+          <a:lstStyle/>
+          <a:p>
+            <a:pPr algn="ctr"/>
+          </a:p>
+        </p:txBody>
+      </p:sp>
+      <p:sp>
+        <p:nvSpPr>
+          <p:cNvPr id="8" name="TextBox 7"/>
+          <p:cNvSpPr txBox="1"/>
+          <p:nvPr/>
+        </p:nvSpPr>
+        <p:spPr>
+          <a:xfrm>
+            <a:off x="777240" y="5760720"/>
+            <a:ext cx="7680960" cy="777240"/>
+          </a:xfrm>
+          <a:prstGeom prst="rect">
+            <a:avLst/>
+          </a:prstGeom>
+          <a:noFill/>
+        </p:spPr>
+        <p:txBody>
+          <a:bodyPr wrap="square">
+            <a:spAutoFit/>
+          </a:bodyPr>
+          <a:lstStyle/>
+          <a:p>
+            <a:r>
+              <a:rPr sz="1100" b="1">
+                <a:solidFill>
+                  <a:srgbClr val="E86C00"/>
+                </a:solidFill>
+              </a:rPr>
+              <a:t>🎯 Intérêt pratique :  </a:t>
+            </a:r>
+            <a:r>
+              <a:rPr sz="1100">
+                <a:solidFill>
+                  <a:srgbClr val="1A1A1A"/>
+                </a:solidFill>
+              </a:rPr>
+              <a:t>Cette compétence vous servira dans votre vie universitaire et professionnelle.</a:t>
+            </a:r>
+          </a:p>
+        </p:txBody>
+      </p:sp>
+      <p:pic>
+        <p:nvPicPr>
+          <p:cNvPr id="9" name="Picture 8" descr="c01_04_elearning.png"/>
+          <p:cNvPicPr>
+            <a:picLocks noChangeAspect="1"/>
+          </p:cNvPicPr>
+          <p:nvPr/>
+        </p:nvPicPr>
+        <p:blipFill>
+          <a:blip r:embed="rId2"/>
+          <a:stretch>
+            <a:fillRect/>
+          </a:stretch>
+        </p:blipFill>
+        <p:spPr>
+          <a:xfrm>
+            <a:off x="5029200" y="3200400"/>
+            <a:ext cx="3200400" cy="1828800"/>
+          </a:xfrm>
+          <a:prstGeom prst="rect">
+            <a:avLst/>
+          </a:prstGeom>
+        </p:spPr>
+      </p:pic>
+    </p:spTree>
+  </p:cSld>
+  <p:clrMapOvr>
+    <a:masterClrMapping/>
+  </p:clrMapOvr>
+</p:sld>
+</file>
+
+<file path=ppt/slides/slide7.xml><?xml version="1.0" encoding="utf-8"?>
+<p:sld xmlns:a="http://schemas.openxmlformats.org/drawingml/2006/main" xmlns:p="http://schemas.openxmlformats.org/presentationml/2006/main" xmlns:r="http://schemas.openxmlformats.org/officeDocument/2006/relationships">
+  <p:cSld>
+    <p:bg>
+      <p:bgPr>
+        <a:solidFill>
+          <a:srgbClr val="FFFFFF"/>
+        </a:solidFill>
+        <a:effectLst/>
+      </p:bgPr>
+    </p:bg>
+    <p:spTree>
+      <p:nvGrpSpPr>
+        <p:cNvPr id="1" name=""/>
+        <p:cNvGrpSpPr/>
+        <p:nvPr/>
+      </p:nvGrpSpPr>
+      <p:grpSpPr/>
+      <p:sp>
+        <p:nvSpPr>
+          <p:cNvPr id="2" name="Rectangle 1"/>
+          <p:cNvSpPr/>
+          <p:nvPr/>
+        </p:nvSpPr>
+        <p:spPr>
+          <a:xfrm>
+            <a:off x="0" y="0"/>
+            <a:ext cx="137160" cy="6858000"/>
+          </a:xfrm>
+          <a:prstGeom prst="rect">
+            <a:avLst/>
+          </a:prstGeom>
+          <a:solidFill>
+            <a:srgbClr val="1A6B3C"/>
+          </a:solidFill>
+          <a:ln>
+            <a:noFill/>
+          </a:ln>
+        </p:spPr>
+        <p:style>
+          <a:lnRef idx="1">
+            <a:schemeClr val="accent1"/>
+          </a:lnRef>
+          <a:fillRef idx="3">
+            <a:schemeClr val="accent1"/>
+          </a:fillRef>
+          <a:effectRef idx="2">
+            <a:schemeClr val="accent1"/>
+          </a:effectRef>
+          <a:fontRef idx="minor">
+            <a:schemeClr val="lt1"/>
+          </a:fontRef>
+        </p:style>
+        <p:txBody>
+          <a:bodyPr rtlCol="0" anchor="ctr"/>
+          <a:lstStyle/>
+          <a:p>
+            <a:pPr algn="ctr"/>
+          </a:p>
+        </p:txBody>
+      </p:sp>
+      <p:sp>
+        <p:nvSpPr>
+          <p:cNvPr id="3" name="TextBox 2"/>
+          <p:cNvSpPr txBox="1"/>
+          <p:nvPr/>
+        </p:nvSpPr>
+        <p:spPr>
+          <a:xfrm>
+            <a:off x="548640" y="365760"/>
+            <a:ext cx="7772400" cy="731520"/>
+          </a:xfrm>
+          <a:prstGeom prst="rect">
+            <a:avLst/>
+          </a:prstGeom>
+          <a:noFill/>
+        </p:spPr>
+        <p:txBody>
+          <a:bodyPr wrap="square">
+            <a:spAutoFit/>
+          </a:bodyPr>
+          <a:lstStyle/>
+          <a:p>
+            <a:pPr algn="l">
+              <a:defRPr sz="2200" b="1">
+                <a:solidFill>
+                  <a:srgbClr val="1A6B3C"/>
+                </a:solidFill>
+              </a:defRPr>
+            </a:pPr>
+            <a:r>
+              <a:t>Exercice 5 — Réflexion critique(14 min)</a:t>
+            </a:r>
+          </a:p>
+        </p:txBody>
+      </p:sp>
+      <p:sp>
+        <p:nvSpPr>
+          <p:cNvPr id="4" name="Rectangle 3"/>
+          <p:cNvSpPr/>
+          <p:nvPr/>
+        </p:nvSpPr>
+        <p:spPr>
+          <a:xfrm>
+            <a:off x="548640" y="1051560"/>
+            <a:ext cx="2286000" cy="36576"/>
+          </a:xfrm>
+          <a:prstGeom prst="rect">
+            <a:avLst/>
+          </a:prstGeom>
+          <a:solidFill>
+            <a:srgbClr val="2E8654"/>
+          </a:solidFill>
+          <a:ln>
+            <a:noFill/>
+          </a:ln>
+        </p:spPr>
+        <p:style>
+          <a:lnRef idx="1">
+            <a:schemeClr val="accent1"/>
+          </a:lnRef>
+          <a:fillRef idx="3">
+            <a:schemeClr val="accent1"/>
+          </a:fillRef>
+          <a:effectRef idx="2">
+            <a:schemeClr val="accent1"/>
+          </a:effectRef>
+          <a:fontRef idx="minor">
+            <a:schemeClr val="lt1"/>
+          </a:fontRef>
+        </p:style>
+        <p:txBody>
+          <a:bodyPr rtlCol="0" anchor="ctr"/>
+          <a:lstStyle/>
+          <a:p>
+            <a:pPr algn="ctr"/>
+          </a:p>
+        </p:txBody>
+      </p:sp>
+      <p:sp>
+        <p:nvSpPr>
+          <p:cNvPr id="5" name="TextBox 4"/>
+          <p:cNvSpPr txBox="1"/>
+          <p:nvPr/>
+        </p:nvSpPr>
+        <p:spPr>
+          <a:xfrm>
+            <a:off x="640080" y="2011680"/>
+            <a:ext cx="7863840" cy="4572000"/>
+          </a:xfrm>
+          <a:prstGeom prst="rect">
+            <a:avLst/>
+          </a:prstGeom>
+          <a:noFill/>
+        </p:spPr>
+        <p:txBody>
+          <a:bodyPr wrap="square">
+            <a:spAutoFit/>
+          </a:bodyPr>
+          <a:lstStyle/>
+          <a:p>
+            <a:pPr>
+              <a:spcAft>
+                <a:spcPts val="600"/>
+              </a:spcAft>
+              <a:defRPr sz="1500">
+                <a:solidFill>
+                  <a:srgbClr val="1A1A1A"/>
+                </a:solidFill>
+              </a:defRPr>
+            </a:pPr>
+            <a:r>
+              <a:t>•  Énoncé :Rédigez un paragraphe (10-12 lignes) sur opportunités et risques des TIC pour les étudiants en langues.</a:t>
+            </a:r>
+          </a:p>
+          <a:p>
+            <a:pPr>
+              <a:spcAft>
+                <a:spcPts val="600"/>
+              </a:spcAft>
+              <a:defRPr sz="1500">
+                <a:solidFill>
+                  <a:srgbClr val="1A1A1A"/>
+                </a:solidFill>
+              </a:defRPr>
+            </a:pPr>
+            <a:r>
+              <a:t>•  Corrigé détaillé :Opportunités : ressources mondiales, MOOC, collaboration. Risques : plagiat, désinformation, addiction, vie privée. Posture : esprit critique et éthique académique.</a:t>
+            </a:r>
+          </a:p>
+        </p:txBody>
+      </p:sp>
+      <p:sp>
+        <p:nvSpPr>
+          <p:cNvPr id="6" name="Rectangle 5"/>
+          <p:cNvSpPr/>
+          <p:nvPr/>
+        </p:nvSpPr>
+        <p:spPr>
+          <a:xfrm>
+            <a:off x="594359" y="5715000"/>
+            <a:ext cx="7955279" cy="868680"/>
+          </a:xfrm>
+          <a:prstGeom prst="rect">
+            <a:avLst/>
+          </a:prstGeom>
+          <a:solidFill>
+            <a:srgbClr val="FFF3E0"/>
+          </a:solidFill>
+          <a:ln>
+            <a:noFill/>
+          </a:ln>
+        </p:spPr>
+        <p:style>
+          <a:lnRef idx="1">
+            <a:schemeClr val="accent1"/>
+          </a:lnRef>
+          <a:fillRef idx="3">
+            <a:schemeClr val="accent1"/>
+          </a:fillRef>
+          <a:effectRef idx="2">
+            <a:schemeClr val="accent1"/>
+          </a:effectRef>
+          <a:fontRef idx="minor">
+            <a:schemeClr val="lt1"/>
+          </a:fontRef>
+        </p:style>
+        <p:txBody>
+          <a:bodyPr rtlCol="0" anchor="ctr"/>
+          <a:lstStyle/>
+          <a:p>
+            <a:pPr algn="ctr"/>
+          </a:p>
+        </p:txBody>
+      </p:sp>
+      <p:sp>
+        <p:nvSpPr>
+          <p:cNvPr id="7" name="Rectangle 6"/>
+          <p:cNvSpPr/>
+          <p:nvPr/>
+        </p:nvSpPr>
+        <p:spPr>
+          <a:xfrm>
+            <a:off x="594359" y="5715000"/>
+            <a:ext cx="73152" cy="868680"/>
+          </a:xfrm>
+          <a:prstGeom prst="rect">
+            <a:avLst/>
+          </a:prstGeom>
+          <a:solidFill>
+            <a:srgbClr val="E86C00"/>
+          </a:solidFill>
+          <a:ln>
+            <a:noFill/>
+          </a:ln>
+        </p:spPr>
+        <p:style>
+          <a:lnRef idx="1">
+            <a:schemeClr val="accent1"/>
+          </a:lnRef>
+          <a:fillRef idx="3">
+            <a:schemeClr val="accent1"/>
+          </a:fillRef>
+          <a:effectRef idx="2">
+            <a:schemeClr val="accent1"/>
+          </a:effectRef>
+          <a:fontRef idx="minor">
+            <a:schemeClr val="lt1"/>
+          </a:fontRef>
+        </p:style>
+        <p:txBody>
+          <a:bodyPr rtlCol="0" anchor="ctr"/>
+          <a:lstStyle/>
+          <a:p>
+            <a:pPr algn="ctr"/>
+          </a:p>
+        </p:txBody>
+      </p:sp>
+      <p:sp>
+        <p:nvSpPr>
+          <p:cNvPr id="8" name="TextBox 7"/>
+          <p:cNvSpPr txBox="1"/>
+          <p:nvPr/>
+        </p:nvSpPr>
+        <p:spPr>
+          <a:xfrm>
+            <a:off x="777240" y="5760720"/>
+            <a:ext cx="7680960" cy="777240"/>
+          </a:xfrm>
+          <a:prstGeom prst="rect">
+            <a:avLst/>
+          </a:prstGeom>
+          <a:noFill/>
+        </p:spPr>
+        <p:txBody>
+          <a:bodyPr wrap="square">
+            <a:spAutoFit/>
+          </a:bodyPr>
+          <a:lstStyle/>
+          <a:p>
+            <a:r>
+              <a:rPr sz="1100" b="1">
+                <a:solidFill>
+                  <a:srgbClr val="E86C00"/>
+                </a:solidFill>
+              </a:rPr>
+              <a:t>🎯 Intérêt pratique :  </a:t>
+            </a:r>
+            <a:r>
+              <a:rPr sz="1100">
+                <a:solidFill>
+                  <a:srgbClr val="1A1A1A"/>
+                </a:solidFill>
+              </a:rPr>
+              <a:t>Cette compétence vous servira dans votre vie universitaire et professionnelle.</a:t>
+            </a:r>
+          </a:p>
+        </p:txBody>
+      </p:sp>
+      <p:pic>
+        <p:nvPicPr>
+          <p:cNvPr id="9" name="Picture 8" descr="c01_05_tools.png"/>
+          <p:cNvPicPr>
+            <a:picLocks noChangeAspect="1"/>
+          </p:cNvPicPr>
+          <p:nvPr/>
+        </p:nvPicPr>
+        <p:blipFill>
+          <a:blip r:embed="rId2"/>
+          <a:stretch>
+            <a:fillRect/>
+          </a:stretch>
+        </p:blipFill>
+        <p:spPr>
+          <a:xfrm>
+            <a:off x="5029200" y="3200400"/>
+            <a:ext cx="3200400" cy="1828800"/>
+          </a:xfrm>
+          <a:prstGeom prst="rect">
+            <a:avLst/>
+          </a:prstGeom>
+        </p:spPr>
+      </p:pic>
+    </p:spTree>
+  </p:cSld>
+  <p:clrMapOvr>
+    <a:masterClrMapping/>
+  </p:clrMapOvr>
+</p:sld>
+</file>
+
+<file path=ppt/slides/slide8.xml><?xml version="1.0" encoding="utf-8"?>
+<p:sld xmlns:a="http://schemas.openxmlformats.org/drawingml/2006/main" xmlns:p="http://schemas.openxmlformats.org/presentationml/2006/main" xmlns:r="http://schemas.openxmlformats.org/officeDocument/2006/relationships">
+  <p:cSld>
+    <p:bg>
+      <p:bgPr>
+        <a:solidFill>
+          <a:srgbClr val="FFFFFF"/>
+        </a:solidFill>
+        <a:effectLst/>
+      </p:bgPr>
+    </p:bg>
+    <p:spTree>
+      <p:nvGrpSpPr>
+        <p:cNvPr id="1" name=""/>
+        <p:cNvGrpSpPr/>
+        <p:nvPr/>
+      </p:nvGrpSpPr>
+      <p:grpSpPr/>
+      <p:sp>
+        <p:nvSpPr>
+          <p:cNvPr id="2" name="Rectangle 1"/>
+          <p:cNvSpPr/>
+          <p:nvPr/>
+        </p:nvSpPr>
+        <p:spPr>
+          <a:xfrm>
+            <a:off x="0" y="0"/>
+            <a:ext cx="137160" cy="6858000"/>
+          </a:xfrm>
+          <a:prstGeom prst="rect">
+            <a:avLst/>
+          </a:prstGeom>
+          <a:solidFill>
+            <a:srgbClr val="E86C00"/>
+          </a:solidFill>
+          <a:ln>
+            <a:noFill/>
+          </a:ln>
+        </p:spPr>
+        <p:style>
+          <a:lnRef idx="1">
+            <a:schemeClr val="accent1"/>
+          </a:lnRef>
+          <a:fillRef idx="3">
+            <a:schemeClr val="accent1"/>
+          </a:fillRef>
+          <a:effectRef idx="2">
+            <a:schemeClr val="accent1"/>
+          </a:effectRef>
+          <a:fontRef idx="minor">
+            <a:schemeClr val="lt1"/>
+          </a:fontRef>
+        </p:style>
+        <p:txBody>
+          <a:bodyPr rtlCol="0" anchor="ctr"/>
+          <a:lstStyle/>
+          <a:p>
+            <a:pPr algn="ctr"/>
+          </a:p>
+        </p:txBody>
+      </p:sp>
+      <p:sp>
+        <p:nvSpPr>
+          <p:cNvPr id="3" name="TextBox 2"/>
+          <p:cNvSpPr txBox="1"/>
+          <p:nvPr/>
+        </p:nvSpPr>
+        <p:spPr>
+          <a:xfrm>
+            <a:off x="548640" y="365760"/>
+            <a:ext cx="7772400" cy="731520"/>
+          </a:xfrm>
+          <a:prstGeom prst="rect">
+            <a:avLst/>
+          </a:prstGeom>
+          <a:noFill/>
+        </p:spPr>
+        <p:txBody>
+          <a:bodyPr wrap="square">
+            <a:spAutoFit/>
+          </a:bodyPr>
+          <a:lstStyle/>
+          <a:p>
+            <a:pPr algn="l">
+              <a:defRPr sz="2200" b="1">
+                <a:solidFill>
+                  <a:srgbClr val="E86C00"/>
+                </a:solidFill>
+              </a:defRPr>
+            </a:pPr>
+            <a:r>
+              <a:t>Application concrète</a:t>
+            </a:r>
+          </a:p>
+        </p:txBody>
+      </p:sp>
+      <p:sp>
+        <p:nvSpPr>
+          <p:cNvPr id="4" name="Rectangle 3"/>
+          <p:cNvSpPr/>
+          <p:nvPr/>
+        </p:nvSpPr>
+        <p:spPr>
+          <a:xfrm>
+            <a:off x="548640" y="1051560"/>
+            <a:ext cx="2743200" cy="36576"/>
+          </a:xfrm>
+          <a:prstGeom prst="rect">
+            <a:avLst/>
+          </a:prstGeom>
+          <a:solidFill>
+            <a:srgbClr val="E86C00"/>
+          </a:solidFill>
+          <a:ln>
+            <a:noFill/>
+          </a:ln>
+        </p:spPr>
+        <p:style>
+          <a:lnRef idx="1">
+            <a:schemeClr val="accent1"/>
+          </a:lnRef>
+          <a:fillRef idx="3">
+            <a:schemeClr val="accent1"/>
+          </a:fillRef>
+          <a:effectRef idx="2">
+            <a:schemeClr val="accent1"/>
+          </a:effectRef>
+          <a:fontRef idx="minor">
+            <a:schemeClr val="lt1"/>
+          </a:fontRef>
+        </p:style>
+        <p:txBody>
+          <a:bodyPr rtlCol="0" anchor="ctr"/>
+          <a:lstStyle/>
+          <a:p>
+            <a:pPr algn="ctr"/>
+          </a:p>
+        </p:txBody>
+      </p:sp>
+      <p:sp>
+        <p:nvSpPr>
+          <p:cNvPr id="5" name="TextBox 4"/>
+          <p:cNvSpPr txBox="1"/>
+          <p:nvPr/>
+        </p:nvSpPr>
+        <p:spPr>
+          <a:xfrm>
+            <a:off x="640080" y="2011680"/>
+            <a:ext cx="7863840" cy="4572000"/>
+          </a:xfrm>
+          <a:prstGeom prst="rect">
+            <a:avLst/>
+          </a:prstGeom>
+          <a:noFill/>
+        </p:spPr>
+        <p:txBody>
+          <a:bodyPr wrap="square">
+            <a:spAutoFit/>
+          </a:bodyPr>
+          <a:lstStyle/>
+          <a:p>
+            <a:pPr>
+              <a:spcAft>
+                <a:spcPts val="600"/>
+              </a:spcAft>
+              <a:defRPr sz="1500">
+                <a:solidFill>
+                  <a:srgbClr val="1A1A1A"/>
+                </a:solidFill>
+              </a:defRPr>
+            </a:pPr>
+            <a:r>
+              <a:t>•  Appliquez ces concepts dans vos travaux</a:t>
+            </a:r>
+          </a:p>
+          <a:p>
+            <a:pPr>
+              <a:spcAft>
+                <a:spcPts val="600"/>
+              </a:spcAft>
+              <a:defRPr sz="1500">
+                <a:solidFill>
+                  <a:srgbClr val="1A1A1A"/>
+                </a:solidFill>
+              </a:defRPr>
+            </a:pPr>
+            <a:r>
+              <a:t>•  Pratiquez lors des TD</a:t>
+            </a:r>
+          </a:p>
+        </p:txBody>
+      </p:sp>
+      <p:sp>
+        <p:nvSpPr>
+          <p:cNvPr id="6" name="Rectangle 5"/>
+          <p:cNvSpPr/>
+          <p:nvPr/>
+        </p:nvSpPr>
+        <p:spPr>
+          <a:xfrm>
+            <a:off x="457200" y="4572000"/>
+            <a:ext cx="8229600" cy="2011680"/>
+          </a:xfrm>
+          <a:prstGeom prst="rect">
+            <a:avLst/>
+          </a:prstGeom>
+          <a:solidFill>
+            <a:srgbClr val="FFF8F0"/>
+          </a:solidFill>
+          <a:ln>
+            <a:noFill/>
+          </a:ln>
+        </p:spPr>
+        <p:style>
+          <a:lnRef idx="1">
+            <a:schemeClr val="accent1"/>
+          </a:lnRef>
+          <a:fillRef idx="3">
+            <a:schemeClr val="accent1"/>
+          </a:fillRef>
+          <a:effectRef idx="2">
+            <a:schemeClr val="accent1"/>
+          </a:effectRef>
+          <a:fontRef idx="minor">
+            <a:schemeClr val="lt1"/>
+          </a:fontRef>
+        </p:style>
+        <p:txBody>
+          <a:bodyPr rtlCol="0" anchor="ctr"/>
+          <a:lstStyle/>
+          <a:p>
+            <a:pPr algn="ctr"/>
+          </a:p>
+        </p:txBody>
+      </p:sp>
+      <p:sp>
+        <p:nvSpPr>
+          <p:cNvPr id="7" name="Rectangle 6"/>
+          <p:cNvSpPr/>
+          <p:nvPr/>
+        </p:nvSpPr>
+        <p:spPr>
+          <a:xfrm>
+            <a:off x="457200" y="4572000"/>
+            <a:ext cx="91440" cy="2011680"/>
+          </a:xfrm>
+          <a:prstGeom prst="rect">
+            <a:avLst/>
+          </a:prstGeom>
+          <a:solidFill>
+            <a:srgbClr val="E86C00"/>
+          </a:solidFill>
+          <a:ln>
+            <a:noFill/>
+          </a:ln>
+        </p:spPr>
+        <p:style>
+          <a:lnRef idx="1">
+            <a:schemeClr val="accent1"/>
+          </a:lnRef>
+          <a:fillRef idx="3">
+            <a:schemeClr val="accent1"/>
+          </a:fillRef>
+          <a:effectRef idx="2">
+            <a:schemeClr val="accent1"/>
+          </a:effectRef>
+          <a:fontRef idx="minor">
+            <a:schemeClr val="lt1"/>
+          </a:fontRef>
+        </p:style>
+        <p:txBody>
+          <a:bodyPr rtlCol="0" anchor="ctr"/>
+          <a:lstStyle/>
+          <a:p>
+            <a:pPr algn="ctr"/>
+          </a:p>
+        </p:txBody>
+      </p:sp>
+      <p:sp>
+        <p:nvSpPr>
+          <p:cNvPr id="8" name="TextBox 7"/>
+          <p:cNvSpPr txBox="1"/>
+          <p:nvPr/>
+        </p:nvSpPr>
+        <p:spPr>
+          <a:xfrm>
+            <a:off x="731520" y="4663440"/>
+            <a:ext cx="7772400" cy="1828800"/>
+          </a:xfrm>
+          <a:prstGeom prst="rect">
+            <a:avLst/>
+          </a:prstGeom>
+          <a:noFill/>
+        </p:spPr>
+        <p:txBody>
+          <a:bodyPr wrap="square">
+            <a:spAutoFit/>
+          </a:bodyPr>
+          <a:lstStyle/>
+          <a:p>
+            <a:r>
+              <a:rPr sz="1300" b="1">
+                <a:solidFill>
+                  <a:srgbClr val="E86C00"/>
+                </a:solidFill>
+              </a:rPr>
+              <a:t>Intérêt pratique pour vous
+</a:t>
+            </a:r>
+            <a:r>
+              <a:rPr sz="1200">
+                <a:solidFill>
+                  <a:srgbClr val="1A1A1A"/>
+                </a:solidFill>
+              </a:rPr>
+              <a:t>Cette compétence vous servira dans votre vie universitaire et professionnelle.</a:t>
+            </a:r>
+          </a:p>
+        </p:txBody>
+      </p:sp>
+      <p:pic>
+        <p:nvPicPr>
+          <p:cNvPr id="9" name="Picture 8" descr="c01_06_lms.png"/>
+          <p:cNvPicPr>
+            <a:picLocks noChangeAspect="1"/>
+          </p:cNvPicPr>
+          <p:nvPr/>
+        </p:nvPicPr>
+        <p:blipFill>
+          <a:blip r:embed="rId2"/>
+          <a:stretch>
+            <a:fillRect/>
+          </a:stretch>
+        </p:blipFill>
+        <p:spPr>
+          <a:xfrm>
+            <a:off x="5029200" y="3200400"/>
+            <a:ext cx="3200400" cy="1828800"/>
+          </a:xfrm>
+          <a:prstGeom prst="rect">
+            <a:avLst/>
+          </a:prstGeom>
+        </p:spPr>
+      </p:pic>
+    </p:spTree>
+  </p:cSld>
+  <p:clrMapOvr>
+    <a:masterClrMapping/>
+  </p:clrMapOvr>
+</p:sld>
+</file>
+
+<file path=ppt/slides/slide9.xml><?xml version="1.0" encoding="utf-8"?>
+<p:sld xmlns:a="http://schemas.openxmlformats.org/drawingml/2006/main" xmlns:p="http://schemas.openxmlformats.org/presentationml/2006/main" xmlns:r="http://schemas.openxmlformats.org/officeDocument/2006/relationships">
+  <p:cSld>
+    <p:bg>
+      <p:bgPr>
+        <a:solidFill>
+          <a:srgbClr val="FFFFFF"/>
+        </a:solidFill>
+        <a:effectLst/>
+      </p:bgPr>
+    </p:bg>
+    <p:spTree>
+      <p:nvGrpSpPr>
+        <p:cNvPr id="1" name=""/>
+        <p:cNvGrpSpPr/>
+        <p:nvPr/>
+      </p:nvGrpSpPr>
+      <p:grpSpPr/>
+      <p:sp>
+        <p:nvSpPr>
+          <p:cNvPr id="2" name="Rectangle 1"/>
+          <p:cNvSpPr/>
+          <p:nvPr/>
+        </p:nvSpPr>
+        <p:spPr>
+          <a:xfrm>
+            <a:off x="0" y="0"/>
+            <a:ext cx="137160" cy="6858000"/>
+          </a:xfrm>
+          <a:prstGeom prst="rect">
+            <a:avLst/>
+          </a:prstGeom>
+          <a:solidFill>
+            <a:srgbClr val="E86C00"/>
+          </a:solidFill>
+          <a:ln>
+            <a:noFill/>
+          </a:ln>
+        </p:spPr>
+        <p:style>
+          <a:lnRef idx="1">
+            <a:schemeClr val="accent1"/>
+          </a:lnRef>
+          <a:fillRef idx="3">
+            <a:schemeClr val="accent1"/>
+          </a:fillRef>
+          <a:effectRef idx="2">
+            <a:schemeClr val="accent1"/>
+          </a:effectRef>
+          <a:fontRef idx="minor">
+            <a:schemeClr val="lt1"/>
+          </a:fontRef>
+        </p:style>
+        <p:txBody>
+          <a:bodyPr rtlCol="0" anchor="ctr"/>
+          <a:lstStyle/>
+          <a:p>
+            <a:pPr algn="ctr"/>
+          </a:p>
+        </p:txBody>
+      </p:sp>
+      <p:sp>
+        <p:nvSpPr>
+          <p:cNvPr id="3" name="TextBox 2"/>
+          <p:cNvSpPr txBox="1"/>
+          <p:nvPr/>
+        </p:nvSpPr>
+        <p:spPr>
+          <a:xfrm>
+            <a:off x="548640" y="365760"/>
+            <a:ext cx="7772400" cy="731520"/>
+          </a:xfrm>
+          <a:prstGeom prst="rect">
+            <a:avLst/>
+          </a:prstGeom>
+          <a:noFill/>
+        </p:spPr>
+        <p:txBody>
+          <a:bodyPr wrap="square">
+            <a:spAutoFit/>
+          </a:bodyPr>
+          <a:lstStyle/>
+          <a:p>
+            <a:pPr algn="l">
+              <a:defRPr sz="2200" b="1">
+                <a:solidFill>
+                  <a:srgbClr val="E86C00"/>
+                </a:solidFill>
+              </a:defRPr>
+            </a:pPr>
+            <a:r>
+              <a:t>Application concrète</a:t>
+            </a:r>
+          </a:p>
+        </p:txBody>
+      </p:sp>
+      <p:sp>
+        <p:nvSpPr>
+          <p:cNvPr id="4" name="Rectangle 3"/>
+          <p:cNvSpPr/>
+          <p:nvPr/>
+        </p:nvSpPr>
+        <p:spPr>
+          <a:xfrm>
+            <a:off x="548640" y="1051560"/>
+            <a:ext cx="2743200" cy="36576"/>
+          </a:xfrm>
+          <a:prstGeom prst="rect">
+            <a:avLst/>
+          </a:prstGeom>
+          <a:solidFill>
+            <a:srgbClr val="E86C00"/>
+          </a:solidFill>
+          <a:ln>
+            <a:noFill/>
+          </a:ln>
+        </p:spPr>
+        <p:style>
+          <a:lnRef idx="1">
+            <a:schemeClr val="accent1"/>
+          </a:lnRef>
+          <a:fillRef idx="3">
+            <a:schemeClr val="accent1"/>
+          </a:fillRef>
+          <a:effectRef idx="2">
+            <a:schemeClr val="accent1"/>
+          </a:effectRef>
+          <a:fontRef idx="minor">
+            <a:schemeClr val="lt1"/>
+          </a:fontRef>
+        </p:style>
+        <p:txBody>
+          <a:bodyPr rtlCol="0" anchor="ctr"/>
+          <a:lstStyle/>
+          <a:p>
+            <a:pPr algn="ctr"/>
+          </a:p>
+        </p:txBody>
+      </p:sp>
+      <p:sp>
+        <p:nvSpPr>
+          <p:cNvPr id="5" name="TextBox 4"/>
+          <p:cNvSpPr txBox="1"/>
+          <p:nvPr/>
+        </p:nvSpPr>
+        <p:spPr>
+          <a:xfrm>
+            <a:off x="640080" y="2011680"/>
+            <a:ext cx="7863840" cy="4572000"/>
+          </a:xfrm>
+          <a:prstGeom prst="rect">
+            <a:avLst/>
+          </a:prstGeom>
+          <a:noFill/>
+        </p:spPr>
+        <p:txBody>
+          <a:bodyPr wrap="square">
+            <a:spAutoFit/>
+          </a:bodyPr>
+          <a:lstStyle/>
+          <a:p>
+            <a:pPr>
+              <a:spcAft>
+                <a:spcPts val="600"/>
+              </a:spcAft>
+              <a:defRPr sz="1500">
+                <a:solidFill>
+                  <a:srgbClr val="1A1A1A"/>
+                </a:solidFill>
+              </a:defRPr>
+            </a:pPr>
+            <a:r>
+              <a:t>•  Appliquez ces concepts dans vos travaux</a:t>
+            </a:r>
+          </a:p>
+          <a:p>
+            <a:pPr>
+              <a:spcAft>
+                <a:spcPts val="600"/>
+              </a:spcAft>
+              <a:defRPr sz="1500">
+                <a:solidFill>
+                  <a:srgbClr val="1A1A1A"/>
+                </a:solidFill>
+              </a:defRPr>
+            </a:pPr>
+            <a:r>
+              <a:t>•  Pratiquez lors des TD</a:t>
+            </a:r>
+          </a:p>
+        </p:txBody>
+      </p:sp>
+      <p:sp>
+        <p:nvSpPr>
+          <p:cNvPr id="6" name="Rectangle 5"/>
+          <p:cNvSpPr/>
+          <p:nvPr/>
+        </p:nvSpPr>
+        <p:spPr>
+          <a:xfrm>
+            <a:off x="457200" y="4572000"/>
+            <a:ext cx="8229600" cy="2011680"/>
+          </a:xfrm>
+          <a:prstGeom prst="rect">
+            <a:avLst/>
+          </a:prstGeom>
+          <a:solidFill>
+            <a:srgbClr val="FFF8F0"/>
+          </a:solidFill>
+          <a:ln>
+            <a:noFill/>
+          </a:ln>
+        </p:spPr>
+        <p:style>
+          <a:lnRef idx="1">
+            <a:schemeClr val="accent1"/>
+          </a:lnRef>
+          <a:fillRef idx="3">
+            <a:schemeClr val="accent1"/>
+          </a:fillRef>
+          <a:effectRef idx="2">
+            <a:schemeClr val="accent1"/>
+          </a:effectRef>
+          <a:fontRef idx="minor">
+            <a:schemeClr val="lt1"/>
+          </a:fontRef>
+        </p:style>
+        <p:txBody>
+          <a:bodyPr rtlCol="0" anchor="ctr"/>
+          <a:lstStyle/>
+          <a:p>
+            <a:pPr algn="ctr"/>
+          </a:p>
+        </p:txBody>
+      </p:sp>
+      <p:sp>
+        <p:nvSpPr>
+          <p:cNvPr id="7" name="Rectangle 6"/>
+          <p:cNvSpPr/>
+          <p:nvPr/>
+        </p:nvSpPr>
+        <p:spPr>
+          <a:xfrm>
+            <a:off x="457200" y="4572000"/>
+            <a:ext cx="91440" cy="2011680"/>
+          </a:xfrm>
+          <a:prstGeom prst="rect">
+            <a:avLst/>
+          </a:prstGeom>
+          <a:solidFill>
+            <a:srgbClr val="E86C00"/>
+          </a:solidFill>
+          <a:ln>
+            <a:noFill/>
+          </a:ln>
+        </p:spPr>
+        <p:style>
+          <a:lnRef idx="1">
+            <a:schemeClr val="accent1"/>
+          </a:lnRef>
+          <a:fillRef idx="3">
+            <a:schemeClr val="accent1"/>
+          </a:fillRef>
+          <a:effectRef idx="2">
+            <a:schemeClr val="accent1"/>
+          </a:effectRef>
+          <a:fontRef idx="minor">
+            <a:schemeClr val="lt1"/>
+          </a:fontRef>
+        </p:style>
+        <p:txBody>
+          <a:bodyPr rtlCol="0" anchor="ctr"/>
+          <a:lstStyle/>
+          <a:p>
+            <a:pPr algn="ctr"/>
+          </a:p>
+        </p:txBody>
+      </p:sp>
+      <p:sp>
+        <p:nvSpPr>
+          <p:cNvPr id="8" name="TextBox 7"/>
+          <p:cNvSpPr txBox="1"/>
+          <p:nvPr/>
+        </p:nvSpPr>
+        <p:spPr>
+          <a:xfrm>
+            <a:off x="731520" y="4663440"/>
+            <a:ext cx="7772400" cy="1828800"/>
+          </a:xfrm>
+          <a:prstGeom prst="rect">
+            <a:avLst/>
+          </a:prstGeom>
+          <a:noFill/>
+        </p:spPr>
+        <p:txBody>
+          <a:bodyPr wrap="square">
+            <a:spAutoFit/>
+          </a:bodyPr>
+          <a:lstStyle/>
+          <a:p>
+            <a:r>
+              <a:rPr sz="1300" b="1">
+                <a:solidFill>
+                  <a:srgbClr val="E86C00"/>
+                </a:solidFill>
+              </a:rPr>
+              <a:t>Intérêt pratique pour vous
+</a:t>
+            </a:r>
+            <a:r>
+              <a:rPr sz="1200">
+                <a:solidFill>
+                  <a:srgbClr val="1A1A1A"/>
+                </a:solidFill>
+              </a:rPr>
+              <a:t>Cette compétence vous servira dans votre vie universitaire et professionnelle.</a:t>
+            </a:r>
+          </a:p>
+        </p:txBody>
+      </p:sp>
+      <p:pic>
+        <p:nvPicPr>
+          <p:cNvPr id="9" name="Picture 8" descr="c01_07_advantages.png"/>
+          <p:cNvPicPr>
+            <a:picLocks noChangeAspect="1"/>
+          </p:cNvPicPr>
+          <p:nvPr/>
+        </p:nvPicPr>
+        <p:blipFill>
+          <a:blip r:embed="rId2"/>
+          <a:stretch>
+            <a:fillRect/>
+          </a:stretch>
+        </p:blipFill>
+        <p:spPr>
+          <a:xfrm>
+            <a:off x="5029200" y="3200400"/>
+            <a:ext cx="3200400" cy="1828800"/>
+          </a:xfrm>
+          <a:prstGeom prst="rect">
+            <a:avLst/>
+          </a:prstGeom>
+        </p:spPr>
+      </p:pic>
+    </p:spTree>
+  </p:cSld>
+  <p:clrMapOvr>
+    <a:masterClrMapping/>
+  </p:clrMapOvr>
 </p:sld>
 </file>
 
@@ -4927,319 +8817,4 @@
   </a:objectDefaults>
   <a:extraClrSchemeLst/>
 </a:theme>
-</file>
-
-<file path=ppt/theme/theme2.xml><?xml version="1.0" encoding="utf-8"?>
-<a:theme xmlns:a="http://schemas.openxmlformats.org/drawingml/2006/main" name="Thème Office">
-  <a:themeElements>
-    <a:clrScheme name="Office">
-      <a:dk1>
-        <a:sysClr val="windowText" lastClr="000000"/>
-      </a:dk1>
-      <a:lt1>
-        <a:sysClr val="window" lastClr="FFFFFF"/>
-      </a:lt1>
-      <a:dk2>
-        <a:srgbClr val="0E2841"/>
-      </a:dk2>
-      <a:lt2>
-        <a:srgbClr val="E8E8E8"/>
-      </a:lt2>
-      <a:accent1>
-        <a:srgbClr val="156082"/>
-      </a:accent1>
-      <a:accent2>
-        <a:srgbClr val="E97132"/>
-      </a:accent2>
-      <a:accent3>
-        <a:srgbClr val="196B24"/>
-      </a:accent3>
-      <a:accent4>
-        <a:srgbClr val="0F9ED5"/>
-      </a:accent4>
-      <a:accent5>
-        <a:srgbClr val="A02B93"/>
-      </a:accent5>
-      <a:accent6>
-        <a:srgbClr val="4EA72E"/>
-      </a:accent6>
-      <a:hlink>
-        <a:srgbClr val="467886"/>
-      </a:hlink>
-      <a:folHlink>
-        <a:srgbClr val="96607D"/>
-      </a:folHlink>
-    </a:clrScheme>
-    <a:fontScheme name="Office">
-      <a:majorFont>
-        <a:latin typeface="Aptos Display" panose="02110004020202020204"/>
-        <a:ea typeface=""/>
-        <a:cs typeface=""/>
-        <a:font script="Jpan" typeface="游ゴシック Light"/>
-        <a:font script="Hang" typeface="맑은 고딕"/>
-        <a:font script="Hans" typeface="等线 Light"/>
-        <a:font script="Hant" typeface="新細明體"/>
-        <a:font script="Arab" typeface="Times New Roman"/>
-        <a:font script="Hebr" typeface="Times New Roman"/>
-        <a:font script="Thai" typeface="Angsana New"/>
-        <a:font script="Ethi" typeface="Nyala"/>
-        <a:font script="Beng" typeface="Vrinda"/>
-        <a:font script="Gujr" typeface="Shruti"/>
-        <a:font script="Khmr" typeface="MoolBoran"/>
-        <a:font script="Knda" typeface="Tunga"/>
-        <a:font script="Guru" typeface="Raavi"/>
-        <a:font script="Cans" typeface="Euphemia"/>
-        <a:font script="Cher" typeface="Plantagenet Cherokee"/>
-        <a:font script="Yiii" typeface="Microsoft Yi Baiti"/>
-        <a:font script="Tibt" typeface="Microsoft Himalaya"/>
-        <a:font script="Thaa" typeface="MV Boli"/>
-        <a:font script="Deva" typeface="Mangal"/>
-        <a:font script="Telu" typeface="Gautami"/>
-        <a:font script="Taml" typeface="Latha"/>
-        <a:font script="Syrc" typeface="Estrangelo Edessa"/>
-        <a:font script="Orya" typeface="Kalinga"/>
-        <a:font script="Mlym" typeface="Kartika"/>
-        <a:font script="Laoo" typeface="DokChampa"/>
-        <a:font script="Sinh" typeface="Iskoola Pota"/>
-        <a:font script="Mong" typeface="Mongolian Baiti"/>
-        <a:font script="Viet" typeface="Times New Roman"/>
-        <a:font script="Uigh" typeface="Microsoft Uighur"/>
-        <a:font script="Geor" typeface="Sylfaen"/>
-        <a:font script="Armn" typeface="Arial"/>
-        <a:font script="Bugi" typeface="Leelawadee UI"/>
-        <a:font script="Bopo" typeface="Microsoft JhengHei"/>
-        <a:font script="Java" typeface="Javanese Text"/>
-        <a:font script="Lisu" typeface="Segoe UI"/>
-        <a:font script="Mymr" typeface="Myanmar Text"/>
-        <a:font script="Nkoo" typeface="Ebrima"/>
-        <a:font script="Olck" typeface="Nirmala UI"/>
-        <a:font script="Osma" typeface="Ebrima"/>
-        <a:font script="Phag" typeface="Phagspa"/>
-        <a:font script="Syrn" typeface="Estrangelo Edessa"/>
-        <a:font script="Syrj" typeface="Estrangelo Edessa"/>
-        <a:font script="Syre" typeface="Estrangelo Edessa"/>
-        <a:font script="Sora" typeface="Nirmala UI"/>
-        <a:font script="Tale" typeface="Microsoft Tai Le"/>
-        <a:font script="Talu" typeface="Microsoft New Tai Lue"/>
-        <a:font script="Tfng" typeface="Ebrima"/>
-      </a:majorFont>
-      <a:minorFont>
-        <a:latin typeface="Aptos" panose="02110004020202020204"/>
-        <a:ea typeface=""/>
-        <a:cs typeface=""/>
-        <a:font script="Jpan" typeface="游ゴシック"/>
-        <a:font script="Hang" typeface="맑은 고딕"/>
-        <a:font script="Hans" typeface="等线"/>
-        <a:font script="Hant" typeface="新細明體"/>
-        <a:font script="Arab" typeface="Arial"/>
-        <a:font script="Hebr" typeface="Arial"/>
-        <a:font script="Thai" typeface="Cordia New"/>
-        <a:font script="Ethi" typeface="Nyala"/>
-        <a:font script="Beng" typeface="Vrinda"/>
-        <a:font script="Gujr" typeface="Shruti"/>
-        <a:font script="Khmr" typeface="DaunPenh"/>
-        <a:font script="Knda" typeface="Tunga"/>
-        <a:font script="Guru" typeface="Raavi"/>
-        <a:font script="Cans" typeface="Euphemia"/>
-        <a:font script="Cher" typeface="Plantagenet Cherokee"/>
-        <a:font script="Yiii" typeface="Microsoft Yi Baiti"/>
-        <a:font script="Tibt" typeface="Microsoft Himalaya"/>
-        <a:font script="Thaa" typeface="MV Boli"/>
-        <a:font script="Deva" typeface="Mangal"/>
-        <a:font script="Telu" typeface="Gautami"/>
-        <a:font script="Taml" typeface="Latha"/>
-        <a:font script="Syrc" typeface="Estrangelo Edessa"/>
-        <a:font script="Orya" typeface="Kalinga"/>
-        <a:font script="Mlym" typeface="Kartika"/>
-        <a:font script="Laoo" typeface="DokChampa"/>
-        <a:font script="Sinh" typeface="Iskoola Pota"/>
-        <a:font script="Mong" typeface="Mongolian Baiti"/>
-        <a:font script="Viet" typeface="Arial"/>
-        <a:font script="Uigh" typeface="Microsoft Uighur"/>
-        <a:font script="Geor" typeface="Sylfaen"/>
-        <a:font script="Armn" typeface="Arial"/>
-        <a:font script="Bugi" typeface="Leelawadee UI"/>
-        <a:font script="Bopo" typeface="Microsoft JhengHei"/>
-        <a:font script="Java" typeface="Javanese Text"/>
-        <a:font script="Lisu" typeface="Segoe UI"/>
-        <a:font script="Mymr" typeface="Myanmar Text"/>
-        <a:font script="Nkoo" typeface="Ebrima"/>
-        <a:font script="Olck" typeface="Nirmala UI"/>
-        <a:font script="Osma" typeface="Ebrima"/>
-        <a:font script="Phag" typeface="Phagspa"/>
-        <a:font script="Syrn" typeface="Estrangelo Edessa"/>
-        <a:font script="Syrj" typeface="Estrangelo Edessa"/>
-        <a:font script="Syre" typeface="Estrangelo Edessa"/>
-        <a:font script="Sora" typeface="Nirmala UI"/>
-        <a:font script="Tale" typeface="Microsoft Tai Le"/>
-        <a:font script="Talu" typeface="Microsoft New Tai Lue"/>
-        <a:font script="Tfng" typeface="Ebrima"/>
-      </a:minorFont>
-    </a:fontScheme>
-    <a:fmtScheme name="Office">
-      <a:fillStyleLst>
-        <a:solidFill>
-          <a:schemeClr val="phClr"/>
-        </a:solidFill>
-        <a:gradFill rotWithShape="1">
-          <a:gsLst>
-            <a:gs pos="0">
-              <a:schemeClr val="phClr">
-                <a:lumMod val="110000"/>
-                <a:satMod val="105000"/>
-                <a:tint val="67000"/>
-              </a:schemeClr>
-            </a:gs>
-            <a:gs pos="50000">
-              <a:schemeClr val="phClr">
-                <a:lumMod val="105000"/>
-                <a:satMod val="103000"/>
-                <a:tint val="73000"/>
-              </a:schemeClr>
-            </a:gs>
-            <a:gs pos="100000">
-              <a:schemeClr val="phClr">
-                <a:lumMod val="105000"/>
-                <a:satMod val="109000"/>
-                <a:tint val="81000"/>
-              </a:schemeClr>
-            </a:gs>
-          </a:gsLst>
-          <a:lin ang="5400000" scaled="0"/>
-        </a:gradFill>
-        <a:gradFill rotWithShape="1">
-          <a:gsLst>
-            <a:gs pos="0">
-              <a:schemeClr val="phClr">
-                <a:satMod val="103000"/>
-                <a:lumMod val="102000"/>
-                <a:tint val="94000"/>
-              </a:schemeClr>
-            </a:gs>
-            <a:gs pos="50000">
-              <a:schemeClr val="phClr">
-                <a:satMod val="110000"/>
-                <a:lumMod val="100000"/>
-                <a:shade val="100000"/>
-              </a:schemeClr>
-            </a:gs>
-            <a:gs pos="100000">
-              <a:schemeClr val="phClr">
-                <a:lumMod val="99000"/>
-                <a:satMod val="120000"/>
-                <a:shade val="78000"/>
-              </a:schemeClr>
-            </a:gs>
-          </a:gsLst>
-          <a:lin ang="5400000" scaled="0"/>
-        </a:gradFill>
-      </a:fillStyleLst>
-      <a:lnStyleLst>
-        <a:ln w="12700" cap="flat" cmpd="sng" algn="ctr">
-          <a:solidFill>
-            <a:schemeClr val="phClr"/>
-          </a:solidFill>
-          <a:prstDash val="solid"/>
-          <a:miter lim="800000"/>
-        </a:ln>
-        <a:ln w="19050" cap="flat" cmpd="sng" algn="ctr">
-          <a:solidFill>
-            <a:schemeClr val="phClr"/>
-          </a:solidFill>
-          <a:prstDash val="solid"/>
-          <a:miter lim="800000"/>
-        </a:ln>
-        <a:ln w="25400" cap="flat" cmpd="sng" algn="ctr">
-          <a:solidFill>
-            <a:schemeClr val="phClr"/>
-          </a:solidFill>
-          <a:prstDash val="solid"/>
-          <a:miter lim="800000"/>
-        </a:ln>
-      </a:lnStyleLst>
-      <a:effectStyleLst>
-        <a:effectStyle>
-          <a:effectLst/>
-        </a:effectStyle>
-        <a:effectStyle>
-          <a:effectLst/>
-        </a:effectStyle>
-        <a:effectStyle>
-          <a:effectLst>
-            <a:outerShdw blurRad="57150" dist="19050" dir="5400000" algn="ctr" rotWithShape="0">
-              <a:srgbClr val="000000">
-                <a:alpha val="63000"/>
-              </a:srgbClr>
-            </a:outerShdw>
-          </a:effectLst>
-        </a:effectStyle>
-      </a:effectStyleLst>
-      <a:bgFillStyleLst>
-        <a:solidFill>
-          <a:schemeClr val="phClr"/>
-        </a:solidFill>
-        <a:solidFill>
-          <a:schemeClr val="phClr">
-            <a:tint val="95000"/>
-            <a:satMod val="170000"/>
-          </a:schemeClr>
-        </a:solidFill>
-        <a:gradFill rotWithShape="1">
-          <a:gsLst>
-            <a:gs pos="0">
-              <a:schemeClr val="phClr">
-                <a:tint val="93000"/>
-                <a:satMod val="150000"/>
-                <a:shade val="98000"/>
-                <a:lumMod val="102000"/>
-              </a:schemeClr>
-            </a:gs>
-            <a:gs pos="50000">
-              <a:schemeClr val="phClr">
-                <a:tint val="98000"/>
-                <a:satMod val="130000"/>
-                <a:shade val="90000"/>
-                <a:lumMod val="103000"/>
-              </a:schemeClr>
-            </a:gs>
-            <a:gs pos="100000">
-              <a:schemeClr val="phClr">
-                <a:shade val="63000"/>
-                <a:satMod val="120000"/>
-              </a:schemeClr>
-            </a:gs>
-          </a:gsLst>
-          <a:lin ang="5400000" scaled="0"/>
-        </a:gradFill>
-      </a:bgFillStyleLst>
-    </a:fmtScheme>
-  </a:themeElements>
-  <a:objectDefaults>
-    <a:lnDef>
-      <a:spPr/>
-      <a:bodyPr/>
-      <a:lstStyle/>
-      <a:style>
-        <a:lnRef idx="2">
-          <a:schemeClr val="accent1"/>
-        </a:lnRef>
-        <a:fillRef idx="0">
-          <a:schemeClr val="accent1"/>
-        </a:fillRef>
-        <a:effectRef idx="1">
-          <a:schemeClr val="accent1"/>
-        </a:effectRef>
-        <a:fontRef idx="minor">
-          <a:schemeClr val="tx1"/>
-        </a:fontRef>
-      </a:style>
-    </a:lnDef>
-  </a:objectDefaults>
-  <a:extraClrSchemeLst/>
-  <a:extLst>
-    <a:ext uri="{05A4C25C-085E-4340-85A3-A5531E510DB2}">
-      <thm15:themeFamily xmlns:thm15="http://schemas.microsoft.com/office/thememl/2012/main" name="Office Theme" id="{2E142A2C-CD16-42D6-873A-C26D2A0506FA}" vid="{1BDDFF52-6CD6-40A5-AB3C-68EB2F1E4D0A}"/>
-    </a:ext>
-  </a:extLst>
-</a:theme>
 </file>
--- a/cours/Module TIC/Série Officielle 01-10/TD_TIC_01_Introduction_aux_TIC_FR.pptx
+++ b/cours/Module TIC/Série Officielle 01-10/TD_TIC_01_Introduction_aux_TIC_FR.pptx
@@ -2851,7 +2851,7 @@
           <a:solidFill>
             <a:schemeClr val="tx1"/>
           </a:solidFill>
-          <a:latin typeface="+mj-lt"/>
+          <a:latin typeface="Poppins"/>
           <a:ea typeface="+mj-ea"/>
           <a:cs typeface="+mj-cs"/>
         </a:defRPr>
@@ -2868,7 +2868,7 @@
           <a:solidFill>
             <a:schemeClr val="tx1"/>
           </a:solidFill>
-          <a:latin typeface="+mn-lt"/>
+          <a:latin typeface="Poppins"/>
           <a:ea typeface="+mn-ea"/>
           <a:cs typeface="+mn-cs"/>
         </a:defRPr>
@@ -2883,7 +2883,7 @@
           <a:solidFill>
             <a:schemeClr val="tx1"/>
           </a:solidFill>
-          <a:latin typeface="+mn-lt"/>
+          <a:latin typeface="Poppins"/>
           <a:ea typeface="+mn-ea"/>
           <a:cs typeface="+mn-cs"/>
         </a:defRPr>
@@ -2898,7 +2898,7 @@
           <a:solidFill>
             <a:schemeClr val="tx1"/>
           </a:solidFill>
-          <a:latin typeface="+mn-lt"/>
+          <a:latin typeface="Poppins"/>
           <a:ea typeface="+mn-ea"/>
           <a:cs typeface="+mn-cs"/>
         </a:defRPr>
@@ -2913,7 +2913,7 @@
           <a:solidFill>
             <a:schemeClr val="tx1"/>
           </a:solidFill>
-          <a:latin typeface="+mn-lt"/>
+          <a:latin typeface="Poppins"/>
           <a:ea typeface="+mn-ea"/>
           <a:cs typeface="+mn-cs"/>
         </a:defRPr>
@@ -2928,7 +2928,7 @@
           <a:solidFill>
             <a:schemeClr val="tx1"/>
           </a:solidFill>
-          <a:latin typeface="+mn-lt"/>
+          <a:latin typeface="Poppins"/>
           <a:ea typeface="+mn-ea"/>
           <a:cs typeface="+mn-cs"/>
         </a:defRPr>
@@ -2943,7 +2943,7 @@
           <a:solidFill>
             <a:schemeClr val="tx1"/>
           </a:solidFill>
-          <a:latin typeface="+mn-lt"/>
+          <a:latin typeface="Poppins"/>
           <a:ea typeface="+mn-ea"/>
           <a:cs typeface="+mn-cs"/>
         </a:defRPr>
@@ -2958,7 +2958,7 @@
           <a:solidFill>
             <a:schemeClr val="tx1"/>
           </a:solidFill>
-          <a:latin typeface="+mn-lt"/>
+          <a:latin typeface="Poppins"/>
           <a:ea typeface="+mn-ea"/>
           <a:cs typeface="+mn-cs"/>
         </a:defRPr>
@@ -2973,7 +2973,7 @@
           <a:solidFill>
             <a:schemeClr val="tx1"/>
           </a:solidFill>
-          <a:latin typeface="+mn-lt"/>
+          <a:latin typeface="Poppins"/>
           <a:ea typeface="+mn-ea"/>
           <a:cs typeface="+mn-cs"/>
         </a:defRPr>
@@ -2988,7 +2988,7 @@
           <a:solidFill>
             <a:schemeClr val="tx1"/>
           </a:solidFill>
-          <a:latin typeface="+mn-lt"/>
+          <a:latin typeface="Poppins"/>
           <a:ea typeface="+mn-ea"/>
           <a:cs typeface="+mn-cs"/>
         </a:defRPr>
@@ -3003,7 +3003,7 @@
           <a:solidFill>
             <a:schemeClr val="tx1"/>
           </a:solidFill>
-          <a:latin typeface="+mn-lt"/>
+          <a:latin typeface="Poppins"/>
           <a:ea typeface="+mn-ea"/>
           <a:cs typeface="+mn-cs"/>
         </a:defRPr>
@@ -3013,7 +3013,7 @@
           <a:solidFill>
             <a:schemeClr val="tx1"/>
           </a:solidFill>
-          <a:latin typeface="+mn-lt"/>
+          <a:latin typeface="Poppins"/>
           <a:ea typeface="+mn-ea"/>
           <a:cs typeface="+mn-cs"/>
         </a:defRPr>
@@ -3023,7 +3023,7 @@
           <a:solidFill>
             <a:schemeClr val="tx1"/>
           </a:solidFill>
-          <a:latin typeface="+mn-lt"/>
+          <a:latin typeface="Poppins"/>
           <a:ea typeface="+mn-ea"/>
           <a:cs typeface="+mn-cs"/>
         </a:defRPr>
@@ -3033,7 +3033,7 @@
           <a:solidFill>
             <a:schemeClr val="tx1"/>
           </a:solidFill>
-          <a:latin typeface="+mn-lt"/>
+          <a:latin typeface="Poppins"/>
           <a:ea typeface="+mn-ea"/>
           <a:cs typeface="+mn-cs"/>
         </a:defRPr>
@@ -3043,7 +3043,7 @@
           <a:solidFill>
             <a:schemeClr val="tx1"/>
           </a:solidFill>
-          <a:latin typeface="+mn-lt"/>
+          <a:latin typeface="Poppins"/>
           <a:ea typeface="+mn-ea"/>
           <a:cs typeface="+mn-cs"/>
         </a:defRPr>
@@ -3053,7 +3053,7 @@
           <a:solidFill>
             <a:schemeClr val="tx1"/>
           </a:solidFill>
-          <a:latin typeface="+mn-lt"/>
+          <a:latin typeface="Poppins"/>
           <a:ea typeface="+mn-ea"/>
           <a:cs typeface="+mn-cs"/>
         </a:defRPr>
@@ -3063,7 +3063,7 @@
           <a:solidFill>
             <a:schemeClr val="tx1"/>
           </a:solidFill>
-          <a:latin typeface="+mn-lt"/>
+          <a:latin typeface="Poppins"/>
           <a:ea typeface="+mn-ea"/>
           <a:cs typeface="+mn-cs"/>
         </a:defRPr>
@@ -3073,7 +3073,7 @@
           <a:solidFill>
             <a:schemeClr val="tx1"/>
           </a:solidFill>
-          <a:latin typeface="+mn-lt"/>
+          <a:latin typeface="Poppins"/>
           <a:ea typeface="+mn-ea"/>
           <a:cs typeface="+mn-cs"/>
         </a:defRPr>
@@ -3083,7 +3083,7 @@
           <a:solidFill>
             <a:schemeClr val="tx1"/>
           </a:solidFill>
-          <a:latin typeface="+mn-lt"/>
+          <a:latin typeface="Poppins"/>
           <a:ea typeface="+mn-ea"/>
           <a:cs typeface="+mn-cs"/>
         </a:defRPr>
@@ -3098,9 +3098,7 @@
   <p:cSld>
     <p:bg>
       <p:bgPr>
-        <a:solidFill>
-          <a:srgbClr val="143D24"/>
-        </a:solidFill>
+        <a:solidFill>val="004A38"/&gt;</a:solidFill>
         <a:effectLst/>
       </p:bgPr>
     </p:bg>
@@ -3125,9 +3123,7 @@
           <a:prstGeom prst="rect">
             <a:avLst/>
           </a:prstGeom>
-          <a:solidFill>
-            <a:srgbClr val="2E8654"/>
-          </a:solidFill>
+          <a:solidFill>val="0DA574"/&gt;</a:solidFill>
           <a:ln>
             <a:noFill/>
           </a:ln>
@@ -3168,9 +3164,7 @@
           <a:prstGeom prst="rect">
             <a:avLst/>
           </a:prstGeom>
-          <a:solidFill>
-            <a:srgbClr val="2E8654"/>
-          </a:solidFill>
+          <a:solidFill>val="0DA574"/&gt;</a:solidFill>
           <a:ln>
             <a:noFill/>
           </a:ln>
@@ -3221,9 +3215,7 @@
           <a:p>
             <a:pPr algn="ctr">
               <a:defRPr sz="1600" b="1">
-                <a:solidFill>
-                  <a:srgbClr val="FFFFFF"/>
-                </a:solidFill>
+                <a:solidFill>val="FFFFFF"/&gt;</a:solidFill>
               </a:defRPr>
             </a:pPr>
             <a:r>
@@ -3256,9 +3248,7 @@
           <a:p>
             <a:pPr algn="ctr">
               <a:defRPr sz="3200" b="1">
-                <a:solidFill>
-                  <a:srgbClr val="FFFFFF"/>
-                </a:solidFill>
+                <a:solidFill>val="FFFFFF"/&gt;</a:solidFill>
               </a:defRPr>
             </a:pPr>
             <a:r>
@@ -3291,9 +3281,7 @@
           <a:p>
             <a:pPr algn="ctr">
               <a:defRPr sz="1800" b="0">
-                <a:solidFill>
-                  <a:srgbClr val="D4EDDA"/>
-                </a:solidFill>
+                <a:solidFill>val="EEF1F4"/&gt;</a:solidFill>
               </a:defRPr>
             </a:pPr>
             <a:r>
@@ -3326,9 +3314,7 @@
           <a:p>
             <a:pPr algn="ctr">
               <a:defRPr sz="1400" b="0">
-                <a:solidFill>
-                  <a:srgbClr val="8BC39A"/>
-                </a:solidFill>
+                <a:solidFill>val="93B39E"/&gt;</a:solidFill>
               </a:defRPr>
             </a:pPr>
             <a:r>
@@ -3359,9 +3345,7 @@
           <a:prstGeom prst="rect">
             <a:avLst/>
           </a:prstGeom>
-          <a:solidFill>
-            <a:srgbClr val="2E8654"/>
-          </a:solidFill>
+          <a:solidFill>val="0DA574"/&gt;</a:solidFill>
           <a:ln>
             <a:noFill/>
           </a:ln>
@@ -3412,6 +3396,47 @@
           </a:prstGeom>
         </p:spPr>
       </p:pic>
+      <p:sp>
+        <p:nvSpPr>
+          <p:cNvPr id="990001" name="Pied de page FLE"/>
+          <p:cNvSpPr>
+            <a:spLocks noGrp="1"/>
+          </p:cNvSpPr>
+          <p:nvPr/>
+        </p:nvSpPr>
+        <p:spPr>
+          <a:xfrm>
+            <a:off x="4343400" y="-402336"/>
+            <a:ext cx="4572000" cy="274320"/>
+          </a:xfrm>
+          <a:prstGeom prst="rect">
+            <a:avLst/>
+          </a:prstGeom>
+        </p:spPr>
+        <p:txBody>
+          <a:bodyPr anchor="b"/>
+          <a:lstStyle/>
+          <a:p>
+            <a:pPr algn="r">
+              <a:defRPr sz="900">
+                <a:solidFill>
+                  <a:srgbClr val="9AA7B6"/>
+                </a:solidFill>
+                <a:latin typeface="Poppins"/>
+              </a:defRPr>
+            </a:pPr>
+            <a:r>
+              <a:rPr lang="fr-FR" sz="900">
+                <a:solidFill>
+                  <a:srgbClr val="9AA7B6"/>
+                </a:solidFill>
+                <a:latin typeface="Poppins"/>
+              </a:rPr>
+              <a:t>Université de Mostaganem — Dr. Madani BELACEL</a:t>
+            </a:r>
+          </a:p>
+        </p:txBody>
+      </p:sp>
     </p:spTree>
   </p:cSld>
   <p:clrMapOvr>
@@ -3425,9 +3450,7 @@
   <p:cSld>
     <p:bg>
       <p:bgPr>
-        <a:solidFill>
-          <a:srgbClr val="FFFFFF"/>
-        </a:solidFill>
+        <a:solidFill>val="FFFFFF"/&gt;</a:solidFill>
         <a:effectLst/>
       </p:bgPr>
     </p:bg>
@@ -3452,9 +3475,7 @@
           <a:prstGeom prst="rect">
             <a:avLst/>
           </a:prstGeom>
-          <a:solidFill>
-            <a:srgbClr val="E86C00"/>
-          </a:solidFill>
+          <a:solidFill>val="F0B429"/&gt;</a:solidFill>
           <a:ln>
             <a:noFill/>
           </a:ln>
@@ -3505,9 +3526,7 @@
           <a:p>
             <a:pPr algn="l">
               <a:defRPr sz="2200" b="1">
-                <a:solidFill>
-                  <a:srgbClr val="E86C00"/>
-                </a:solidFill>
+                <a:solidFill>val="F0B429"/&gt;</a:solidFill>
               </a:defRPr>
             </a:pPr>
             <a:r>
@@ -3530,9 +3549,7 @@
           <a:prstGeom prst="rect">
             <a:avLst/>
           </a:prstGeom>
-          <a:solidFill>
-            <a:srgbClr val="E86C00"/>
-          </a:solidFill>
+          <a:solidFill>val="F0B429"/&gt;</a:solidFill>
           <a:ln>
             <a:noFill/>
           </a:ln>
@@ -3586,9 +3603,7 @@
                 <a:spcPts val="600"/>
               </a:spcAft>
               <a:defRPr sz="1500">
-                <a:solidFill>
-                  <a:srgbClr val="1A1A1A"/>
-                </a:solidFill>
+                <a:solidFill>val="22344A"/&gt;</a:solidFill>
               </a:defRPr>
             </a:pPr>
             <a:r>
@@ -3601,9 +3616,7 @@
                 <a:spcPts val="600"/>
               </a:spcAft>
               <a:defRPr sz="1500">
-                <a:solidFill>
-                  <a:srgbClr val="1A1A1A"/>
-                </a:solidFill>
+                <a:solidFill>val="22344A"/&gt;</a:solidFill>
               </a:defRPr>
             </a:pPr>
             <a:r>
@@ -3626,9 +3639,7 @@
           <a:prstGeom prst="rect">
             <a:avLst/>
           </a:prstGeom>
-          <a:solidFill>
-            <a:srgbClr val="FFF8F0"/>
-          </a:solidFill>
+          <a:solidFill>val="F4F6F8"/&gt;</a:solidFill>
           <a:ln>
             <a:noFill/>
           </a:ln>
@@ -3669,9 +3680,7 @@
           <a:prstGeom prst="rect">
             <a:avLst/>
           </a:prstGeom>
-          <a:solidFill>
-            <a:srgbClr val="E86C00"/>
-          </a:solidFill>
+          <a:solidFill>val="F0B429"/&gt;</a:solidFill>
           <a:ln>
             <a:noFill/>
           </a:ln>
@@ -3722,18 +3731,14 @@
           <a:p>
             <a:r>
               <a:rPr sz="1300" b="1">
-                <a:solidFill>
-                  <a:srgbClr val="E86C00"/>
-                </a:solidFill>
+                <a:solidFill>val="F0B429"/&gt;</a:solidFill>
               </a:rPr>
               <a:t>Intérêt pratique pour vous
 </a:t>
             </a:r>
             <a:r>
               <a:rPr sz="1200">
-                <a:solidFill>
-                  <a:srgbClr val="1A1A1A"/>
-                </a:solidFill>
+                <a:solidFill>val="22344A"/&gt;</a:solidFill>
               </a:rPr>
               <a:t>Cette compétence vous servira dans votre vie universitaire et professionnelle.</a:t>
             </a:r>
@@ -3764,6 +3769,47 @@
           </a:prstGeom>
         </p:spPr>
       </p:pic>
+      <p:sp>
+        <p:nvSpPr>
+          <p:cNvPr id="990001" name="Pied de page FLE"/>
+          <p:cNvSpPr>
+            <a:spLocks noGrp="1"/>
+          </p:cNvSpPr>
+          <p:nvPr/>
+        </p:nvSpPr>
+        <p:spPr>
+          <a:xfrm>
+            <a:off x="-228600" y="6400800"/>
+            <a:ext cx="137160" cy="274320"/>
+          </a:xfrm>
+          <a:prstGeom prst="rect">
+            <a:avLst/>
+          </a:prstGeom>
+        </p:spPr>
+        <p:txBody>
+          <a:bodyPr anchor="b"/>
+          <a:lstStyle/>
+          <a:p>
+            <a:pPr algn="r">
+              <a:defRPr sz="900">
+                <a:solidFill>
+                  <a:srgbClr val="9AA7B6"/>
+                </a:solidFill>
+                <a:latin typeface="Poppins"/>
+              </a:defRPr>
+            </a:pPr>
+            <a:r>
+              <a:rPr lang="fr-FR" sz="900">
+                <a:solidFill>
+                  <a:srgbClr val="9AA7B6"/>
+                </a:solidFill>
+                <a:latin typeface="Poppins"/>
+              </a:rPr>
+              <a:t>Université de Mostaganem — Dr. Madani BELACEL</a:t>
+            </a:r>
+          </a:p>
+        </p:txBody>
+      </p:sp>
     </p:spTree>
   </p:cSld>
   <p:clrMapOvr>
@@ -3777,9 +3823,7 @@
   <p:cSld>
     <p:bg>
       <p:bgPr>
-        <a:solidFill>
-          <a:srgbClr val="FFFFFF"/>
-        </a:solidFill>
+        <a:solidFill>val="FFFFFF"/&gt;</a:solidFill>
         <a:effectLst/>
       </p:bgPr>
     </p:bg>
@@ -3804,9 +3848,7 @@
           <a:prstGeom prst="rect">
             <a:avLst/>
           </a:prstGeom>
-          <a:solidFill>
-            <a:srgbClr val="E86C00"/>
-          </a:solidFill>
+          <a:solidFill>val="F0B429"/&gt;</a:solidFill>
           <a:ln>
             <a:noFill/>
           </a:ln>
@@ -3857,9 +3899,7 @@
           <a:p>
             <a:pPr algn="l">
               <a:defRPr sz="2200" b="1">
-                <a:solidFill>
-                  <a:srgbClr val="E86C00"/>
-                </a:solidFill>
+                <a:solidFill>val="F0B429"/&gt;</a:solidFill>
               </a:defRPr>
             </a:pPr>
             <a:r>
@@ -3882,9 +3922,7 @@
           <a:prstGeom prst="rect">
             <a:avLst/>
           </a:prstGeom>
-          <a:solidFill>
-            <a:srgbClr val="E86C00"/>
-          </a:solidFill>
+          <a:solidFill>val="F0B429"/&gt;</a:solidFill>
           <a:ln>
             <a:noFill/>
           </a:ln>
@@ -3938,9 +3976,7 @@
                 <a:spcPts val="600"/>
               </a:spcAft>
               <a:defRPr sz="1500">
-                <a:solidFill>
-                  <a:srgbClr val="1A1A1A"/>
-                </a:solidFill>
+                <a:solidFill>val="22344A"/&gt;</a:solidFill>
               </a:defRPr>
             </a:pPr>
             <a:r>
@@ -3953,9 +3989,7 @@
                 <a:spcPts val="600"/>
               </a:spcAft>
               <a:defRPr sz="1500">
-                <a:solidFill>
-                  <a:srgbClr val="1A1A1A"/>
-                </a:solidFill>
+                <a:solidFill>val="22344A"/&gt;</a:solidFill>
               </a:defRPr>
             </a:pPr>
             <a:r>
@@ -3978,9 +4012,7 @@
           <a:prstGeom prst="rect">
             <a:avLst/>
           </a:prstGeom>
-          <a:solidFill>
-            <a:srgbClr val="FFF8F0"/>
-          </a:solidFill>
+          <a:solidFill>val="F4F6F8"/&gt;</a:solidFill>
           <a:ln>
             <a:noFill/>
           </a:ln>
@@ -4021,9 +4053,7 @@
           <a:prstGeom prst="rect">
             <a:avLst/>
           </a:prstGeom>
-          <a:solidFill>
-            <a:srgbClr val="E86C00"/>
-          </a:solidFill>
+          <a:solidFill>val="F0B429"/&gt;</a:solidFill>
           <a:ln>
             <a:noFill/>
           </a:ln>
@@ -4074,18 +4104,14 @@
           <a:p>
             <a:r>
               <a:rPr sz="1300" b="1">
-                <a:solidFill>
-                  <a:srgbClr val="E86C00"/>
-                </a:solidFill>
+                <a:solidFill>val="F0B429"/&gt;</a:solidFill>
               </a:rPr>
               <a:t>Intérêt pratique pour vous
 </a:t>
             </a:r>
             <a:r>
               <a:rPr sz="1200">
-                <a:solidFill>
-                  <a:srgbClr val="1A1A1A"/>
-                </a:solidFill>
+                <a:solidFill>val="22344A"/&gt;</a:solidFill>
               </a:rPr>
               <a:t>Cette compétence vous servira dans votre vie universitaire et professionnelle.</a:t>
             </a:r>
@@ -4116,6 +4142,47 @@
           </a:prstGeom>
         </p:spPr>
       </p:pic>
+      <p:sp>
+        <p:nvSpPr>
+          <p:cNvPr id="990001" name="Pied de page FLE"/>
+          <p:cNvSpPr>
+            <a:spLocks noGrp="1"/>
+          </p:cNvSpPr>
+          <p:nvPr/>
+        </p:nvSpPr>
+        <p:spPr>
+          <a:xfrm>
+            <a:off x="-228600" y="6400800"/>
+            <a:ext cx="137160" cy="274320"/>
+          </a:xfrm>
+          <a:prstGeom prst="rect">
+            <a:avLst/>
+          </a:prstGeom>
+        </p:spPr>
+        <p:txBody>
+          <a:bodyPr anchor="b"/>
+          <a:lstStyle/>
+          <a:p>
+            <a:pPr algn="r">
+              <a:defRPr sz="900">
+                <a:solidFill>
+                  <a:srgbClr val="9AA7B6"/>
+                </a:solidFill>
+                <a:latin typeface="Poppins"/>
+              </a:defRPr>
+            </a:pPr>
+            <a:r>
+              <a:rPr lang="fr-FR" sz="900">
+                <a:solidFill>
+                  <a:srgbClr val="9AA7B6"/>
+                </a:solidFill>
+                <a:latin typeface="Poppins"/>
+              </a:rPr>
+              <a:t>Université de Mostaganem — Dr. Madani BELACEL</a:t>
+            </a:r>
+          </a:p>
+        </p:txBody>
+      </p:sp>
     </p:spTree>
   </p:cSld>
   <p:clrMapOvr>
@@ -4129,9 +4196,7 @@
   <p:cSld>
     <p:bg>
       <p:bgPr>
-        <a:solidFill>
-          <a:srgbClr val="FFFFFF"/>
-        </a:solidFill>
+        <a:solidFill>val="FFFFFF"/&gt;</a:solidFill>
         <a:effectLst/>
       </p:bgPr>
     </p:bg>
@@ -4156,9 +4221,7 @@
           <a:prstGeom prst="rect">
             <a:avLst/>
           </a:prstGeom>
-          <a:solidFill>
-            <a:srgbClr val="E86C00"/>
-          </a:solidFill>
+          <a:solidFill>val="F0B429"/&gt;</a:solidFill>
           <a:ln>
             <a:noFill/>
           </a:ln>
@@ -4209,9 +4272,7 @@
           <a:p>
             <a:pPr algn="l">
               <a:defRPr sz="2200" b="1">
-                <a:solidFill>
-                  <a:srgbClr val="E86C00"/>
-                </a:solidFill>
+                <a:solidFill>val="F0B429"/&gt;</a:solidFill>
               </a:defRPr>
             </a:pPr>
             <a:r>
@@ -4234,9 +4295,7 @@
           <a:prstGeom prst="rect">
             <a:avLst/>
           </a:prstGeom>
-          <a:solidFill>
-            <a:srgbClr val="E86C00"/>
-          </a:solidFill>
+          <a:solidFill>val="F0B429"/&gt;</a:solidFill>
           <a:ln>
             <a:noFill/>
           </a:ln>
@@ -4290,9 +4349,7 @@
                 <a:spcPts val="600"/>
               </a:spcAft>
               <a:defRPr sz="1500">
-                <a:solidFill>
-                  <a:srgbClr val="1A1A1A"/>
-                </a:solidFill>
+                <a:solidFill>val="22344A"/&gt;</a:solidFill>
               </a:defRPr>
             </a:pPr>
             <a:r>
@@ -4305,9 +4362,7 @@
                 <a:spcPts val="600"/>
               </a:spcAft>
               <a:defRPr sz="1500">
-                <a:solidFill>
-                  <a:srgbClr val="1A1A1A"/>
-                </a:solidFill>
+                <a:solidFill>val="22344A"/&gt;</a:solidFill>
               </a:defRPr>
             </a:pPr>
             <a:r>
@@ -4330,9 +4385,7 @@
           <a:prstGeom prst="rect">
             <a:avLst/>
           </a:prstGeom>
-          <a:solidFill>
-            <a:srgbClr val="FFF8F0"/>
-          </a:solidFill>
+          <a:solidFill>val="F4F6F8"/&gt;</a:solidFill>
           <a:ln>
             <a:noFill/>
           </a:ln>
@@ -4373,9 +4426,7 @@
           <a:prstGeom prst="rect">
             <a:avLst/>
           </a:prstGeom>
-          <a:solidFill>
-            <a:srgbClr val="E86C00"/>
-          </a:solidFill>
+          <a:solidFill>val="F0B429"/&gt;</a:solidFill>
           <a:ln>
             <a:noFill/>
           </a:ln>
@@ -4426,18 +4477,14 @@
           <a:p>
             <a:r>
               <a:rPr sz="1300" b="1">
-                <a:solidFill>
-                  <a:srgbClr val="E86C00"/>
-                </a:solidFill>
+                <a:solidFill>val="F0B429"/&gt;</a:solidFill>
               </a:rPr>
               <a:t>Intérêt pratique pour vous
 </a:t>
             </a:r>
             <a:r>
               <a:rPr sz="1200">
-                <a:solidFill>
-                  <a:srgbClr val="1A1A1A"/>
-                </a:solidFill>
+                <a:solidFill>val="22344A"/&gt;</a:solidFill>
               </a:rPr>
               <a:t>Cette compétence vous servira dans votre vie universitaire et professionnelle.</a:t>
             </a:r>
@@ -4468,6 +4515,47 @@
           </a:prstGeom>
         </p:spPr>
       </p:pic>
+      <p:sp>
+        <p:nvSpPr>
+          <p:cNvPr id="990001" name="Pied de page FLE"/>
+          <p:cNvSpPr>
+            <a:spLocks noGrp="1"/>
+          </p:cNvSpPr>
+          <p:nvPr/>
+        </p:nvSpPr>
+        <p:spPr>
+          <a:xfrm>
+            <a:off x="-228600" y="6400800"/>
+            <a:ext cx="137160" cy="274320"/>
+          </a:xfrm>
+          <a:prstGeom prst="rect">
+            <a:avLst/>
+          </a:prstGeom>
+        </p:spPr>
+        <p:txBody>
+          <a:bodyPr anchor="b"/>
+          <a:lstStyle/>
+          <a:p>
+            <a:pPr algn="r">
+              <a:defRPr sz="900">
+                <a:solidFill>
+                  <a:srgbClr val="9AA7B6"/>
+                </a:solidFill>
+                <a:latin typeface="Poppins"/>
+              </a:defRPr>
+            </a:pPr>
+            <a:r>
+              <a:rPr lang="fr-FR" sz="900">
+                <a:solidFill>
+                  <a:srgbClr val="9AA7B6"/>
+                </a:solidFill>
+                <a:latin typeface="Poppins"/>
+              </a:rPr>
+              <a:t>Université de Mostaganem — Dr. Madani BELACEL</a:t>
+            </a:r>
+          </a:p>
+        </p:txBody>
+      </p:sp>
     </p:spTree>
   </p:cSld>
   <p:clrMapOvr>
@@ -4481,9 +4569,7 @@
   <p:cSld>
     <p:bg>
       <p:bgPr>
-        <a:solidFill>
-          <a:srgbClr val="FFFFFF"/>
-        </a:solidFill>
+        <a:solidFill>val="FFFFFF"/&gt;</a:solidFill>
         <a:effectLst/>
       </p:bgPr>
     </p:bg>
@@ -4508,9 +4594,7 @@
           <a:prstGeom prst="rect">
             <a:avLst/>
           </a:prstGeom>
-          <a:solidFill>
-            <a:srgbClr val="E86C00"/>
-          </a:solidFill>
+          <a:solidFill>val="F0B429"/&gt;</a:solidFill>
           <a:ln>
             <a:noFill/>
           </a:ln>
@@ -4561,9 +4645,7 @@
           <a:p>
             <a:pPr algn="l">
               <a:defRPr sz="2200" b="1">
-                <a:solidFill>
-                  <a:srgbClr val="E86C00"/>
-                </a:solidFill>
+                <a:solidFill>val="F0B429"/&gt;</a:solidFill>
               </a:defRPr>
             </a:pPr>
             <a:r>
@@ -4586,9 +4668,7 @@
           <a:prstGeom prst="rect">
             <a:avLst/>
           </a:prstGeom>
-          <a:solidFill>
-            <a:srgbClr val="E86C00"/>
-          </a:solidFill>
+          <a:solidFill>val="F0B429"/&gt;</a:solidFill>
           <a:ln>
             <a:noFill/>
           </a:ln>
@@ -4642,9 +4722,7 @@
                 <a:spcPts val="600"/>
               </a:spcAft>
               <a:defRPr sz="1500">
-                <a:solidFill>
-                  <a:srgbClr val="1A1A1A"/>
-                </a:solidFill>
+                <a:solidFill>val="22344A"/&gt;</a:solidFill>
               </a:defRPr>
             </a:pPr>
             <a:r>
@@ -4657,9 +4735,7 @@
                 <a:spcPts val="600"/>
               </a:spcAft>
               <a:defRPr sz="1500">
-                <a:solidFill>
-                  <a:srgbClr val="1A1A1A"/>
-                </a:solidFill>
+                <a:solidFill>val="22344A"/&gt;</a:solidFill>
               </a:defRPr>
             </a:pPr>
             <a:r>
@@ -4682,9 +4758,7 @@
           <a:prstGeom prst="rect">
             <a:avLst/>
           </a:prstGeom>
-          <a:solidFill>
-            <a:srgbClr val="FFF8F0"/>
-          </a:solidFill>
+          <a:solidFill>val="F4F6F8"/&gt;</a:solidFill>
           <a:ln>
             <a:noFill/>
           </a:ln>
@@ -4725,9 +4799,7 @@
           <a:prstGeom prst="rect">
             <a:avLst/>
           </a:prstGeom>
-          <a:solidFill>
-            <a:srgbClr val="E86C00"/>
-          </a:solidFill>
+          <a:solidFill>val="F0B429"/&gt;</a:solidFill>
           <a:ln>
             <a:noFill/>
           </a:ln>
@@ -4778,18 +4850,14 @@
           <a:p>
             <a:r>
               <a:rPr sz="1300" b="1">
-                <a:solidFill>
-                  <a:srgbClr val="E86C00"/>
-                </a:solidFill>
+                <a:solidFill>val="F0B429"/&gt;</a:solidFill>
               </a:rPr>
               <a:t>Intérêt pratique pour vous
 </a:t>
             </a:r>
             <a:r>
               <a:rPr sz="1200">
-                <a:solidFill>
-                  <a:srgbClr val="1A1A1A"/>
-                </a:solidFill>
+                <a:solidFill>val="22344A"/&gt;</a:solidFill>
               </a:rPr>
               <a:t>Cette compétence vous servira dans votre vie universitaire et professionnelle.</a:t>
             </a:r>
@@ -4820,6 +4888,47 @@
           </a:prstGeom>
         </p:spPr>
       </p:pic>
+      <p:sp>
+        <p:nvSpPr>
+          <p:cNvPr id="990001" name="Pied de page FLE"/>
+          <p:cNvSpPr>
+            <a:spLocks noGrp="1"/>
+          </p:cNvSpPr>
+          <p:nvPr/>
+        </p:nvSpPr>
+        <p:spPr>
+          <a:xfrm>
+            <a:off x="-228600" y="6400800"/>
+            <a:ext cx="137160" cy="274320"/>
+          </a:xfrm>
+          <a:prstGeom prst="rect">
+            <a:avLst/>
+          </a:prstGeom>
+        </p:spPr>
+        <p:txBody>
+          <a:bodyPr anchor="b"/>
+          <a:lstStyle/>
+          <a:p>
+            <a:pPr algn="r">
+              <a:defRPr sz="900">
+                <a:solidFill>
+                  <a:srgbClr val="9AA7B6"/>
+                </a:solidFill>
+                <a:latin typeface="Poppins"/>
+              </a:defRPr>
+            </a:pPr>
+            <a:r>
+              <a:rPr lang="fr-FR" sz="900">
+                <a:solidFill>
+                  <a:srgbClr val="9AA7B6"/>
+                </a:solidFill>
+                <a:latin typeface="Poppins"/>
+              </a:rPr>
+              <a:t>Université de Mostaganem — Dr. Madani BELACEL</a:t>
+            </a:r>
+          </a:p>
+        </p:txBody>
+      </p:sp>
     </p:spTree>
   </p:cSld>
   <p:clrMapOvr>
@@ -4833,9 +4942,7 @@
   <p:cSld>
     <p:bg>
       <p:bgPr>
-        <a:solidFill>
-          <a:srgbClr val="FFFFFF"/>
-        </a:solidFill>
+        <a:solidFill>val="FFFFFF"/&gt;</a:solidFill>
         <a:effectLst/>
       </p:bgPr>
     </p:bg>
@@ -4860,9 +4967,7 @@
           <a:prstGeom prst="rect">
             <a:avLst/>
           </a:prstGeom>
-          <a:solidFill>
-            <a:srgbClr val="E86C00"/>
-          </a:solidFill>
+          <a:solidFill>val="F0B429"/&gt;</a:solidFill>
           <a:ln>
             <a:noFill/>
           </a:ln>
@@ -4913,9 +5018,7 @@
           <a:p>
             <a:pPr algn="l">
               <a:defRPr sz="2200" b="1">
-                <a:solidFill>
-                  <a:srgbClr val="E86C00"/>
-                </a:solidFill>
+                <a:solidFill>val="F0B429"/&gt;</a:solidFill>
               </a:defRPr>
             </a:pPr>
             <a:r>
@@ -4938,9 +5041,7 @@
           <a:prstGeom prst="rect">
             <a:avLst/>
           </a:prstGeom>
-          <a:solidFill>
-            <a:srgbClr val="E86C00"/>
-          </a:solidFill>
+          <a:solidFill>val="F0B429"/&gt;</a:solidFill>
           <a:ln>
             <a:noFill/>
           </a:ln>
@@ -4994,9 +5095,7 @@
                 <a:spcPts val="600"/>
               </a:spcAft>
               <a:defRPr sz="1500">
-                <a:solidFill>
-                  <a:srgbClr val="1A1A1A"/>
-                </a:solidFill>
+                <a:solidFill>val="22344A"/&gt;</a:solidFill>
               </a:defRPr>
             </a:pPr>
             <a:r>
@@ -5009,9 +5108,7 @@
                 <a:spcPts val="600"/>
               </a:spcAft>
               <a:defRPr sz="1500">
-                <a:solidFill>
-                  <a:srgbClr val="1A1A1A"/>
-                </a:solidFill>
+                <a:solidFill>val="22344A"/&gt;</a:solidFill>
               </a:defRPr>
             </a:pPr>
             <a:r>
@@ -5024,9 +5121,7 @@
                 <a:spcPts val="600"/>
               </a:spcAft>
               <a:defRPr sz="1500">
-                <a:solidFill>
-                  <a:srgbClr val="1A1A1A"/>
-                </a:solidFill>
+                <a:solidFill>val="22344A"/&gt;</a:solidFill>
               </a:defRPr>
             </a:pPr>
             <a:r>
@@ -5039,9 +5134,7 @@
                 <a:spcPts val="600"/>
               </a:spcAft>
               <a:defRPr sz="1500">
-                <a:solidFill>
-                  <a:srgbClr val="1A1A1A"/>
-                </a:solidFill>
+                <a:solidFill>val="22344A"/&gt;</a:solidFill>
               </a:defRPr>
             </a:pPr>
             <a:r>
@@ -5054,9 +5147,7 @@
                 <a:spcPts val="600"/>
               </a:spcAft>
               <a:defRPr sz="1500">
-                <a:solidFill>
-                  <a:srgbClr val="1A1A1A"/>
-                </a:solidFill>
+                <a:solidFill>val="22344A"/&gt;</a:solidFill>
               </a:defRPr>
             </a:pPr>
             <a:r>
@@ -5079,9 +5170,7 @@
           <a:prstGeom prst="rect">
             <a:avLst/>
           </a:prstGeom>
-          <a:solidFill>
-            <a:srgbClr val="FFF8F0"/>
-          </a:solidFill>
+          <a:solidFill>val="F4F6F8"/&gt;</a:solidFill>
           <a:ln>
             <a:noFill/>
           </a:ln>
@@ -5122,9 +5211,7 @@
           <a:prstGeom prst="rect">
             <a:avLst/>
           </a:prstGeom>
-          <a:solidFill>
-            <a:srgbClr val="E86C00"/>
-          </a:solidFill>
+          <a:solidFill>val="F0B429"/&gt;</a:solidFill>
           <a:ln>
             <a:noFill/>
           </a:ln>
@@ -5175,18 +5262,14 @@
           <a:p>
             <a:r>
               <a:rPr sz="1300" b="1">
-                <a:solidFill>
-                  <a:srgbClr val="E86C00"/>
-                </a:solidFill>
+                <a:solidFill>val="F0B429"/&gt;</a:solidFill>
               </a:rPr>
               <a:t>Intérêt pratique pour vous
 </a:t>
             </a:r>
             <a:r>
               <a:rPr sz="1200">
-                <a:solidFill>
-                  <a:srgbClr val="1A1A1A"/>
-                </a:solidFill>
+                <a:solidFill>val="22344A"/&gt;</a:solidFill>
               </a:rPr>
               <a:t>Ensemble, ces compétences numériques vous permettent de travailler efficacement, communiquer professionnellement et résoudre les problèmes courants de la vie universitaire.</a:t>
             </a:r>
@@ -5217,6 +5300,47 @@
           </a:prstGeom>
         </p:spPr>
       </p:pic>
+      <p:sp>
+        <p:nvSpPr>
+          <p:cNvPr id="990001" name="Pied de page FLE"/>
+          <p:cNvSpPr>
+            <a:spLocks noGrp="1"/>
+          </p:cNvSpPr>
+          <p:nvPr/>
+        </p:nvSpPr>
+        <p:spPr>
+          <a:xfrm>
+            <a:off x="-228600" y="6400800"/>
+            <a:ext cx="137160" cy="274320"/>
+          </a:xfrm>
+          <a:prstGeom prst="rect">
+            <a:avLst/>
+          </a:prstGeom>
+        </p:spPr>
+        <p:txBody>
+          <a:bodyPr anchor="b"/>
+          <a:lstStyle/>
+          <a:p>
+            <a:pPr algn="r">
+              <a:defRPr sz="900">
+                <a:solidFill>
+                  <a:srgbClr val="9AA7B6"/>
+                </a:solidFill>
+                <a:latin typeface="Poppins"/>
+              </a:defRPr>
+            </a:pPr>
+            <a:r>
+              <a:rPr lang="fr-FR" sz="900">
+                <a:solidFill>
+                  <a:srgbClr val="9AA7B6"/>
+                </a:solidFill>
+                <a:latin typeface="Poppins"/>
+              </a:rPr>
+              <a:t>Université de Mostaganem — Dr. Madani BELACEL</a:t>
+            </a:r>
+          </a:p>
+        </p:txBody>
+      </p:sp>
     </p:spTree>
   </p:cSld>
   <p:clrMapOvr>
@@ -5230,9 +5354,7 @@
   <p:cSld>
     <p:bg>
       <p:bgPr>
-        <a:solidFill>
-          <a:srgbClr val="143D24"/>
-        </a:solidFill>
+        <a:solidFill>val="004A38"/&gt;</a:solidFill>
         <a:effectLst/>
       </p:bgPr>
     </p:bg>
@@ -5257,9 +5379,7 @@
           <a:prstGeom prst="rect">
             <a:avLst/>
           </a:prstGeom>
-          <a:solidFill>
-            <a:srgbClr val="2E8654"/>
-          </a:solidFill>
+          <a:solidFill>val="0DA574"/&gt;</a:solidFill>
           <a:ln>
             <a:noFill/>
           </a:ln>
@@ -5310,9 +5430,7 @@
           <a:p>
             <a:pPr algn="ctr">
               <a:defRPr sz="2800" b="1">
-                <a:solidFill>
-                  <a:srgbClr val="FFFFFF"/>
-                </a:solidFill>
+                <a:solidFill>val="FFFFFF"/&gt;</a:solidFill>
               </a:defRPr>
             </a:pPr>
             <a:r>
@@ -5348,9 +5466,7 @@
                 <a:spcPts val="600"/>
               </a:spcAft>
               <a:defRPr sz="1600">
-                <a:solidFill>
-                  <a:srgbClr val="D4EDDA"/>
-                </a:solidFill>
+                <a:solidFill>val="EEF1F4"/&gt;</a:solidFill>
               </a:defRPr>
             </a:pPr>
             <a:r>
@@ -5363,9 +5479,7 @@
                 <a:spcPts val="600"/>
               </a:spcAft>
               <a:defRPr sz="1600">
-                <a:solidFill>
-                  <a:srgbClr val="D4EDDA"/>
-                </a:solidFill>
+                <a:solidFill>val="EEF1F4"/&gt;</a:solidFill>
               </a:defRPr>
             </a:pPr>
             <a:r>
@@ -5378,9 +5492,7 @@
                 <a:spcPts val="600"/>
               </a:spcAft>
               <a:defRPr sz="1600">
-                <a:solidFill>
-                  <a:srgbClr val="D4EDDA"/>
-                </a:solidFill>
+                <a:solidFill>val="EEF1F4"/&gt;</a:solidFill>
               </a:defRPr>
             </a:pPr>
             <a:r>
@@ -5393,9 +5505,7 @@
                 <a:spcPts val="600"/>
               </a:spcAft>
               <a:defRPr sz="1600">
-                <a:solidFill>
-                  <a:srgbClr val="D4EDDA"/>
-                </a:solidFill>
+                <a:solidFill>val="EEF1F4"/&gt;</a:solidFill>
               </a:defRPr>
             </a:pPr>
             <a:r>
@@ -5408,9 +5518,7 @@
                 <a:spcPts val="600"/>
               </a:spcAft>
               <a:defRPr sz="1600">
-                <a:solidFill>
-                  <a:srgbClr val="D4EDDA"/>
-                </a:solidFill>
+                <a:solidFill>val="EEF1F4"/&gt;</a:solidFill>
               </a:defRPr>
             </a:pPr>
             <a:r>
@@ -5433,9 +5541,7 @@
           <a:prstGeom prst="rect">
             <a:avLst/>
           </a:prstGeom>
-          <a:solidFill>
-            <a:srgbClr val="2E8654"/>
-          </a:solidFill>
+          <a:solidFill>val="0DA574"/&gt;</a:solidFill>
           <a:ln>
             <a:noFill/>
           </a:ln>
@@ -5486,9 +5592,7 @@
           <a:p>
             <a:pPr algn="ctr">
               <a:defRPr sz="1400" b="0">
-                <a:solidFill>
-                  <a:srgbClr val="8BC39A"/>
-                </a:solidFill>
+                <a:solidFill>val="93B39E"/&gt;</a:solidFill>
               </a:defRPr>
             </a:pPr>
             <a:r>
@@ -5519,9 +5623,7 @@
           <a:prstGeom prst="rect">
             <a:avLst/>
           </a:prstGeom>
-          <a:solidFill>
-            <a:srgbClr val="2E8654"/>
-          </a:solidFill>
+          <a:solidFill>val="0DA574"/&gt;</a:solidFill>
           <a:ln>
             <a:noFill/>
           </a:ln>
@@ -5572,6 +5674,47 @@
           </a:prstGeom>
         </p:spPr>
       </p:pic>
+      <p:sp>
+        <p:nvSpPr>
+          <p:cNvPr id="990001" name="Pied de page FLE"/>
+          <p:cNvSpPr>
+            <a:spLocks noGrp="1"/>
+          </p:cNvSpPr>
+          <p:nvPr/>
+        </p:nvSpPr>
+        <p:spPr>
+          <a:xfrm>
+            <a:off x="4343400" y="-402336"/>
+            <a:ext cx="4572000" cy="274320"/>
+          </a:xfrm>
+          <a:prstGeom prst="rect">
+            <a:avLst/>
+          </a:prstGeom>
+        </p:spPr>
+        <p:txBody>
+          <a:bodyPr anchor="b"/>
+          <a:lstStyle/>
+          <a:p>
+            <a:pPr algn="r">
+              <a:defRPr sz="900">
+                <a:solidFill>
+                  <a:srgbClr val="9AA7B6"/>
+                </a:solidFill>
+                <a:latin typeface="Poppins"/>
+              </a:defRPr>
+            </a:pPr>
+            <a:r>
+              <a:rPr lang="fr-FR" sz="900">
+                <a:solidFill>
+                  <a:srgbClr val="9AA7B6"/>
+                </a:solidFill>
+                <a:latin typeface="Poppins"/>
+              </a:rPr>
+              <a:t>Université de Mostaganem — Dr. Madani BELACEL</a:t>
+            </a:r>
+          </a:p>
+        </p:txBody>
+      </p:sp>
     </p:spTree>
   </p:cSld>
   <p:clrMapOvr>
@@ -5585,9 +5728,7 @@
   <p:cSld>
     <p:bg>
       <p:bgPr>
-        <a:solidFill>
-          <a:srgbClr val="FFFFFF"/>
-        </a:solidFill>
+        <a:solidFill>val="FFFFFF"/&gt;</a:solidFill>
         <a:effectLst/>
       </p:bgPr>
     </p:bg>
@@ -5612,9 +5753,7 @@
           <a:prstGeom prst="rect">
             <a:avLst/>
           </a:prstGeom>
-          <a:solidFill>
-            <a:srgbClr val="555555"/>
-          </a:solidFill>
+          <a:solidFill>val="69788B"/&gt;</a:solidFill>
           <a:ln>
             <a:noFill/>
           </a:ln>
@@ -5665,9 +5804,7 @@
           <a:p>
             <a:pPr algn="l">
               <a:defRPr sz="2400" b="1">
-                <a:solidFill>
-                  <a:srgbClr val="555555"/>
-                </a:solidFill>
+                <a:solidFill>val="69788B"/&gt;</a:solidFill>
               </a:defRPr>
             </a:pPr>
             <a:r>
@@ -5703,9 +5840,7 @@
                 <a:spcPts val="600"/>
               </a:spcAft>
               <a:defRPr sz="1400">
-                <a:solidFill>
-                  <a:srgbClr val="555555"/>
-                </a:solidFill>
+                <a:solidFill>val="69788B"/&gt;</a:solidFill>
               </a:defRPr>
             </a:pPr>
             <a:r>
@@ -5718,9 +5853,7 @@
                 <a:spcPts val="600"/>
               </a:spcAft>
               <a:defRPr sz="1400">
-                <a:solidFill>
-                  <a:srgbClr val="555555"/>
-                </a:solidFill>
+                <a:solidFill>val="69788B"/&gt;</a:solidFill>
               </a:defRPr>
             </a:pPr>
             <a:r>
@@ -5733,9 +5866,7 @@
                 <a:spcPts val="600"/>
               </a:spcAft>
               <a:defRPr sz="1400">
-                <a:solidFill>
-                  <a:srgbClr val="555555"/>
-                </a:solidFill>
+                <a:solidFill>val="69788B"/&gt;</a:solidFill>
               </a:defRPr>
             </a:pPr>
             <a:r>
@@ -5748,9 +5879,7 @@
                 <a:spcPts val="600"/>
               </a:spcAft>
               <a:defRPr sz="1400">
-                <a:solidFill>
-                  <a:srgbClr val="555555"/>
-                </a:solidFill>
+                <a:solidFill>val="69788B"/&gt;</a:solidFill>
               </a:defRPr>
             </a:pPr>
             <a:r>
@@ -5783,6 +5912,47 @@
           </a:prstGeom>
         </p:spPr>
       </p:pic>
+      <p:sp>
+        <p:nvSpPr>
+          <p:cNvPr id="990001" name="Pied de page FLE"/>
+          <p:cNvSpPr>
+            <a:spLocks noGrp="1"/>
+          </p:cNvSpPr>
+          <p:nvPr/>
+        </p:nvSpPr>
+        <p:spPr>
+          <a:xfrm>
+            <a:off x="-228600" y="6400800"/>
+            <a:ext cx="137160" cy="274320"/>
+          </a:xfrm>
+          <a:prstGeom prst="rect">
+            <a:avLst/>
+          </a:prstGeom>
+        </p:spPr>
+        <p:txBody>
+          <a:bodyPr anchor="b"/>
+          <a:lstStyle/>
+          <a:p>
+            <a:pPr algn="r">
+              <a:defRPr sz="900">
+                <a:solidFill>
+                  <a:srgbClr val="9AA7B6"/>
+                </a:solidFill>
+                <a:latin typeface="Poppins"/>
+              </a:defRPr>
+            </a:pPr>
+            <a:r>
+              <a:rPr lang="fr-FR" sz="900">
+                <a:solidFill>
+                  <a:srgbClr val="9AA7B6"/>
+                </a:solidFill>
+                <a:latin typeface="Poppins"/>
+              </a:rPr>
+              <a:t>Université de Mostaganem — Dr. Madani BELACEL</a:t>
+            </a:r>
+          </a:p>
+        </p:txBody>
+      </p:sp>
     </p:spTree>
   </p:cSld>
   <p:clrMapOvr>
@@ -5796,9 +5966,7 @@
   <p:cSld>
     <p:bg>
       <p:bgPr>
-        <a:solidFill>
-          <a:srgbClr val="FFFFFF"/>
-        </a:solidFill>
+        <a:solidFill>val="FFFFFF"/&gt;</a:solidFill>
         <a:effectLst/>
       </p:bgPr>
     </p:bg>
@@ -5823,9 +5991,7 @@
           <a:prstGeom prst="rect">
             <a:avLst/>
           </a:prstGeom>
-          <a:solidFill>
-            <a:srgbClr val="1A6B3C"/>
-          </a:solidFill>
+          <a:solidFill>val="007A55"/&gt;</a:solidFill>
           <a:ln>
             <a:noFill/>
           </a:ln>
@@ -5876,9 +6042,7 @@
           <a:p>
             <a:pPr algn="l">
               <a:defRPr sz="2600" b="1">
-                <a:solidFill>
-                  <a:srgbClr val="1A6B3C"/>
-                </a:solidFill>
+                <a:solidFill>val="007A55"/&gt;</a:solidFill>
               </a:defRPr>
             </a:pPr>
             <a:r>
@@ -5901,9 +6065,7 @@
           <a:prstGeom prst="rect">
             <a:avLst/>
           </a:prstGeom>
-          <a:solidFill>
-            <a:srgbClr val="2E8654"/>
-          </a:solidFill>
+          <a:solidFill>val="0DA574"/&gt;</a:solidFill>
           <a:ln>
             <a:noFill/>
           </a:ln>
@@ -5957,9 +6119,7 @@
                 <a:spcPts val="1000"/>
               </a:spcAft>
               <a:defRPr sz="1600">
-                <a:solidFill>
-                  <a:srgbClr val="1A1A1A"/>
-                </a:solidFill>
+                <a:solidFill>val="22344A"/&gt;</a:solidFill>
               </a:defRPr>
             </a:pPr>
             <a:r>
@@ -5972,9 +6132,7 @@
                 <a:spcPts val="1000"/>
               </a:spcAft>
               <a:defRPr sz="1600">
-                <a:solidFill>
-                  <a:srgbClr val="1A1A1A"/>
-                </a:solidFill>
+                <a:solidFill>val="22344A"/&gt;</a:solidFill>
               </a:defRPr>
             </a:pPr>
             <a:r>
@@ -5987,9 +6145,7 @@
                 <a:spcPts val="1000"/>
               </a:spcAft>
               <a:defRPr sz="1600">
-                <a:solidFill>
-                  <a:srgbClr val="1A1A1A"/>
-                </a:solidFill>
+                <a:solidFill>val="22344A"/&gt;</a:solidFill>
               </a:defRPr>
             </a:pPr>
             <a:r>
@@ -6002,9 +6158,7 @@
                 <a:spcPts val="1000"/>
               </a:spcAft>
               <a:defRPr sz="1600">
-                <a:solidFill>
-                  <a:srgbClr val="1A1A1A"/>
-                </a:solidFill>
+                <a:solidFill>val="22344A"/&gt;</a:solidFill>
               </a:defRPr>
             </a:pPr>
             <a:r>
@@ -6017,13 +6171,52 @@
                 <a:spcPts val="1000"/>
               </a:spcAft>
               <a:defRPr sz="1600">
+                <a:solidFill>val="22344A"/&gt;</a:solidFill>
+              </a:defRPr>
+            </a:pPr>
+            <a:r>
+              <a:t>  5.  Exercice 5 — Réflexion critique(14 min)</a:t>
+            </a:r>
+          </a:p>
+        </p:txBody>
+      </p:sp>
+      <p:sp>
+        <p:nvSpPr>
+          <p:cNvPr id="990001" name="Pied de page FLE"/>
+          <p:cNvSpPr>
+            <a:spLocks noGrp="1"/>
+          </p:cNvSpPr>
+          <p:nvPr/>
+        </p:nvSpPr>
+        <p:spPr>
+          <a:xfrm>
+            <a:off x="-228600" y="6400800"/>
+            <a:ext cx="137160" cy="274320"/>
+          </a:xfrm>
+          <a:prstGeom prst="rect">
+            <a:avLst/>
+          </a:prstGeom>
+        </p:spPr>
+        <p:txBody>
+          <a:bodyPr anchor="b"/>
+          <a:lstStyle/>
+          <a:p>
+            <a:pPr algn="r">
+              <a:defRPr sz="900">
                 <a:solidFill>
-                  <a:srgbClr val="1A1A1A"/>
+                  <a:srgbClr val="9AA7B6"/>
                 </a:solidFill>
+                <a:latin typeface="Poppins"/>
               </a:defRPr>
             </a:pPr>
             <a:r>
-              <a:t>  5.  Exercice 5 — Réflexion critique(14 min)</a:t>
+              <a:rPr lang="fr-FR" sz="900">
+                <a:solidFill>
+                  <a:srgbClr val="9AA7B6"/>
+                </a:solidFill>
+                <a:latin typeface="Poppins"/>
+              </a:rPr>
+              <a:t>Université de Mostaganem — Dr. Madani BELACEL</a:t>
             </a:r>
           </a:p>
         </p:txBody>
@@ -6041,9 +6234,7 @@
   <p:cSld>
     <p:bg>
       <p:bgPr>
-        <a:solidFill>
-          <a:srgbClr val="FFFFFF"/>
-        </a:solidFill>
+        <a:solidFill>val="FFFFFF"/&gt;</a:solidFill>
         <a:effectLst/>
       </p:bgPr>
     </p:bg>
@@ -6068,9 +6259,7 @@
           <a:prstGeom prst="rect">
             <a:avLst/>
           </a:prstGeom>
-          <a:solidFill>
-            <a:srgbClr val="1A6B3C"/>
-          </a:solidFill>
+          <a:solidFill>val="007A55"/&gt;</a:solidFill>
           <a:ln>
             <a:noFill/>
           </a:ln>
@@ -6121,9 +6310,7 @@
           <a:p>
             <a:pPr algn="l">
               <a:defRPr sz="2200" b="1">
-                <a:solidFill>
-                  <a:srgbClr val="1A6B3C"/>
-                </a:solidFill>
+                <a:solidFill>val="007A55"/&gt;</a:solidFill>
               </a:defRPr>
             </a:pPr>
             <a:r>
@@ -6146,9 +6333,7 @@
           <a:prstGeom prst="rect">
             <a:avLst/>
           </a:prstGeom>
-          <a:solidFill>
-            <a:srgbClr val="2E8654"/>
-          </a:solidFill>
+          <a:solidFill>val="0DA574"/&gt;</a:solidFill>
           <a:ln>
             <a:noFill/>
           </a:ln>
@@ -6202,9 +6387,7 @@
                 <a:spcPts val="600"/>
               </a:spcAft>
               <a:defRPr sz="1500">
-                <a:solidFill>
-                  <a:srgbClr val="1A1A1A"/>
-                </a:solidFill>
+                <a:solidFill>val="22344A"/&gt;</a:solidFill>
               </a:defRPr>
             </a:pPr>
             <a:r>
@@ -6217,9 +6400,7 @@
                 <a:spcPts val="600"/>
               </a:spcAft>
               <a:defRPr sz="1500">
-                <a:solidFill>
-                  <a:srgbClr val="1A1A1A"/>
-                </a:solidFill>
+                <a:solidFill>val="22344A"/&gt;</a:solidFill>
               </a:defRPr>
             </a:pPr>
             <a:r>
@@ -6242,9 +6423,7 @@
           <a:prstGeom prst="rect">
             <a:avLst/>
           </a:prstGeom>
-          <a:solidFill>
-            <a:srgbClr val="FFF3E0"/>
-          </a:solidFill>
+          <a:solidFill>val="EEF1F4"/&gt;</a:solidFill>
           <a:ln>
             <a:noFill/>
           </a:ln>
@@ -6285,9 +6464,7 @@
           <a:prstGeom prst="rect">
             <a:avLst/>
           </a:prstGeom>
-          <a:solidFill>
-            <a:srgbClr val="E86C00"/>
-          </a:solidFill>
+          <a:solidFill>val="F0B429"/&gt;</a:solidFill>
           <a:ln>
             <a:noFill/>
           </a:ln>
@@ -6338,17 +6515,13 @@
           <a:p>
             <a:r>
               <a:rPr sz="1100" b="1">
-                <a:solidFill>
-                  <a:srgbClr val="E86C00"/>
-                </a:solidFill>
+                <a:solidFill>val="F0B429"/&gt;</a:solidFill>
               </a:rPr>
               <a:t>🎯 Intérêt pratique :  </a:t>
             </a:r>
             <a:r>
               <a:rPr sz="1100">
-                <a:solidFill>
-                  <a:srgbClr val="1A1A1A"/>
-                </a:solidFill>
+                <a:solidFill>val="22344A"/&gt;</a:solidFill>
               </a:rPr>
               <a:t>Comprendre la définition des TIC vous aide à parler le même langage que vos futurs collègues enseignants.</a:t>
             </a:r>
@@ -6379,6 +6552,47 @@
           </a:prstGeom>
         </p:spPr>
       </p:pic>
+      <p:sp>
+        <p:nvSpPr>
+          <p:cNvPr id="990001" name="Pied de page FLE"/>
+          <p:cNvSpPr>
+            <a:spLocks noGrp="1"/>
+          </p:cNvSpPr>
+          <p:nvPr/>
+        </p:nvSpPr>
+        <p:spPr>
+          <a:xfrm>
+            <a:off x="-228600" y="6400800"/>
+            <a:ext cx="137160" cy="274320"/>
+          </a:xfrm>
+          <a:prstGeom prst="rect">
+            <a:avLst/>
+          </a:prstGeom>
+        </p:spPr>
+        <p:txBody>
+          <a:bodyPr anchor="b"/>
+          <a:lstStyle/>
+          <a:p>
+            <a:pPr algn="r">
+              <a:defRPr sz="900">
+                <a:solidFill>
+                  <a:srgbClr val="9AA7B6"/>
+                </a:solidFill>
+                <a:latin typeface="Poppins"/>
+              </a:defRPr>
+            </a:pPr>
+            <a:r>
+              <a:rPr lang="fr-FR" sz="900">
+                <a:solidFill>
+                  <a:srgbClr val="9AA7B6"/>
+                </a:solidFill>
+                <a:latin typeface="Poppins"/>
+              </a:rPr>
+              <a:t>Université de Mostaganem — Dr. Madani BELACEL</a:t>
+            </a:r>
+          </a:p>
+        </p:txBody>
+      </p:sp>
     </p:spTree>
   </p:cSld>
   <p:clrMapOvr>
@@ -6392,9 +6606,7 @@
   <p:cSld>
     <p:bg>
       <p:bgPr>
-        <a:solidFill>
-          <a:srgbClr val="FFFFFF"/>
-        </a:solidFill>
+        <a:solidFill>val="FFFFFF"/&gt;</a:solidFill>
         <a:effectLst/>
       </p:bgPr>
     </p:bg>
@@ -6419,9 +6631,7 @@
           <a:prstGeom prst="rect">
             <a:avLst/>
           </a:prstGeom>
-          <a:solidFill>
-            <a:srgbClr val="1A6B3C"/>
-          </a:solidFill>
+          <a:solidFill>val="007A55"/&gt;</a:solidFill>
           <a:ln>
             <a:noFill/>
           </a:ln>
@@ -6472,9 +6682,7 @@
           <a:p>
             <a:pPr algn="l">
               <a:defRPr sz="2200" b="1">
-                <a:solidFill>
-                  <a:srgbClr val="1A6B3C"/>
-                </a:solidFill>
+                <a:solidFill>val="007A55"/&gt;</a:solidFill>
               </a:defRPr>
             </a:pPr>
             <a:r>
@@ -6497,9 +6705,7 @@
           <a:prstGeom prst="rect">
             <a:avLst/>
           </a:prstGeom>
-          <a:solidFill>
-            <a:srgbClr val="2E8654"/>
-          </a:solidFill>
+          <a:solidFill>val="0DA574"/&gt;</a:solidFill>
           <a:ln>
             <a:noFill/>
           </a:ln>
@@ -6553,9 +6759,7 @@
                 <a:spcPts val="600"/>
               </a:spcAft>
               <a:defRPr sz="1500">
-                <a:solidFill>
-                  <a:srgbClr val="1A1A1A"/>
-                </a:solidFill>
+                <a:solidFill>val="22344A"/&gt;</a:solidFill>
               </a:defRPr>
             </a:pPr>
             <a:r>
@@ -6568,9 +6772,7 @@
                 <a:spcPts val="600"/>
               </a:spcAft>
               <a:defRPr sz="1500">
-                <a:solidFill>
-                  <a:srgbClr val="1A1A1A"/>
-                </a:solidFill>
+                <a:solidFill>val="22344A"/&gt;</a:solidFill>
               </a:defRPr>
             </a:pPr>
             <a:r>
@@ -6593,9 +6795,7 @@
           <a:prstGeom prst="rect">
             <a:avLst/>
           </a:prstGeom>
-          <a:solidFill>
-            <a:srgbClr val="FFF3E0"/>
-          </a:solidFill>
+          <a:solidFill>val="EEF1F4"/&gt;</a:solidFill>
           <a:ln>
             <a:noFill/>
           </a:ln>
@@ -6636,9 +6836,7 @@
           <a:prstGeom prst="rect">
             <a:avLst/>
           </a:prstGeom>
-          <a:solidFill>
-            <a:srgbClr val="E86C00"/>
-          </a:solidFill>
+          <a:solidFill>val="F0B429"/&gt;</a:solidFill>
           <a:ln>
             <a:noFill/>
           </a:ln>
@@ -6689,17 +6887,13 @@
           <a:p>
             <a:r>
               <a:rPr sz="1100" b="1">
-                <a:solidFill>
-                  <a:srgbClr val="E86C00"/>
-                </a:solidFill>
+                <a:solidFill>val="F0B429"/&gt;</a:solidFill>
               </a:rPr>
               <a:t>🎯 Intérêt pratique :  </a:t>
             </a:r>
             <a:r>
               <a:rPr sz="1100">
-                <a:solidFill>
-                  <a:srgbClr val="1A1A1A"/>
-                </a:solidFill>
+                <a:solidFill>val="22344A"/&gt;</a:solidFill>
               </a:rPr>
               <a:t>Chaque exposé que vous présentez combine les 3 dimensions : logiciel (technique), contenu (information), partage (communication).</a:t>
             </a:r>
@@ -6730,6 +6924,47 @@
           </a:prstGeom>
         </p:spPr>
       </p:pic>
+      <p:sp>
+        <p:nvSpPr>
+          <p:cNvPr id="990001" name="Pied de page FLE"/>
+          <p:cNvSpPr>
+            <a:spLocks noGrp="1"/>
+          </p:cNvSpPr>
+          <p:nvPr/>
+        </p:nvSpPr>
+        <p:spPr>
+          <a:xfrm>
+            <a:off x="-228600" y="6400800"/>
+            <a:ext cx="137160" cy="274320"/>
+          </a:xfrm>
+          <a:prstGeom prst="rect">
+            <a:avLst/>
+          </a:prstGeom>
+        </p:spPr>
+        <p:txBody>
+          <a:bodyPr anchor="b"/>
+          <a:lstStyle/>
+          <a:p>
+            <a:pPr algn="r">
+              <a:defRPr sz="900">
+                <a:solidFill>
+                  <a:srgbClr val="9AA7B6"/>
+                </a:solidFill>
+                <a:latin typeface="Poppins"/>
+              </a:defRPr>
+            </a:pPr>
+            <a:r>
+              <a:rPr lang="fr-FR" sz="900">
+                <a:solidFill>
+                  <a:srgbClr val="9AA7B6"/>
+                </a:solidFill>
+                <a:latin typeface="Poppins"/>
+              </a:rPr>
+              <a:t>Université de Mostaganem — Dr. Madani BELACEL</a:t>
+            </a:r>
+          </a:p>
+        </p:txBody>
+      </p:sp>
     </p:spTree>
   </p:cSld>
   <p:clrMapOvr>
@@ -6743,9 +6978,7 @@
   <p:cSld>
     <p:bg>
       <p:bgPr>
-        <a:solidFill>
-          <a:srgbClr val="FFFFFF"/>
-        </a:solidFill>
+        <a:solidFill>val="FFFFFF"/&gt;</a:solidFill>
         <a:effectLst/>
       </p:bgPr>
     </p:bg>
@@ -6770,9 +7003,7 @@
           <a:prstGeom prst="rect">
             <a:avLst/>
           </a:prstGeom>
-          <a:solidFill>
-            <a:srgbClr val="1A6B3C"/>
-          </a:solidFill>
+          <a:solidFill>val="007A55"/&gt;</a:solidFill>
           <a:ln>
             <a:noFill/>
           </a:ln>
@@ -6823,9 +7054,7 @@
           <a:p>
             <a:pPr algn="l">
               <a:defRPr sz="2200" b="1">
-                <a:solidFill>
-                  <a:srgbClr val="1A6B3C"/>
-                </a:solidFill>
+                <a:solidFill>val="007A55"/&gt;</a:solidFill>
               </a:defRPr>
             </a:pPr>
             <a:r>
@@ -6848,9 +7077,7 @@
           <a:prstGeom prst="rect">
             <a:avLst/>
           </a:prstGeom>
-          <a:solidFill>
-            <a:srgbClr val="2E8654"/>
-          </a:solidFill>
+          <a:solidFill>val="0DA574"/&gt;</a:solidFill>
           <a:ln>
             <a:noFill/>
           </a:ln>
@@ -6904,9 +7131,7 @@
                 <a:spcPts val="600"/>
               </a:spcAft>
               <a:defRPr sz="1500">
-                <a:solidFill>
-                  <a:srgbClr val="1A1A1A"/>
-                </a:solidFill>
+                <a:solidFill>val="22344A"/&gt;</a:solidFill>
               </a:defRPr>
             </a:pPr>
             <a:r>
@@ -6923,9 +7148,7 @@
                 <a:spcPts val="600"/>
               </a:spcAft>
               <a:defRPr sz="1500">
-                <a:solidFill>
-                  <a:srgbClr val="1A1A1A"/>
-                </a:solidFill>
+                <a:solidFill>val="22344A"/&gt;</a:solidFill>
               </a:defRPr>
             </a:pPr>
             <a:r>
@@ -6948,9 +7171,7 @@
           <a:prstGeom prst="rect">
             <a:avLst/>
           </a:prstGeom>
-          <a:solidFill>
-            <a:srgbClr val="FFF3E0"/>
-          </a:solidFill>
+          <a:solidFill>val="EEF1F4"/&gt;</a:solidFill>
           <a:ln>
             <a:noFill/>
           </a:ln>
@@ -6991,9 +7212,7 @@
           <a:prstGeom prst="rect">
             <a:avLst/>
           </a:prstGeom>
-          <a:solidFill>
-            <a:srgbClr val="E86C00"/>
-          </a:solidFill>
+          <a:solidFill>val="F0B429"/&gt;</a:solidFill>
           <a:ln>
             <a:noFill/>
           </a:ln>
@@ -7044,17 +7263,13 @@
           <a:p>
             <a:r>
               <a:rPr sz="1100" b="1">
-                <a:solidFill>
-                  <a:srgbClr val="E86C00"/>
-                </a:solidFill>
+                <a:solidFill>val="F0B429"/&gt;</a:solidFill>
               </a:rPr>
               <a:t>🎯 Intérêt pratique :  </a:t>
             </a:r>
             <a:r>
               <a:rPr sz="1100">
-                <a:solidFill>
-                  <a:srgbClr val="1A1A1A"/>
-                </a:solidFill>
+                <a:solidFill>val="22344A"/&gt;</a:solidFill>
               </a:rPr>
               <a:t>Savoir traiter, transmettre et sauvegarder vos travaux vous évitera de perdre des heures de travail.</a:t>
             </a:r>
@@ -7085,6 +7300,47 @@
           </a:prstGeom>
         </p:spPr>
       </p:pic>
+      <p:sp>
+        <p:nvSpPr>
+          <p:cNvPr id="990001" name="Pied de page FLE"/>
+          <p:cNvSpPr>
+            <a:spLocks noGrp="1"/>
+          </p:cNvSpPr>
+          <p:nvPr/>
+        </p:nvSpPr>
+        <p:spPr>
+          <a:xfrm>
+            <a:off x="-228600" y="6400800"/>
+            <a:ext cx="137160" cy="274320"/>
+          </a:xfrm>
+          <a:prstGeom prst="rect">
+            <a:avLst/>
+          </a:prstGeom>
+        </p:spPr>
+        <p:txBody>
+          <a:bodyPr anchor="b"/>
+          <a:lstStyle/>
+          <a:p>
+            <a:pPr algn="r">
+              <a:defRPr sz="900">
+                <a:solidFill>
+                  <a:srgbClr val="9AA7B6"/>
+                </a:solidFill>
+                <a:latin typeface="Poppins"/>
+              </a:defRPr>
+            </a:pPr>
+            <a:r>
+              <a:rPr lang="fr-FR" sz="900">
+                <a:solidFill>
+                  <a:srgbClr val="9AA7B6"/>
+                </a:solidFill>
+                <a:latin typeface="Poppins"/>
+              </a:rPr>
+              <a:t>Université de Mostaganem — Dr. Madani BELACEL</a:t>
+            </a:r>
+          </a:p>
+        </p:txBody>
+      </p:sp>
     </p:spTree>
   </p:cSld>
   <p:clrMapOvr>
@@ -7098,9 +7354,7 @@
   <p:cSld>
     <p:bg>
       <p:bgPr>
-        <a:solidFill>
-          <a:srgbClr val="FFFFFF"/>
-        </a:solidFill>
+        <a:solidFill>val="FFFFFF"/&gt;</a:solidFill>
         <a:effectLst/>
       </p:bgPr>
     </p:bg>
@@ -7125,9 +7379,7 @@
           <a:prstGeom prst="rect">
             <a:avLst/>
           </a:prstGeom>
-          <a:solidFill>
-            <a:srgbClr val="1A6B3C"/>
-          </a:solidFill>
+          <a:solidFill>val="007A55"/&gt;</a:solidFill>
           <a:ln>
             <a:noFill/>
           </a:ln>
@@ -7178,9 +7430,7 @@
           <a:p>
             <a:pPr algn="l">
               <a:defRPr sz="2200" b="1">
-                <a:solidFill>
-                  <a:srgbClr val="1A6B3C"/>
-                </a:solidFill>
+                <a:solidFill>val="007A55"/&gt;</a:solidFill>
               </a:defRPr>
             </a:pPr>
             <a:r>
@@ -7203,9 +7453,7 @@
           <a:prstGeom prst="rect">
             <a:avLst/>
           </a:prstGeom>
-          <a:solidFill>
-            <a:srgbClr val="2E8654"/>
-          </a:solidFill>
+          <a:solidFill>val="0DA574"/&gt;</a:solidFill>
           <a:ln>
             <a:noFill/>
           </a:ln>
@@ -7259,9 +7507,7 @@
                 <a:spcPts val="600"/>
               </a:spcAft>
               <a:defRPr sz="1500">
-                <a:solidFill>
-                  <a:srgbClr val="1A1A1A"/>
-                </a:solidFill>
+                <a:solidFill>val="22344A"/&gt;</a:solidFill>
               </a:defRPr>
             </a:pPr>
             <a:r>
@@ -7274,9 +7520,7 @@
                 <a:spcPts val="600"/>
               </a:spcAft>
               <a:defRPr sz="1500">
-                <a:solidFill>
-                  <a:srgbClr val="1A1A1A"/>
-                </a:solidFill>
+                <a:solidFill>val="22344A"/&gt;</a:solidFill>
               </a:defRPr>
             </a:pPr>
             <a:r>
@@ -7299,9 +7543,7 @@
           <a:prstGeom prst="rect">
             <a:avLst/>
           </a:prstGeom>
-          <a:solidFill>
-            <a:srgbClr val="FFF3E0"/>
-          </a:solidFill>
+          <a:solidFill>val="EEF1F4"/&gt;</a:solidFill>
           <a:ln>
             <a:noFill/>
           </a:ln>
@@ -7342,9 +7584,7 @@
           <a:prstGeom prst="rect">
             <a:avLst/>
           </a:prstGeom>
-          <a:solidFill>
-            <a:srgbClr val="E86C00"/>
-          </a:solidFill>
+          <a:solidFill>val="F0B429"/&gt;</a:solidFill>
           <a:ln>
             <a:noFill/>
           </a:ln>
@@ -7395,17 +7635,13 @@
           <a:p>
             <a:r>
               <a:rPr sz="1100" b="1">
-                <a:solidFill>
-                  <a:srgbClr val="E86C00"/>
-                </a:solidFill>
+                <a:solidFill>val="F0B429"/&gt;</a:solidFill>
               </a:rPr>
               <a:t>🎯 Intérêt pratique :  </a:t>
             </a:r>
             <a:r>
               <a:rPr sz="1100">
-                <a:solidFill>
-                  <a:srgbClr val="1A1A1A"/>
-                </a:solidFill>
+                <a:solidFill>val="22344A"/&gt;</a:solidFill>
               </a:rPr>
               <a:t>Cette compétence vous servira dans votre vie universitaire et professionnelle.</a:t>
             </a:r>
@@ -7436,6 +7672,47 @@
           </a:prstGeom>
         </p:spPr>
       </p:pic>
+      <p:sp>
+        <p:nvSpPr>
+          <p:cNvPr id="990001" name="Pied de page FLE"/>
+          <p:cNvSpPr>
+            <a:spLocks noGrp="1"/>
+          </p:cNvSpPr>
+          <p:nvPr/>
+        </p:nvSpPr>
+        <p:spPr>
+          <a:xfrm>
+            <a:off x="-228600" y="6400800"/>
+            <a:ext cx="137160" cy="274320"/>
+          </a:xfrm>
+          <a:prstGeom prst="rect">
+            <a:avLst/>
+          </a:prstGeom>
+        </p:spPr>
+        <p:txBody>
+          <a:bodyPr anchor="b"/>
+          <a:lstStyle/>
+          <a:p>
+            <a:pPr algn="r">
+              <a:defRPr sz="900">
+                <a:solidFill>
+                  <a:srgbClr val="9AA7B6"/>
+                </a:solidFill>
+                <a:latin typeface="Poppins"/>
+              </a:defRPr>
+            </a:pPr>
+            <a:r>
+              <a:rPr lang="fr-FR" sz="900">
+                <a:solidFill>
+                  <a:srgbClr val="9AA7B6"/>
+                </a:solidFill>
+                <a:latin typeface="Poppins"/>
+              </a:rPr>
+              <a:t>Université de Mostaganem — Dr. Madani BELACEL</a:t>
+            </a:r>
+          </a:p>
+        </p:txBody>
+      </p:sp>
     </p:spTree>
   </p:cSld>
   <p:clrMapOvr>
@@ -7449,9 +7726,7 @@
   <p:cSld>
     <p:bg>
       <p:bgPr>
-        <a:solidFill>
-          <a:srgbClr val="FFFFFF"/>
-        </a:solidFill>
+        <a:solidFill>val="FFFFFF"/&gt;</a:solidFill>
         <a:effectLst/>
       </p:bgPr>
     </p:bg>
@@ -7476,9 +7751,7 @@
           <a:prstGeom prst="rect">
             <a:avLst/>
           </a:prstGeom>
-          <a:solidFill>
-            <a:srgbClr val="1A6B3C"/>
-          </a:solidFill>
+          <a:solidFill>val="007A55"/&gt;</a:solidFill>
           <a:ln>
             <a:noFill/>
           </a:ln>
@@ -7529,9 +7802,7 @@
           <a:p>
             <a:pPr algn="l">
               <a:defRPr sz="2200" b="1">
-                <a:solidFill>
-                  <a:srgbClr val="1A6B3C"/>
-                </a:solidFill>
+                <a:solidFill>val="007A55"/&gt;</a:solidFill>
               </a:defRPr>
             </a:pPr>
             <a:r>
@@ -7554,9 +7825,7 @@
           <a:prstGeom prst="rect">
             <a:avLst/>
           </a:prstGeom>
-          <a:solidFill>
-            <a:srgbClr val="2E8654"/>
-          </a:solidFill>
+          <a:solidFill>val="0DA574"/&gt;</a:solidFill>
           <a:ln>
             <a:noFill/>
           </a:ln>
@@ -7610,9 +7879,7 @@
                 <a:spcPts val="600"/>
               </a:spcAft>
               <a:defRPr sz="1500">
-                <a:solidFill>
-                  <a:srgbClr val="1A1A1A"/>
-                </a:solidFill>
+                <a:solidFill>val="22344A"/&gt;</a:solidFill>
               </a:defRPr>
             </a:pPr>
             <a:r>
@@ -7625,9 +7892,7 @@
                 <a:spcPts val="600"/>
               </a:spcAft>
               <a:defRPr sz="1500">
-                <a:solidFill>
-                  <a:srgbClr val="1A1A1A"/>
-                </a:solidFill>
+                <a:solidFill>val="22344A"/&gt;</a:solidFill>
               </a:defRPr>
             </a:pPr>
             <a:r>
@@ -7650,9 +7915,7 @@
           <a:prstGeom prst="rect">
             <a:avLst/>
           </a:prstGeom>
-          <a:solidFill>
-            <a:srgbClr val="FFF3E0"/>
-          </a:solidFill>
+          <a:solidFill>val="EEF1F4"/&gt;</a:solidFill>
           <a:ln>
             <a:noFill/>
           </a:ln>
@@ -7693,9 +7956,7 @@
           <a:prstGeom prst="rect">
             <a:avLst/>
           </a:prstGeom>
-          <a:solidFill>
-            <a:srgbClr val="E86C00"/>
-          </a:solidFill>
+          <a:solidFill>val="F0B429"/&gt;</a:solidFill>
           <a:ln>
             <a:noFill/>
           </a:ln>
@@ -7746,17 +8007,13 @@
           <a:p>
             <a:r>
               <a:rPr sz="1100" b="1">
-                <a:solidFill>
-                  <a:srgbClr val="E86C00"/>
-                </a:solidFill>
+                <a:solidFill>val="F0B429"/&gt;</a:solidFill>
               </a:rPr>
               <a:t>🎯 Intérêt pratique :  </a:t>
             </a:r>
             <a:r>
               <a:rPr sz="1100">
-                <a:solidFill>
-                  <a:srgbClr val="1A1A1A"/>
-                </a:solidFill>
+                <a:solidFill>val="22344A"/&gt;</a:solidFill>
               </a:rPr>
               <a:t>Cette compétence vous servira dans votre vie universitaire et professionnelle.</a:t>
             </a:r>
@@ -7787,6 +8044,47 @@
           </a:prstGeom>
         </p:spPr>
       </p:pic>
+      <p:sp>
+        <p:nvSpPr>
+          <p:cNvPr id="990001" name="Pied de page FLE"/>
+          <p:cNvSpPr>
+            <a:spLocks noGrp="1"/>
+          </p:cNvSpPr>
+          <p:nvPr/>
+        </p:nvSpPr>
+        <p:spPr>
+          <a:xfrm>
+            <a:off x="-228600" y="6400800"/>
+            <a:ext cx="137160" cy="274320"/>
+          </a:xfrm>
+          <a:prstGeom prst="rect">
+            <a:avLst/>
+          </a:prstGeom>
+        </p:spPr>
+        <p:txBody>
+          <a:bodyPr anchor="b"/>
+          <a:lstStyle/>
+          <a:p>
+            <a:pPr algn="r">
+              <a:defRPr sz="900">
+                <a:solidFill>
+                  <a:srgbClr val="9AA7B6"/>
+                </a:solidFill>
+                <a:latin typeface="Poppins"/>
+              </a:defRPr>
+            </a:pPr>
+            <a:r>
+              <a:rPr lang="fr-FR" sz="900">
+                <a:solidFill>
+                  <a:srgbClr val="9AA7B6"/>
+                </a:solidFill>
+                <a:latin typeface="Poppins"/>
+              </a:rPr>
+              <a:t>Université de Mostaganem — Dr. Madani BELACEL</a:t>
+            </a:r>
+          </a:p>
+        </p:txBody>
+      </p:sp>
     </p:spTree>
   </p:cSld>
   <p:clrMapOvr>
@@ -7800,9 +8098,7 @@
   <p:cSld>
     <p:bg>
       <p:bgPr>
-        <a:solidFill>
-          <a:srgbClr val="FFFFFF"/>
-        </a:solidFill>
+        <a:solidFill>val="FFFFFF"/&gt;</a:solidFill>
         <a:effectLst/>
       </p:bgPr>
     </p:bg>
@@ -7827,9 +8123,7 @@
           <a:prstGeom prst="rect">
             <a:avLst/>
           </a:prstGeom>
-          <a:solidFill>
-            <a:srgbClr val="E86C00"/>
-          </a:solidFill>
+          <a:solidFill>val="F0B429"/&gt;</a:solidFill>
           <a:ln>
             <a:noFill/>
           </a:ln>
@@ -7880,9 +8174,7 @@
           <a:p>
             <a:pPr algn="l">
               <a:defRPr sz="2200" b="1">
-                <a:solidFill>
-                  <a:srgbClr val="E86C00"/>
-                </a:solidFill>
+                <a:solidFill>val="F0B429"/&gt;</a:solidFill>
               </a:defRPr>
             </a:pPr>
             <a:r>
@@ -7905,9 +8197,7 @@
           <a:prstGeom prst="rect">
             <a:avLst/>
           </a:prstGeom>
-          <a:solidFill>
-            <a:srgbClr val="E86C00"/>
-          </a:solidFill>
+          <a:solidFill>val="F0B429"/&gt;</a:solidFill>
           <a:ln>
             <a:noFill/>
           </a:ln>
@@ -7961,9 +8251,7 @@
                 <a:spcPts val="600"/>
               </a:spcAft>
               <a:defRPr sz="1500">
-                <a:solidFill>
-                  <a:srgbClr val="1A1A1A"/>
-                </a:solidFill>
+                <a:solidFill>val="22344A"/&gt;</a:solidFill>
               </a:defRPr>
             </a:pPr>
             <a:r>
@@ -7976,9 +8264,7 @@
                 <a:spcPts val="600"/>
               </a:spcAft>
               <a:defRPr sz="1500">
-                <a:solidFill>
-                  <a:srgbClr val="1A1A1A"/>
-                </a:solidFill>
+                <a:solidFill>val="22344A"/&gt;</a:solidFill>
               </a:defRPr>
             </a:pPr>
             <a:r>
@@ -8001,9 +8287,7 @@
           <a:prstGeom prst="rect">
             <a:avLst/>
           </a:prstGeom>
-          <a:solidFill>
-            <a:srgbClr val="FFF8F0"/>
-          </a:solidFill>
+          <a:solidFill>val="F4F6F8"/&gt;</a:solidFill>
           <a:ln>
             <a:noFill/>
           </a:ln>
@@ -8044,9 +8328,7 @@
           <a:prstGeom prst="rect">
             <a:avLst/>
           </a:prstGeom>
-          <a:solidFill>
-            <a:srgbClr val="E86C00"/>
-          </a:solidFill>
+          <a:solidFill>val="F0B429"/&gt;</a:solidFill>
           <a:ln>
             <a:noFill/>
           </a:ln>
@@ -8097,18 +8379,14 @@
           <a:p>
             <a:r>
               <a:rPr sz="1300" b="1">
-                <a:solidFill>
-                  <a:srgbClr val="E86C00"/>
-                </a:solidFill>
+                <a:solidFill>val="F0B429"/&gt;</a:solidFill>
               </a:rPr>
               <a:t>Intérêt pratique pour vous
 </a:t>
             </a:r>
             <a:r>
               <a:rPr sz="1200">
-                <a:solidFill>
-                  <a:srgbClr val="1A1A1A"/>
-                </a:solidFill>
+                <a:solidFill>val="22344A"/&gt;</a:solidFill>
               </a:rPr>
               <a:t>Cette compétence vous servira dans votre vie universitaire et professionnelle.</a:t>
             </a:r>
@@ -8139,6 +8417,47 @@
           </a:prstGeom>
         </p:spPr>
       </p:pic>
+      <p:sp>
+        <p:nvSpPr>
+          <p:cNvPr id="990001" name="Pied de page FLE"/>
+          <p:cNvSpPr>
+            <a:spLocks noGrp="1"/>
+          </p:cNvSpPr>
+          <p:nvPr/>
+        </p:nvSpPr>
+        <p:spPr>
+          <a:xfrm>
+            <a:off x="-228600" y="6400800"/>
+            <a:ext cx="137160" cy="274320"/>
+          </a:xfrm>
+          <a:prstGeom prst="rect">
+            <a:avLst/>
+          </a:prstGeom>
+        </p:spPr>
+        <p:txBody>
+          <a:bodyPr anchor="b"/>
+          <a:lstStyle/>
+          <a:p>
+            <a:pPr algn="r">
+              <a:defRPr sz="900">
+                <a:solidFill>
+                  <a:srgbClr val="9AA7B6"/>
+                </a:solidFill>
+                <a:latin typeface="Poppins"/>
+              </a:defRPr>
+            </a:pPr>
+            <a:r>
+              <a:rPr lang="fr-FR" sz="900">
+                <a:solidFill>
+                  <a:srgbClr val="9AA7B6"/>
+                </a:solidFill>
+                <a:latin typeface="Poppins"/>
+              </a:rPr>
+              <a:t>Université de Mostaganem — Dr. Madani BELACEL</a:t>
+            </a:r>
+          </a:p>
+        </p:txBody>
+      </p:sp>
     </p:spTree>
   </p:cSld>
   <p:clrMapOvr>
@@ -8152,9 +8471,7 @@
   <p:cSld>
     <p:bg>
       <p:bgPr>
-        <a:solidFill>
-          <a:srgbClr val="FFFFFF"/>
-        </a:solidFill>
+        <a:solidFill>val="FFFFFF"/&gt;</a:solidFill>
         <a:effectLst/>
       </p:bgPr>
     </p:bg>
@@ -8179,9 +8496,7 @@
           <a:prstGeom prst="rect">
             <a:avLst/>
           </a:prstGeom>
-          <a:solidFill>
-            <a:srgbClr val="E86C00"/>
-          </a:solidFill>
+          <a:solidFill>val="F0B429"/&gt;</a:solidFill>
           <a:ln>
             <a:noFill/>
           </a:ln>
@@ -8232,9 +8547,7 @@
           <a:p>
             <a:pPr algn="l">
               <a:defRPr sz="2200" b="1">
-                <a:solidFill>
-                  <a:srgbClr val="E86C00"/>
-                </a:solidFill>
+                <a:solidFill>val="F0B429"/&gt;</a:solidFill>
               </a:defRPr>
             </a:pPr>
             <a:r>
@@ -8257,9 +8570,7 @@
           <a:prstGeom prst="rect">
             <a:avLst/>
           </a:prstGeom>
-          <a:solidFill>
-            <a:srgbClr val="E86C00"/>
-          </a:solidFill>
+          <a:solidFill>val="F0B429"/&gt;</a:solidFill>
           <a:ln>
             <a:noFill/>
           </a:ln>
@@ -8313,9 +8624,7 @@
                 <a:spcPts val="600"/>
               </a:spcAft>
               <a:defRPr sz="1500">
-                <a:solidFill>
-                  <a:srgbClr val="1A1A1A"/>
-                </a:solidFill>
+                <a:solidFill>val="22344A"/&gt;</a:solidFill>
               </a:defRPr>
             </a:pPr>
             <a:r>
@@ -8328,9 +8637,7 @@
                 <a:spcPts val="600"/>
               </a:spcAft>
               <a:defRPr sz="1500">
-                <a:solidFill>
-                  <a:srgbClr val="1A1A1A"/>
-                </a:solidFill>
+                <a:solidFill>val="22344A"/&gt;</a:solidFill>
               </a:defRPr>
             </a:pPr>
             <a:r>
@@ -8353,9 +8660,7 @@
           <a:prstGeom prst="rect">
             <a:avLst/>
           </a:prstGeom>
-          <a:solidFill>
-            <a:srgbClr val="FFF8F0"/>
-          </a:solidFill>
+          <a:solidFill>val="F4F6F8"/&gt;</a:solidFill>
           <a:ln>
             <a:noFill/>
           </a:ln>
@@ -8396,9 +8701,7 @@
           <a:prstGeom prst="rect">
             <a:avLst/>
           </a:prstGeom>
-          <a:solidFill>
-            <a:srgbClr val="E86C00"/>
-          </a:solidFill>
+          <a:solidFill>val="F0B429"/&gt;</a:solidFill>
           <a:ln>
             <a:noFill/>
           </a:ln>
@@ -8449,18 +8752,14 @@
           <a:p>
             <a:r>
               <a:rPr sz="1300" b="1">
-                <a:solidFill>
-                  <a:srgbClr val="E86C00"/>
-                </a:solidFill>
+                <a:solidFill>val="F0B429"/&gt;</a:solidFill>
               </a:rPr>
               <a:t>Intérêt pratique pour vous
 </a:t>
             </a:r>
             <a:r>
               <a:rPr sz="1200">
-                <a:solidFill>
-                  <a:srgbClr val="1A1A1A"/>
-                </a:solidFill>
+                <a:solidFill>val="22344A"/&gt;</a:solidFill>
               </a:rPr>
               <a:t>Cette compétence vous servira dans votre vie universitaire et professionnelle.</a:t>
             </a:r>
@@ -8491,6 +8790,47 @@
           </a:prstGeom>
         </p:spPr>
       </p:pic>
+      <p:sp>
+        <p:nvSpPr>
+          <p:cNvPr id="990001" name="Pied de page FLE"/>
+          <p:cNvSpPr>
+            <a:spLocks noGrp="1"/>
+          </p:cNvSpPr>
+          <p:nvPr/>
+        </p:nvSpPr>
+        <p:spPr>
+          <a:xfrm>
+            <a:off x="-228600" y="6400800"/>
+            <a:ext cx="137160" cy="274320"/>
+          </a:xfrm>
+          <a:prstGeom prst="rect">
+            <a:avLst/>
+          </a:prstGeom>
+        </p:spPr>
+        <p:txBody>
+          <a:bodyPr anchor="b"/>
+          <a:lstStyle/>
+          <a:p>
+            <a:pPr algn="r">
+              <a:defRPr sz="900">
+                <a:solidFill>
+                  <a:srgbClr val="9AA7B6"/>
+                </a:solidFill>
+                <a:latin typeface="Poppins"/>
+              </a:defRPr>
+            </a:pPr>
+            <a:r>
+              <a:rPr lang="fr-FR" sz="900">
+                <a:solidFill>
+                  <a:srgbClr val="9AA7B6"/>
+                </a:solidFill>
+                <a:latin typeface="Poppins"/>
+              </a:rPr>
+              <a:t>Université de Mostaganem — Dr. Madani BELACEL</a:t>
+            </a:r>
+          </a:p>
+        </p:txBody>
+      </p:sp>
     </p:spTree>
   </p:cSld>
   <p:clrMapOvr>
@@ -8542,7 +8882,7 @@
     </a:clrScheme>
     <a:fontScheme name="Office">
       <a:majorFont>
-        <a:latin typeface="Calibri"/>
+        <a:latin typeface="Poppins"/>
         <a:ea typeface=""/>
         <a:cs typeface=""/>
         <a:font script="Jpan" typeface="ＭＳ Ｐゴシック"/>
@@ -8577,7 +8917,7 @@
         <a:font script="Geor" typeface="Sylfaen"/>
       </a:majorFont>
       <a:minorFont>
-        <a:latin typeface="Calibri"/>
+        <a:latin typeface="Poppins"/>
         <a:ea typeface=""/>
         <a:cs typeface=""/>
         <a:font script="Jpan" typeface="ＭＳ Ｐゴシック"/>
